--- a/Zarządzanie stanem Anna Leś.pptx
+++ b/Zarządzanie stanem Anna Leś.pptx
@@ -27553,8 +27553,8 @@
         </p:nvSpPr>
         <p:spPr>
           <a:xfrm>
-            <a:off x="453142" y="2659366"/>
-            <a:ext cx="6028339" cy="2942987"/>
+            <a:off x="453142" y="2659367"/>
+            <a:ext cx="6028339" cy="2282888"/>
           </a:xfrm>
         </p:spPr>
         <p:txBody>
@@ -27578,38 +27578,13 @@
               <a:t> Toolkit skalowalnością.</a:t>
             </a:r>
           </a:p>
-        </p:txBody>
-      </p:sp>
-      <p:sp>
-        <p:nvSpPr>
-          <p:cNvPr id="15" name="Data — symbol zastępczy 14">
-            <a:extLst>
-              <a:ext uri="{FF2B5EF4-FFF2-40B4-BE49-F238E27FC236}">
-                <a16:creationId xmlns:a16="http://schemas.microsoft.com/office/drawing/2014/main" id="{F0B1D64A-4BCA-40E9-8D9F-56E3FA5A734D}"/>
-              </a:ext>
-            </a:extLst>
-          </p:cNvPr>
-          <p:cNvSpPr>
-            <a:spLocks noGrp="1"/>
-          </p:cNvSpPr>
-          <p:nvPr>
-            <p:ph type="dt" sz="half" idx="10"/>
-          </p:nvPr>
-        </p:nvSpPr>
-        <p:spPr>
-          <a:xfrm>
-            <a:off x="457200" y="6324600"/>
-            <a:ext cx="2560220" cy="365125"/>
-          </a:xfrm>
-        </p:spPr>
-        <p:txBody>
-          <a:bodyPr rtlCol="0"/>
-          <a:lstStyle/>
           <a:p>
-            <a:pPr rtl="0"/>
-            <a:r>
-              <a:rPr lang="pl-PL"/>
-              <a:t>20XX-02-02</a:t>
+            <a:endParaRPr lang="pl-PL" sz="2000" dirty="0"/>
+          </a:p>
+          <a:p>
+            <a:r>
+              <a:rPr lang="pl-PL" sz="2000" dirty="0"/>
+              <a:t>https://github.com/annales050990/prezentacja.git</a:t>
             </a:r>
           </a:p>
         </p:txBody>
@@ -27744,8 +27719,8 @@
           <a:p>
             <a:pPr rtl="0"/>
             <a:r>
-              <a:rPr lang="pl-PL"/>
-              <a:t>TYTUŁ PREZENTACJI</a:t>
+              <a:rPr lang="pl-PL" dirty="0"/>
+              <a:t>Zarządzanie stanem</a:t>
             </a:r>
           </a:p>
         </p:txBody>
@@ -27844,9 +27819,13 @@
           <a:p>
             <a:pPr rtl="0"/>
             <a:r>
-              <a:rPr lang="pl-PL"/>
-              <a:t>Dziękujemy</a:t>
-            </a:r>
+              <a:rPr lang="pl-PL" dirty="0"/>
+              <a:t>Dziękuję za uwagę</a:t>
+            </a:r>
+            <a:br>
+              <a:rPr lang="pl-PL" dirty="0"/>
+            </a:br>
+            <a:endParaRPr lang="pl-PL" dirty="0"/>
           </a:p>
         </p:txBody>
       </p:sp>
@@ -27878,56 +27857,15 @@
           <a:p>
             <a:pPr rtl="0"/>
             <a:r>
-              <a:rPr lang="pl-PL"/>
-              <a:t>Imię i nazwisko osoby prowadzącej</a:t>
+              <a:rPr lang="pl-PL" dirty="0"/>
+              <a:t>Anna Leś</a:t>
             </a:r>
           </a:p>
           <a:p>
             <a:pPr rtl="0"/>
             <a:r>
-              <a:rPr lang="pl-PL"/>
-              <a:t>Adres e-mail</a:t>
-            </a:r>
-          </a:p>
-          <a:p>
-            <a:pPr rtl="0"/>
-            <a:r>
-              <a:rPr lang="pl-PL"/>
-              <a:t>Witryna internetowa</a:t>
-            </a:r>
-          </a:p>
-        </p:txBody>
-      </p:sp>
-      <p:sp>
-        <p:nvSpPr>
-          <p:cNvPr id="5" name="Data — symbol zastępczy 4">
-            <a:extLst>
-              <a:ext uri="{FF2B5EF4-FFF2-40B4-BE49-F238E27FC236}">
-                <a16:creationId xmlns:a16="http://schemas.microsoft.com/office/drawing/2014/main" id="{19D4122A-7E05-408B-9546-A9E085CE8124}"/>
-              </a:ext>
-            </a:extLst>
-          </p:cNvPr>
-          <p:cNvSpPr>
-            <a:spLocks noGrp="1"/>
-          </p:cNvSpPr>
-          <p:nvPr>
-            <p:ph type="dt" sz="half" idx="10"/>
-          </p:nvPr>
-        </p:nvSpPr>
-        <p:spPr>
-          <a:xfrm>
-            <a:off x="457200" y="6324600"/>
-            <a:ext cx="2560220" cy="365125"/>
-          </a:xfrm>
-        </p:spPr>
-        <p:txBody>
-          <a:bodyPr rtlCol="0"/>
-          <a:lstStyle/>
-          <a:p>
-            <a:pPr rtl="0"/>
-            <a:r>
-              <a:rPr lang="pl-PL"/>
-              <a:t>20XX-02-02</a:t>
+              <a:rPr lang="pl-PL" dirty="0"/>
+              <a:t>annales90@wp.pl</a:t>
             </a:r>
           </a:p>
         </p:txBody>
@@ -27994,8 +27932,8 @@
           <a:p>
             <a:pPr rtl="0"/>
             <a:r>
-              <a:rPr lang="pl-PL"/>
-              <a:t>TYTUŁ PREZENTACJI</a:t>
+              <a:rPr lang="pl-PL" dirty="0"/>
+              <a:t>Zarządzanie stanem</a:t>
             </a:r>
           </a:p>
         </p:txBody>
@@ -33344,6 +33282,15 @@
 </file>
 
 <file path=customXml/item1.xml><?xml version="1.0" encoding="utf-8"?>
+<?mso-contentType ?>
+<FormTemplates xmlns="http://schemas.microsoft.com/sharepoint/v3/contenttype/forms">
+  <Display>DocumentLibraryForm</Display>
+  <Edit>DocumentLibraryForm</Edit>
+  <New>DocumentLibraryForm</New>
+</FormTemplates>
+</file>
+
+<file path=customXml/item2.xml><?xml version="1.0" encoding="utf-8"?>
 <p:properties xmlns:p="http://schemas.microsoft.com/office/2006/metadata/properties" xmlns:xsi="http://www.w3.org/2001/XMLSchema-instance" xmlns:pc="http://schemas.microsoft.com/office/infopath/2007/PartnerControls">
   <documentManagement>
     <_ip_UnifiedCompliancePolicyUIAction xmlns="http://schemas.microsoft.com/sharepoint/v3" xsi:nil="true"/>
@@ -33360,15 +33307,6 @@
     <MediaServiceKeyPoints xmlns="71af3243-3dd4-4a8d-8c0d-dd76da1f02a5" xsi:nil="true"/>
   </documentManagement>
 </p:properties>
-</file>
-
-<file path=customXml/item2.xml><?xml version="1.0" encoding="utf-8"?>
-<?mso-contentType ?>
-<FormTemplates xmlns="http://schemas.microsoft.com/sharepoint/v3/contenttype/forms">
-  <Display>DocumentLibraryForm</Display>
-  <Edit>DocumentLibraryForm</Edit>
-  <New>DocumentLibraryForm</New>
-</FormTemplates>
 </file>
 
 <file path=customXml/item3.xml><?xml version="1.0" encoding="utf-8"?>
@@ -33648,6 +33586,14 @@
 </file>
 
 <file path=customXml/itemProps1.xml><?xml version="1.0" encoding="utf-8"?>
+<ds:datastoreItem xmlns:ds="http://schemas.openxmlformats.org/officeDocument/2006/customXml" ds:itemID="{F49FD94B-CF2B-4485-954E-6805E96E51FA}">
+  <ds:schemaRefs>
+    <ds:schemaRef ds:uri="http://schemas.microsoft.com/sharepoint/v3/contenttype/forms"/>
+  </ds:schemaRefs>
+</ds:datastoreItem>
+</file>
+
+<file path=customXml/itemProps2.xml><?xml version="1.0" encoding="utf-8"?>
 <ds:datastoreItem xmlns:ds="http://schemas.openxmlformats.org/officeDocument/2006/customXml" ds:itemID="{538316A4-DB9D-4B40-83D1-0433996D54B0}">
   <ds:schemaRefs>
     <ds:schemaRef ds:uri="http://schemas.microsoft.com/office/2006/metadata/properties"/>
@@ -33655,14 +33601,6 @@
     <ds:schemaRef ds:uri="http://schemas.microsoft.com/sharepoint/v3"/>
     <ds:schemaRef ds:uri="71af3243-3dd4-4a8d-8c0d-dd76da1f02a5"/>
     <ds:schemaRef ds:uri="230e9df3-be65-4c73-a93b-d1236ebd677e"/>
-  </ds:schemaRefs>
-</ds:datastoreItem>
-</file>
-
-<file path=customXml/itemProps2.xml><?xml version="1.0" encoding="utf-8"?>
-<ds:datastoreItem xmlns:ds="http://schemas.openxmlformats.org/officeDocument/2006/customXml" ds:itemID="{F49FD94B-CF2B-4485-954E-6805E96E51FA}">
-  <ds:schemaRefs>
-    <ds:schemaRef ds:uri="http://schemas.microsoft.com/sharepoint/v3/contenttype/forms"/>
   </ds:schemaRefs>
 </ds:datastoreItem>
 </file>

--- a/Zarządzanie stanem Anna Leś.pptx
+++ b/Zarządzanie stanem Anna Leś.pptx
@@ -5,10 +5,10 @@
     <p:sldMasterId id="2147483708" r:id="rId4"/>
   </p:sldMasterIdLst>
   <p:notesMasterIdLst>
-    <p:notesMasterId r:id="rId17"/>
+    <p:notesMasterId r:id="rId21"/>
   </p:notesMasterIdLst>
   <p:handoutMasterIdLst>
-    <p:handoutMasterId r:id="rId18"/>
+    <p:handoutMasterId r:id="rId22"/>
   </p:handoutMasterIdLst>
   <p:sldIdLst>
     <p:sldId id="256" r:id="rId5"/>
@@ -18,11 +18,15 @@
     <p:sldId id="325" r:id="rId9"/>
     <p:sldId id="378" r:id="rId10"/>
     <p:sldId id="379" r:id="rId11"/>
-    <p:sldId id="380" r:id="rId12"/>
-    <p:sldId id="381" r:id="rId13"/>
-    <p:sldId id="382" r:id="rId14"/>
-    <p:sldId id="328" r:id="rId15"/>
-    <p:sldId id="274" r:id="rId16"/>
+    <p:sldId id="389" r:id="rId12"/>
+    <p:sldId id="390" r:id="rId13"/>
+    <p:sldId id="391" r:id="rId14"/>
+    <p:sldId id="392" r:id="rId15"/>
+    <p:sldId id="393" r:id="rId16"/>
+    <p:sldId id="381" r:id="rId17"/>
+    <p:sldId id="380" r:id="rId18"/>
+    <p:sldId id="328" r:id="rId19"/>
+    <p:sldId id="274" r:id="rId20"/>
   </p:sldIdLst>
   <p:sldSz cx="12192000" cy="6858000"/>
   <p:notesSz cx="6858000" cy="9144000"/>
@@ -3291,7 +3295,7 @@
             <a:pPr rtl="0"/>
             <a:fld id="{61B7CBDB-DB1E-43A6-BE67-609D9DACCE3E}" type="datetime1">
               <a:rPr lang="pl-PL" smtClean="0"/>
-              <a:t>24.04.2026</a:t>
+              <a:t>20.05.2026</a:t>
             </a:fld>
             <a:endParaRPr lang="pl-PL" dirty="0"/>
           </a:p>
@@ -3473,7 +3477,7 @@
             <a:fld id="{6A0CCFF3-92E4-452B-AAFA-B33EA14F2CD5}" type="datetime1">
               <a:rPr lang="pl-PL" noProof="0" smtClean="0"/>
               <a:pPr/>
-              <a:t>24.04.2026</a:t>
+              <a:t>20.05.2026</a:t>
             </a:fld>
             <a:endParaRPr lang="pl-PL" noProof="0"/>
           </a:p>
@@ -3837,7 +3841,7 @@
         <p:cNvPr id="1" name="">
           <a:extLst>
             <a:ext uri="{FF2B5EF4-FFF2-40B4-BE49-F238E27FC236}">
-              <a16:creationId xmlns:a16="http://schemas.microsoft.com/office/drawing/2014/main" id="{7A57FF47-FC11-46E7-F14D-5EF1ADC747AB}"/>
+              <a16:creationId xmlns:a16="http://schemas.microsoft.com/office/drawing/2014/main" id="{3B49D216-58AF-63C0-1159-38F60275CD00}"/>
             </a:ext>
           </a:extLst>
         </p:cNvPr>
@@ -3857,7 +3861,7 @@
           <p:cNvPr id="2" name="Obraz slajdu — symbol zastępczy 1">
             <a:extLst>
               <a:ext uri="{FF2B5EF4-FFF2-40B4-BE49-F238E27FC236}">
-                <a16:creationId xmlns:a16="http://schemas.microsoft.com/office/drawing/2014/main" id="{75C0B0FD-8324-4C37-E407-C1801DEB7D60}"/>
+                <a16:creationId xmlns:a16="http://schemas.microsoft.com/office/drawing/2014/main" id="{9D7B4259-0C98-1F46-530B-9A8060D2CFB1}"/>
               </a:ext>
             </a:extLst>
           </p:cNvPr>
@@ -3875,7 +3879,7 @@
           <p:cNvPr id="3" name="Notatki — symbol zastępczy 2">
             <a:extLst>
               <a:ext uri="{FF2B5EF4-FFF2-40B4-BE49-F238E27FC236}">
-                <a16:creationId xmlns:a16="http://schemas.microsoft.com/office/drawing/2014/main" id="{319D0B9A-9D1D-F3C4-D450-246A41768F2F}"/>
+                <a16:creationId xmlns:a16="http://schemas.microsoft.com/office/drawing/2014/main" id="{AFC0D03E-FC89-E093-043E-C8F407C3079B}"/>
               </a:ext>
             </a:extLst>
           </p:cNvPr>
@@ -3917,7 +3921,7 @@
           <p:cNvPr id="4" name="Numer slajdu — symbol zastępczy 3">
             <a:extLst>
               <a:ext uri="{FF2B5EF4-FFF2-40B4-BE49-F238E27FC236}">
-                <a16:creationId xmlns:a16="http://schemas.microsoft.com/office/drawing/2014/main" id="{7ABF13BB-929A-1B16-FA0F-48BC7FD654CA}"/>
+                <a16:creationId xmlns:a16="http://schemas.microsoft.com/office/drawing/2014/main" id="{837BD7F1-968A-E7C8-C72F-E15BC40C50C5}"/>
               </a:ext>
             </a:extLst>
           </p:cNvPr>
@@ -3945,7 +3949,7 @@
     </p:spTree>
     <p:extLst>
       <p:ext uri="{BB962C8B-B14F-4D97-AF65-F5344CB8AC3E}">
-        <p14:creationId xmlns:p14="http://schemas.microsoft.com/office/powerpoint/2010/main" val="315739099"/>
+        <p14:creationId xmlns:p14="http://schemas.microsoft.com/office/powerpoint/2010/main" val="1281201956"/>
       </p:ext>
     </p:extLst>
   </p:cSld>
@@ -3956,6 +3960,510 @@
 </file>
 
 <file path=ppt/notesSlides/notesSlide11.xml><?xml version="1.0" encoding="utf-8"?>
+<p:notes xmlns:a="http://schemas.openxmlformats.org/drawingml/2006/main" xmlns:r="http://schemas.openxmlformats.org/officeDocument/2006/relationships" xmlns:p="http://schemas.openxmlformats.org/presentationml/2006/main">
+  <p:cSld>
+    <p:spTree>
+      <p:nvGrpSpPr>
+        <p:cNvPr id="1" name="">
+          <a:extLst>
+            <a:ext uri="{FF2B5EF4-FFF2-40B4-BE49-F238E27FC236}">
+              <a16:creationId xmlns:a16="http://schemas.microsoft.com/office/drawing/2014/main" id="{3208CAB3-F5A3-2385-43E5-33382B213E25}"/>
+            </a:ext>
+          </a:extLst>
+        </p:cNvPr>
+        <p:cNvGrpSpPr/>
+        <p:nvPr/>
+      </p:nvGrpSpPr>
+      <p:grpSpPr>
+        <a:xfrm>
+          <a:off x="0" y="0"/>
+          <a:ext cx="0" cy="0"/>
+          <a:chOff x="0" y="0"/>
+          <a:chExt cx="0" cy="0"/>
+        </a:xfrm>
+      </p:grpSpPr>
+      <p:sp>
+        <p:nvSpPr>
+          <p:cNvPr id="2" name="Obraz slajdu — symbol zastępczy 1">
+            <a:extLst>
+              <a:ext uri="{FF2B5EF4-FFF2-40B4-BE49-F238E27FC236}">
+                <a16:creationId xmlns:a16="http://schemas.microsoft.com/office/drawing/2014/main" id="{52CD38EB-5A81-B4B7-85D3-01EE80A6A1E2}"/>
+              </a:ext>
+            </a:extLst>
+          </p:cNvPr>
+          <p:cNvSpPr>
+            <a:spLocks noGrp="1" noRot="1" noChangeAspect="1"/>
+          </p:cNvSpPr>
+          <p:nvPr>
+            <p:ph type="sldImg"/>
+          </p:nvPr>
+        </p:nvSpPr>
+        <p:spPr/>
+      </p:sp>
+      <p:sp>
+        <p:nvSpPr>
+          <p:cNvPr id="3" name="Notatki — symbol zastępczy 2">
+            <a:extLst>
+              <a:ext uri="{FF2B5EF4-FFF2-40B4-BE49-F238E27FC236}">
+                <a16:creationId xmlns:a16="http://schemas.microsoft.com/office/drawing/2014/main" id="{2068CB47-9F22-5A43-2B4A-6F4181101DB0}"/>
+              </a:ext>
+            </a:extLst>
+          </p:cNvPr>
+          <p:cNvSpPr>
+            <a:spLocks noGrp="1"/>
+          </p:cNvSpPr>
+          <p:nvPr>
+            <p:ph type="body" idx="1"/>
+          </p:nvPr>
+        </p:nvSpPr>
+        <p:spPr/>
+        <p:txBody>
+          <a:bodyPr rtlCol="0"/>
+          <a:lstStyle/>
+          <a:p>
+            <a:pPr marL="0" marR="0" lvl="0" indent="0" algn="l" defTabSz="914400" rtl="0" eaLnBrk="1" fontAlgn="auto" latinLnBrk="0" hangingPunct="1">
+              <a:lnSpc>
+                <a:spcPct val="100000"/>
+              </a:lnSpc>
+              <a:spcBef>
+                <a:spcPts val="0"/>
+              </a:spcBef>
+              <a:spcAft>
+                <a:spcPts val="0"/>
+              </a:spcAft>
+              <a:buClrTx/>
+              <a:buSzTx/>
+              <a:buFontTx/>
+              <a:buNone/>
+              <a:tabLst/>
+              <a:defRPr/>
+            </a:pPr>
+            <a:endParaRPr lang="pl-PL"/>
+          </a:p>
+        </p:txBody>
+      </p:sp>
+      <p:sp>
+        <p:nvSpPr>
+          <p:cNvPr id="4" name="Numer slajdu — symbol zastępczy 3">
+            <a:extLst>
+              <a:ext uri="{FF2B5EF4-FFF2-40B4-BE49-F238E27FC236}">
+                <a16:creationId xmlns:a16="http://schemas.microsoft.com/office/drawing/2014/main" id="{B6E01F42-6934-FBDC-D99A-2C1A23FCDD1A}"/>
+              </a:ext>
+            </a:extLst>
+          </p:cNvPr>
+          <p:cNvSpPr>
+            <a:spLocks noGrp="1"/>
+          </p:cNvSpPr>
+          <p:nvPr>
+            <p:ph type="sldNum" sz="quarter" idx="5"/>
+          </p:nvPr>
+        </p:nvSpPr>
+        <p:spPr/>
+        <p:txBody>
+          <a:bodyPr rtlCol="0"/>
+          <a:lstStyle/>
+          <a:p>
+            <a:pPr rtl="0"/>
+            <a:fld id="{EDA29696-2BE8-442F-AE32-06B5202A784A}" type="slidenum">
+              <a:rPr lang="pl-PL" smtClean="0"/>
+              <a:t>11</a:t>
+            </a:fld>
+            <a:endParaRPr lang="pl-PL"/>
+          </a:p>
+        </p:txBody>
+      </p:sp>
+    </p:spTree>
+    <p:extLst>
+      <p:ext uri="{BB962C8B-B14F-4D97-AF65-F5344CB8AC3E}">
+        <p14:creationId xmlns:p14="http://schemas.microsoft.com/office/powerpoint/2010/main" val="4262832714"/>
+      </p:ext>
+    </p:extLst>
+  </p:cSld>
+  <p:clrMapOvr>
+    <a:masterClrMapping/>
+  </p:clrMapOvr>
+</p:notes>
+</file>
+
+<file path=ppt/notesSlides/notesSlide12.xml><?xml version="1.0" encoding="utf-8"?>
+<p:notes xmlns:a="http://schemas.openxmlformats.org/drawingml/2006/main" xmlns:r="http://schemas.openxmlformats.org/officeDocument/2006/relationships" xmlns:p="http://schemas.openxmlformats.org/presentationml/2006/main">
+  <p:cSld>
+    <p:spTree>
+      <p:nvGrpSpPr>
+        <p:cNvPr id="1" name="">
+          <a:extLst>
+            <a:ext uri="{FF2B5EF4-FFF2-40B4-BE49-F238E27FC236}">
+              <a16:creationId xmlns:a16="http://schemas.microsoft.com/office/drawing/2014/main" id="{F852AACC-1D97-42B2-CA2D-96E8313C76B8}"/>
+            </a:ext>
+          </a:extLst>
+        </p:cNvPr>
+        <p:cNvGrpSpPr/>
+        <p:nvPr/>
+      </p:nvGrpSpPr>
+      <p:grpSpPr>
+        <a:xfrm>
+          <a:off x="0" y="0"/>
+          <a:ext cx="0" cy="0"/>
+          <a:chOff x="0" y="0"/>
+          <a:chExt cx="0" cy="0"/>
+        </a:xfrm>
+      </p:grpSpPr>
+      <p:sp>
+        <p:nvSpPr>
+          <p:cNvPr id="2" name="Obraz slajdu — symbol zastępczy 1">
+            <a:extLst>
+              <a:ext uri="{FF2B5EF4-FFF2-40B4-BE49-F238E27FC236}">
+                <a16:creationId xmlns:a16="http://schemas.microsoft.com/office/drawing/2014/main" id="{B1FE9D97-CD3F-1AAF-A7FC-53E507430272}"/>
+              </a:ext>
+            </a:extLst>
+          </p:cNvPr>
+          <p:cNvSpPr>
+            <a:spLocks noGrp="1" noRot="1" noChangeAspect="1"/>
+          </p:cNvSpPr>
+          <p:nvPr>
+            <p:ph type="sldImg"/>
+          </p:nvPr>
+        </p:nvSpPr>
+        <p:spPr/>
+      </p:sp>
+      <p:sp>
+        <p:nvSpPr>
+          <p:cNvPr id="3" name="Notatki — symbol zastępczy 2">
+            <a:extLst>
+              <a:ext uri="{FF2B5EF4-FFF2-40B4-BE49-F238E27FC236}">
+                <a16:creationId xmlns:a16="http://schemas.microsoft.com/office/drawing/2014/main" id="{CB969256-6B6F-650B-E866-A94936CD78AA}"/>
+              </a:ext>
+            </a:extLst>
+          </p:cNvPr>
+          <p:cNvSpPr>
+            <a:spLocks noGrp="1"/>
+          </p:cNvSpPr>
+          <p:nvPr>
+            <p:ph type="body" idx="1"/>
+          </p:nvPr>
+        </p:nvSpPr>
+        <p:spPr/>
+        <p:txBody>
+          <a:bodyPr rtlCol="0"/>
+          <a:lstStyle/>
+          <a:p>
+            <a:pPr marL="0" marR="0" lvl="0" indent="0" algn="l" defTabSz="914400" rtl="0" eaLnBrk="1" fontAlgn="auto" latinLnBrk="0" hangingPunct="1">
+              <a:lnSpc>
+                <a:spcPct val="100000"/>
+              </a:lnSpc>
+              <a:spcBef>
+                <a:spcPts val="0"/>
+              </a:spcBef>
+              <a:spcAft>
+                <a:spcPts val="0"/>
+              </a:spcAft>
+              <a:buClrTx/>
+              <a:buSzTx/>
+              <a:buFontTx/>
+              <a:buNone/>
+              <a:tabLst/>
+              <a:defRPr/>
+            </a:pPr>
+            <a:endParaRPr lang="pl-PL"/>
+          </a:p>
+        </p:txBody>
+      </p:sp>
+      <p:sp>
+        <p:nvSpPr>
+          <p:cNvPr id="4" name="Numer slajdu — symbol zastępczy 3">
+            <a:extLst>
+              <a:ext uri="{FF2B5EF4-FFF2-40B4-BE49-F238E27FC236}">
+                <a16:creationId xmlns:a16="http://schemas.microsoft.com/office/drawing/2014/main" id="{1EC87C9A-E9B1-9D13-EC59-AC4A386CBD4F}"/>
+              </a:ext>
+            </a:extLst>
+          </p:cNvPr>
+          <p:cNvSpPr>
+            <a:spLocks noGrp="1"/>
+          </p:cNvSpPr>
+          <p:nvPr>
+            <p:ph type="sldNum" sz="quarter" idx="5"/>
+          </p:nvPr>
+        </p:nvSpPr>
+        <p:spPr/>
+        <p:txBody>
+          <a:bodyPr rtlCol="0"/>
+          <a:lstStyle/>
+          <a:p>
+            <a:pPr rtl="0"/>
+            <a:fld id="{EDA29696-2BE8-442F-AE32-06B5202A784A}" type="slidenum">
+              <a:rPr lang="pl-PL" smtClean="0"/>
+              <a:t>12</a:t>
+            </a:fld>
+            <a:endParaRPr lang="pl-PL"/>
+          </a:p>
+        </p:txBody>
+      </p:sp>
+    </p:spTree>
+    <p:extLst>
+      <p:ext uri="{BB962C8B-B14F-4D97-AF65-F5344CB8AC3E}">
+        <p14:creationId xmlns:p14="http://schemas.microsoft.com/office/powerpoint/2010/main" val="1383491376"/>
+      </p:ext>
+    </p:extLst>
+  </p:cSld>
+  <p:clrMapOvr>
+    <a:masterClrMapping/>
+  </p:clrMapOvr>
+</p:notes>
+</file>
+
+<file path=ppt/notesSlides/notesSlide13.xml><?xml version="1.0" encoding="utf-8"?>
+<p:notes xmlns:a="http://schemas.openxmlformats.org/drawingml/2006/main" xmlns:r="http://schemas.openxmlformats.org/officeDocument/2006/relationships" xmlns:p="http://schemas.openxmlformats.org/presentationml/2006/main">
+  <p:cSld>
+    <p:spTree>
+      <p:nvGrpSpPr>
+        <p:cNvPr id="1" name="">
+          <a:extLst>
+            <a:ext uri="{FF2B5EF4-FFF2-40B4-BE49-F238E27FC236}">
+              <a16:creationId xmlns:a16="http://schemas.microsoft.com/office/drawing/2014/main" id="{88D97B14-59AF-153C-DF32-299AA9DE33CE}"/>
+            </a:ext>
+          </a:extLst>
+        </p:cNvPr>
+        <p:cNvGrpSpPr/>
+        <p:nvPr/>
+      </p:nvGrpSpPr>
+      <p:grpSpPr>
+        <a:xfrm>
+          <a:off x="0" y="0"/>
+          <a:ext cx="0" cy="0"/>
+          <a:chOff x="0" y="0"/>
+          <a:chExt cx="0" cy="0"/>
+        </a:xfrm>
+      </p:grpSpPr>
+      <p:sp>
+        <p:nvSpPr>
+          <p:cNvPr id="2" name="Obraz slajdu — symbol zastępczy 1">
+            <a:extLst>
+              <a:ext uri="{FF2B5EF4-FFF2-40B4-BE49-F238E27FC236}">
+                <a16:creationId xmlns:a16="http://schemas.microsoft.com/office/drawing/2014/main" id="{1FE75494-08CB-9810-4986-CB75C13E4A78}"/>
+              </a:ext>
+            </a:extLst>
+          </p:cNvPr>
+          <p:cNvSpPr>
+            <a:spLocks noGrp="1" noRot="1" noChangeAspect="1"/>
+          </p:cNvSpPr>
+          <p:nvPr>
+            <p:ph type="sldImg"/>
+          </p:nvPr>
+        </p:nvSpPr>
+        <p:spPr/>
+      </p:sp>
+      <p:sp>
+        <p:nvSpPr>
+          <p:cNvPr id="3" name="Notatki — symbol zastępczy 2">
+            <a:extLst>
+              <a:ext uri="{FF2B5EF4-FFF2-40B4-BE49-F238E27FC236}">
+                <a16:creationId xmlns:a16="http://schemas.microsoft.com/office/drawing/2014/main" id="{F18DB846-01F0-D07E-B4B8-8EF44EA72E10}"/>
+              </a:ext>
+            </a:extLst>
+          </p:cNvPr>
+          <p:cNvSpPr>
+            <a:spLocks noGrp="1"/>
+          </p:cNvSpPr>
+          <p:nvPr>
+            <p:ph type="body" idx="1"/>
+          </p:nvPr>
+        </p:nvSpPr>
+        <p:spPr/>
+        <p:txBody>
+          <a:bodyPr rtlCol="0"/>
+          <a:lstStyle/>
+          <a:p>
+            <a:pPr marL="0" marR="0" lvl="0" indent="0" algn="l" defTabSz="914400" rtl="0" eaLnBrk="1" fontAlgn="auto" latinLnBrk="0" hangingPunct="1">
+              <a:lnSpc>
+                <a:spcPct val="100000"/>
+              </a:lnSpc>
+              <a:spcBef>
+                <a:spcPts val="0"/>
+              </a:spcBef>
+              <a:spcAft>
+                <a:spcPts val="0"/>
+              </a:spcAft>
+              <a:buClrTx/>
+              <a:buSzTx/>
+              <a:buFontTx/>
+              <a:buNone/>
+              <a:tabLst/>
+              <a:defRPr/>
+            </a:pPr>
+            <a:endParaRPr lang="pl-PL"/>
+          </a:p>
+        </p:txBody>
+      </p:sp>
+      <p:sp>
+        <p:nvSpPr>
+          <p:cNvPr id="4" name="Numer slajdu — symbol zastępczy 3">
+            <a:extLst>
+              <a:ext uri="{FF2B5EF4-FFF2-40B4-BE49-F238E27FC236}">
+                <a16:creationId xmlns:a16="http://schemas.microsoft.com/office/drawing/2014/main" id="{CEA7CCFB-573C-C024-BDF2-783E6999EFCB}"/>
+              </a:ext>
+            </a:extLst>
+          </p:cNvPr>
+          <p:cNvSpPr>
+            <a:spLocks noGrp="1"/>
+          </p:cNvSpPr>
+          <p:nvPr>
+            <p:ph type="sldNum" sz="quarter" idx="5"/>
+          </p:nvPr>
+        </p:nvSpPr>
+        <p:spPr/>
+        <p:txBody>
+          <a:bodyPr rtlCol="0"/>
+          <a:lstStyle/>
+          <a:p>
+            <a:pPr rtl="0"/>
+            <a:fld id="{EDA29696-2BE8-442F-AE32-06B5202A784A}" type="slidenum">
+              <a:rPr lang="pl-PL" smtClean="0"/>
+              <a:t>13</a:t>
+            </a:fld>
+            <a:endParaRPr lang="pl-PL"/>
+          </a:p>
+        </p:txBody>
+      </p:sp>
+    </p:spTree>
+    <p:extLst>
+      <p:ext uri="{BB962C8B-B14F-4D97-AF65-F5344CB8AC3E}">
+        <p14:creationId xmlns:p14="http://schemas.microsoft.com/office/powerpoint/2010/main" val="2830365125"/>
+      </p:ext>
+    </p:extLst>
+  </p:cSld>
+  <p:clrMapOvr>
+    <a:masterClrMapping/>
+  </p:clrMapOvr>
+</p:notes>
+</file>
+
+<file path=ppt/notesSlides/notesSlide14.xml><?xml version="1.0" encoding="utf-8"?>
+<p:notes xmlns:a="http://schemas.openxmlformats.org/drawingml/2006/main" xmlns:r="http://schemas.openxmlformats.org/officeDocument/2006/relationships" xmlns:p="http://schemas.openxmlformats.org/presentationml/2006/main">
+  <p:cSld>
+    <p:spTree>
+      <p:nvGrpSpPr>
+        <p:cNvPr id="1" name="">
+          <a:extLst>
+            <a:ext uri="{FF2B5EF4-FFF2-40B4-BE49-F238E27FC236}">
+              <a16:creationId xmlns:a16="http://schemas.microsoft.com/office/drawing/2014/main" id="{BCA483AA-F7FF-1A5B-2E86-AEB209B2B8CC}"/>
+            </a:ext>
+          </a:extLst>
+        </p:cNvPr>
+        <p:cNvGrpSpPr/>
+        <p:nvPr/>
+      </p:nvGrpSpPr>
+      <p:grpSpPr>
+        <a:xfrm>
+          <a:off x="0" y="0"/>
+          <a:ext cx="0" cy="0"/>
+          <a:chOff x="0" y="0"/>
+          <a:chExt cx="0" cy="0"/>
+        </a:xfrm>
+      </p:grpSpPr>
+      <p:sp>
+        <p:nvSpPr>
+          <p:cNvPr id="2" name="Obraz slajdu — symbol zastępczy 1">
+            <a:extLst>
+              <a:ext uri="{FF2B5EF4-FFF2-40B4-BE49-F238E27FC236}">
+                <a16:creationId xmlns:a16="http://schemas.microsoft.com/office/drawing/2014/main" id="{24AE5B0E-8838-4632-75D0-C9D825F4CF32}"/>
+              </a:ext>
+            </a:extLst>
+          </p:cNvPr>
+          <p:cNvSpPr>
+            <a:spLocks noGrp="1" noRot="1" noChangeAspect="1"/>
+          </p:cNvSpPr>
+          <p:nvPr>
+            <p:ph type="sldImg"/>
+          </p:nvPr>
+        </p:nvSpPr>
+        <p:spPr/>
+      </p:sp>
+      <p:sp>
+        <p:nvSpPr>
+          <p:cNvPr id="3" name="Notatki — symbol zastępczy 2">
+            <a:extLst>
+              <a:ext uri="{FF2B5EF4-FFF2-40B4-BE49-F238E27FC236}">
+                <a16:creationId xmlns:a16="http://schemas.microsoft.com/office/drawing/2014/main" id="{FD645956-69BD-51B2-6E85-48DC603EBC2A}"/>
+              </a:ext>
+            </a:extLst>
+          </p:cNvPr>
+          <p:cNvSpPr>
+            <a:spLocks noGrp="1"/>
+          </p:cNvSpPr>
+          <p:nvPr>
+            <p:ph type="body" idx="1"/>
+          </p:nvPr>
+        </p:nvSpPr>
+        <p:spPr/>
+        <p:txBody>
+          <a:bodyPr rtlCol="0"/>
+          <a:lstStyle/>
+          <a:p>
+            <a:pPr marL="0" marR="0" lvl="0" indent="0" algn="l" defTabSz="914400" rtl="0" eaLnBrk="1" fontAlgn="auto" latinLnBrk="0" hangingPunct="1">
+              <a:lnSpc>
+                <a:spcPct val="100000"/>
+              </a:lnSpc>
+              <a:spcBef>
+                <a:spcPts val="0"/>
+              </a:spcBef>
+              <a:spcAft>
+                <a:spcPts val="0"/>
+              </a:spcAft>
+              <a:buClrTx/>
+              <a:buSzTx/>
+              <a:buFontTx/>
+              <a:buNone/>
+              <a:tabLst/>
+              <a:defRPr/>
+            </a:pPr>
+            <a:endParaRPr lang="pl-PL"/>
+          </a:p>
+        </p:txBody>
+      </p:sp>
+      <p:sp>
+        <p:nvSpPr>
+          <p:cNvPr id="4" name="Numer slajdu — symbol zastępczy 3">
+            <a:extLst>
+              <a:ext uri="{FF2B5EF4-FFF2-40B4-BE49-F238E27FC236}">
+                <a16:creationId xmlns:a16="http://schemas.microsoft.com/office/drawing/2014/main" id="{84EE6B4A-8494-5EF2-28E3-FE6D920A3CB3}"/>
+              </a:ext>
+            </a:extLst>
+          </p:cNvPr>
+          <p:cNvSpPr>
+            <a:spLocks noGrp="1"/>
+          </p:cNvSpPr>
+          <p:nvPr>
+            <p:ph type="sldNum" sz="quarter" idx="5"/>
+          </p:nvPr>
+        </p:nvSpPr>
+        <p:spPr/>
+        <p:txBody>
+          <a:bodyPr rtlCol="0"/>
+          <a:lstStyle/>
+          <a:p>
+            <a:pPr rtl="0"/>
+            <a:fld id="{EDA29696-2BE8-442F-AE32-06B5202A784A}" type="slidenum">
+              <a:rPr lang="pl-PL" smtClean="0"/>
+              <a:t>14</a:t>
+            </a:fld>
+            <a:endParaRPr lang="pl-PL"/>
+          </a:p>
+        </p:txBody>
+      </p:sp>
+    </p:spTree>
+    <p:extLst>
+      <p:ext uri="{BB962C8B-B14F-4D97-AF65-F5344CB8AC3E}">
+        <p14:creationId xmlns:p14="http://schemas.microsoft.com/office/powerpoint/2010/main" val="2004791933"/>
+      </p:ext>
+    </p:extLst>
+  </p:cSld>
+  <p:clrMapOvr>
+    <a:masterClrMapping/>
+  </p:clrMapOvr>
+</p:notes>
+</file>
+
+<file path=ppt/notesSlides/notesSlide15.xml><?xml version="1.0" encoding="utf-8"?>
 <p:notes xmlns:a="http://schemas.openxmlformats.org/drawingml/2006/main" xmlns:r="http://schemas.openxmlformats.org/officeDocument/2006/relationships" xmlns:p="http://schemas.openxmlformats.org/presentationml/2006/main">
   <p:cSld>
     <p:spTree>
@@ -4038,7 +4546,7 @@
             <a:pPr rtl="0"/>
             <a:fld id="{EE85D185-D876-4A4B-A351-E623992245C2}" type="slidenum">
               <a:rPr lang="pl-PL" smtClean="0"/>
-              <a:t>11</a:t>
+              <a:t>15</a:t>
             </a:fld>
             <a:endParaRPr lang="pl-PL"/>
           </a:p>
@@ -4057,7 +4565,7 @@
 </p:notes>
 </file>
 
-<file path=ppt/notesSlides/notesSlide12.xml><?xml version="1.0" encoding="utf-8"?>
+<file path=ppt/notesSlides/notesSlide16.xml><?xml version="1.0" encoding="utf-8"?>
 <p:notes xmlns:a="http://schemas.openxmlformats.org/drawingml/2006/main" xmlns:r="http://schemas.openxmlformats.org/officeDocument/2006/relationships" xmlns:p="http://schemas.openxmlformats.org/presentationml/2006/main">
   <p:cSld>
     <p:spTree>
@@ -4140,7 +4648,7 @@
             <a:pPr rtl="0"/>
             <a:fld id="{EE85D185-D876-4A4B-A351-E623992245C2}" type="slidenum">
               <a:rPr lang="pl-PL" smtClean="0"/>
-              <a:t>12</a:t>
+              <a:t>16</a:t>
             </a:fld>
             <a:endParaRPr lang="pl-PL"/>
           </a:p>
@@ -4810,7 +5318,7 @@
         <p:cNvPr id="1" name="">
           <a:extLst>
             <a:ext uri="{FF2B5EF4-FFF2-40B4-BE49-F238E27FC236}">
-              <a16:creationId xmlns:a16="http://schemas.microsoft.com/office/drawing/2014/main" id="{BCA483AA-F7FF-1A5B-2E86-AEB209B2B8CC}"/>
+              <a16:creationId xmlns:a16="http://schemas.microsoft.com/office/drawing/2014/main" id="{AC3B563C-E322-5C75-5C11-A4E3C8C04DFF}"/>
             </a:ext>
           </a:extLst>
         </p:cNvPr>
@@ -4830,7 +5338,7 @@
           <p:cNvPr id="2" name="Obraz slajdu — symbol zastępczy 1">
             <a:extLst>
               <a:ext uri="{FF2B5EF4-FFF2-40B4-BE49-F238E27FC236}">
-                <a16:creationId xmlns:a16="http://schemas.microsoft.com/office/drawing/2014/main" id="{24AE5B0E-8838-4632-75D0-C9D825F4CF32}"/>
+                <a16:creationId xmlns:a16="http://schemas.microsoft.com/office/drawing/2014/main" id="{59942B3A-4C8D-61B5-4AB3-D467C6600F54}"/>
               </a:ext>
             </a:extLst>
           </p:cNvPr>
@@ -4848,7 +5356,7 @@
           <p:cNvPr id="3" name="Notatki — symbol zastępczy 2">
             <a:extLst>
               <a:ext uri="{FF2B5EF4-FFF2-40B4-BE49-F238E27FC236}">
-                <a16:creationId xmlns:a16="http://schemas.microsoft.com/office/drawing/2014/main" id="{FD645956-69BD-51B2-6E85-48DC603EBC2A}"/>
+                <a16:creationId xmlns:a16="http://schemas.microsoft.com/office/drawing/2014/main" id="{FEB45073-4152-F779-4987-F492C44A06B5}"/>
               </a:ext>
             </a:extLst>
           </p:cNvPr>
@@ -4890,7 +5398,7 @@
           <p:cNvPr id="4" name="Numer slajdu — symbol zastępczy 3">
             <a:extLst>
               <a:ext uri="{FF2B5EF4-FFF2-40B4-BE49-F238E27FC236}">
-                <a16:creationId xmlns:a16="http://schemas.microsoft.com/office/drawing/2014/main" id="{84EE6B4A-8494-5EF2-28E3-FE6D920A3CB3}"/>
+                <a16:creationId xmlns:a16="http://schemas.microsoft.com/office/drawing/2014/main" id="{9B1D05CB-C87B-4013-8984-E11AA885EA78}"/>
               </a:ext>
             </a:extLst>
           </p:cNvPr>
@@ -4918,7 +5426,7 @@
     </p:spTree>
     <p:extLst>
       <p:ext uri="{BB962C8B-B14F-4D97-AF65-F5344CB8AC3E}">
-        <p14:creationId xmlns:p14="http://schemas.microsoft.com/office/powerpoint/2010/main" val="2004791933"/>
+        <p14:creationId xmlns:p14="http://schemas.microsoft.com/office/powerpoint/2010/main" val="141234784"/>
       </p:ext>
     </p:extLst>
   </p:cSld>
@@ -4936,7 +5444,7 @@
         <p:cNvPr id="1" name="">
           <a:extLst>
             <a:ext uri="{FF2B5EF4-FFF2-40B4-BE49-F238E27FC236}">
-              <a16:creationId xmlns:a16="http://schemas.microsoft.com/office/drawing/2014/main" id="{88D97B14-59AF-153C-DF32-299AA9DE33CE}"/>
+              <a16:creationId xmlns:a16="http://schemas.microsoft.com/office/drawing/2014/main" id="{7C109724-0C5C-D319-E918-6827AEEAE60B}"/>
             </a:ext>
           </a:extLst>
         </p:cNvPr>
@@ -4956,7 +5464,7 @@
           <p:cNvPr id="2" name="Obraz slajdu — symbol zastępczy 1">
             <a:extLst>
               <a:ext uri="{FF2B5EF4-FFF2-40B4-BE49-F238E27FC236}">
-                <a16:creationId xmlns:a16="http://schemas.microsoft.com/office/drawing/2014/main" id="{1FE75494-08CB-9810-4986-CB75C13E4A78}"/>
+                <a16:creationId xmlns:a16="http://schemas.microsoft.com/office/drawing/2014/main" id="{E42677BD-E102-4FD6-1E43-B56BEA104107}"/>
               </a:ext>
             </a:extLst>
           </p:cNvPr>
@@ -4974,7 +5482,7 @@
           <p:cNvPr id="3" name="Notatki — symbol zastępczy 2">
             <a:extLst>
               <a:ext uri="{FF2B5EF4-FFF2-40B4-BE49-F238E27FC236}">
-                <a16:creationId xmlns:a16="http://schemas.microsoft.com/office/drawing/2014/main" id="{F18DB846-01F0-D07E-B4B8-8EF44EA72E10}"/>
+                <a16:creationId xmlns:a16="http://schemas.microsoft.com/office/drawing/2014/main" id="{048CA627-A376-EEB9-9CA7-F84D5D59AD0A}"/>
               </a:ext>
             </a:extLst>
           </p:cNvPr>
@@ -5016,7 +5524,7 @@
           <p:cNvPr id="4" name="Numer slajdu — symbol zastępczy 3">
             <a:extLst>
               <a:ext uri="{FF2B5EF4-FFF2-40B4-BE49-F238E27FC236}">
-                <a16:creationId xmlns:a16="http://schemas.microsoft.com/office/drawing/2014/main" id="{CEA7CCFB-573C-C024-BDF2-783E6999EFCB}"/>
+                <a16:creationId xmlns:a16="http://schemas.microsoft.com/office/drawing/2014/main" id="{942FF97D-658B-8430-9282-FC34D0376E48}"/>
               </a:ext>
             </a:extLst>
           </p:cNvPr>
@@ -5044,7 +5552,7 @@
     </p:spTree>
     <p:extLst>
       <p:ext uri="{BB962C8B-B14F-4D97-AF65-F5344CB8AC3E}">
-        <p14:creationId xmlns:p14="http://schemas.microsoft.com/office/powerpoint/2010/main" val="2830365125"/>
+        <p14:creationId xmlns:p14="http://schemas.microsoft.com/office/powerpoint/2010/main" val="3276072252"/>
       </p:ext>
     </p:extLst>
   </p:cSld>
@@ -27218,7 +27726,7 @@
         <p:cNvPr id="1" name="">
           <a:extLst>
             <a:ext uri="{FF2B5EF4-FFF2-40B4-BE49-F238E27FC236}">
-              <a16:creationId xmlns:a16="http://schemas.microsoft.com/office/drawing/2014/main" id="{1A878AEC-CD6B-37C6-4AA3-5F5CD054EA8E}"/>
+              <a16:creationId xmlns:a16="http://schemas.microsoft.com/office/drawing/2014/main" id="{4CD956E6-980F-05E2-6097-7C8E80AC6D00}"/>
             </a:ext>
           </a:extLst>
         </p:cNvPr>
@@ -27238,7 +27746,7 @@
           <p:cNvPr id="15" name="Obraz — symbol zastępczy 14" descr="Otwarta książka na biurku">
             <a:extLst>
               <a:ext uri="{FF2B5EF4-FFF2-40B4-BE49-F238E27FC236}">
-                <a16:creationId xmlns:a16="http://schemas.microsoft.com/office/drawing/2014/main" id="{D8D9A0D1-C301-7438-4B08-FA059B89EC79}"/>
+                <a16:creationId xmlns:a16="http://schemas.microsoft.com/office/drawing/2014/main" id="{21AFA5EA-33DE-B993-5672-31F0230C5069}"/>
               </a:ext>
             </a:extLst>
           </p:cNvPr>
@@ -27276,7 +27784,7 @@
           <p:cNvPr id="9" name="Tytuł 8">
             <a:extLst>
               <a:ext uri="{FF2B5EF4-FFF2-40B4-BE49-F238E27FC236}">
-                <a16:creationId xmlns:a16="http://schemas.microsoft.com/office/drawing/2014/main" id="{5510ED67-DEDC-D67A-AF7E-7E25A0E256C3}"/>
+                <a16:creationId xmlns:a16="http://schemas.microsoft.com/office/drawing/2014/main" id="{EF78123C-7685-AA9D-F013-4864DF3296CE}"/>
               </a:ext>
             </a:extLst>
           </p:cNvPr>
@@ -27302,6 +27810,1674 @@
           <a:p>
             <a:pPr algn="ctr"/>
             <a:r>
+              <a:rPr lang="pl-PL" sz="3600" b="1" dirty="0" err="1"/>
+              <a:t>Redux</a:t>
+            </a:r>
+            <a:r>
+              <a:rPr lang="pl-PL" sz="3600" b="1" dirty="0"/>
+              <a:t> Toolkit – index.js, counterSlice.js</a:t>
+            </a:r>
+            <a:endParaRPr lang="pl-PL" sz="3600" dirty="0"/>
+          </a:p>
+        </p:txBody>
+      </p:sp>
+      <p:pic>
+        <p:nvPicPr>
+          <p:cNvPr id="5" name="Obraz 4">
+            <a:extLst>
+              <a:ext uri="{FF2B5EF4-FFF2-40B4-BE49-F238E27FC236}">
+                <a16:creationId xmlns:a16="http://schemas.microsoft.com/office/drawing/2014/main" id="{963EF08A-F02F-C83C-1C44-C0860DF8E710}"/>
+              </a:ext>
+            </a:extLst>
+          </p:cNvPr>
+          <p:cNvPicPr>
+            <a:picLocks noChangeAspect="1"/>
+          </p:cNvPicPr>
+          <p:nvPr/>
+        </p:nvPicPr>
+        <p:blipFill>
+          <a:blip r:embed="rId5"/>
+          <a:stretch>
+            <a:fillRect/>
+          </a:stretch>
+        </p:blipFill>
+        <p:spPr>
+          <a:xfrm>
+            <a:off x="2952827" y="1949116"/>
+            <a:ext cx="5478893" cy="4178829"/>
+          </a:xfrm>
+          <a:prstGeom prst="rect">
+            <a:avLst/>
+          </a:prstGeom>
+        </p:spPr>
+      </p:pic>
+      <p:sp>
+        <p:nvSpPr>
+          <p:cNvPr id="6" name="pole tekstowe 5">
+            <a:extLst>
+              <a:ext uri="{FF2B5EF4-FFF2-40B4-BE49-F238E27FC236}">
+                <a16:creationId xmlns:a16="http://schemas.microsoft.com/office/drawing/2014/main" id="{4519E26E-34D7-9813-E7FF-FD823413F920}"/>
+              </a:ext>
+            </a:extLst>
+          </p:cNvPr>
+          <p:cNvSpPr txBox="1"/>
+          <p:nvPr/>
+        </p:nvSpPr>
+        <p:spPr>
+          <a:xfrm>
+            <a:off x="461206" y="1357408"/>
+            <a:ext cx="5592601" cy="4770537"/>
+          </a:xfrm>
+          <a:prstGeom prst="rect">
+            <a:avLst/>
+          </a:prstGeom>
+          <a:noFill/>
+        </p:spPr>
+        <p:txBody>
+          <a:bodyPr wrap="square" rtlCol="0">
+            <a:spAutoFit/>
+          </a:bodyPr>
+          <a:lstStyle/>
+          <a:p>
+            <a:r>
+              <a:rPr lang="pl-PL" sz="1600" b="1" dirty="0"/>
+              <a:t>import </a:t>
+            </a:r>
+            <a:r>
+              <a:rPr lang="pl-PL" sz="1600" b="1" dirty="0" err="1"/>
+              <a:t>React</a:t>
+            </a:r>
+            <a:r>
+              <a:rPr lang="pl-PL" sz="1600" b="1" dirty="0"/>
+              <a:t> from '</a:t>
+            </a:r>
+            <a:r>
+              <a:rPr lang="pl-PL" sz="1600" b="1" dirty="0" err="1"/>
+              <a:t>react</a:t>
+            </a:r>
+            <a:r>
+              <a:rPr lang="pl-PL" sz="1600" b="1" dirty="0"/>
+              <a:t>';</a:t>
+            </a:r>
+          </a:p>
+          <a:p>
+            <a:r>
+              <a:rPr lang="pl-PL" sz="1600" b="1" dirty="0"/>
+              <a:t>import </a:t>
+            </a:r>
+            <a:r>
+              <a:rPr lang="pl-PL" sz="1600" b="1" dirty="0" err="1"/>
+              <a:t>ReactDOM</a:t>
+            </a:r>
+            <a:r>
+              <a:rPr lang="pl-PL" sz="1600" b="1" dirty="0"/>
+              <a:t> from '</a:t>
+            </a:r>
+            <a:r>
+              <a:rPr lang="pl-PL" sz="1600" b="1" dirty="0" err="1"/>
+              <a:t>react</a:t>
+            </a:r>
+            <a:r>
+              <a:rPr lang="pl-PL" sz="1600" b="1" dirty="0"/>
+              <a:t>-dom/</a:t>
+            </a:r>
+            <a:r>
+              <a:rPr lang="pl-PL" sz="1600" b="1" dirty="0" err="1"/>
+              <a:t>client</a:t>
+            </a:r>
+            <a:r>
+              <a:rPr lang="pl-PL" sz="1600" b="1" dirty="0"/>
+              <a:t>';</a:t>
+            </a:r>
+          </a:p>
+          <a:p>
+            <a:r>
+              <a:rPr lang="pl-PL" sz="1600" b="1" dirty="0"/>
+              <a:t>import </a:t>
+            </a:r>
+            <a:r>
+              <a:rPr lang="pl-PL" sz="1600" b="1" dirty="0" err="1"/>
+              <a:t>App</a:t>
+            </a:r>
+            <a:r>
+              <a:rPr lang="pl-PL" sz="1600" b="1" dirty="0"/>
+              <a:t> from './</a:t>
+            </a:r>
+            <a:r>
+              <a:rPr lang="pl-PL" sz="1600" b="1" dirty="0" err="1"/>
+              <a:t>App</a:t>
+            </a:r>
+            <a:r>
+              <a:rPr lang="pl-PL" sz="1600" b="1" dirty="0"/>
+              <a:t>';</a:t>
+            </a:r>
+          </a:p>
+          <a:p>
+            <a:r>
+              <a:rPr lang="pl-PL" sz="1600" b="1" dirty="0"/>
+              <a:t>import { Provider } from '</a:t>
+            </a:r>
+            <a:r>
+              <a:rPr lang="pl-PL" sz="1600" b="1" dirty="0" err="1"/>
+              <a:t>react-redux</a:t>
+            </a:r>
+            <a:r>
+              <a:rPr lang="pl-PL" sz="1600" b="1" dirty="0"/>
+              <a:t>';</a:t>
+            </a:r>
+          </a:p>
+          <a:p>
+            <a:r>
+              <a:rPr lang="pl-PL" sz="1600" b="1" dirty="0"/>
+              <a:t>import {</a:t>
+            </a:r>
+            <a:r>
+              <a:rPr lang="pl-PL" sz="1600" b="1" dirty="0" err="1"/>
+              <a:t>store</a:t>
+            </a:r>
+            <a:r>
+              <a:rPr lang="pl-PL" sz="1600" b="1" dirty="0"/>
+              <a:t>} from './</a:t>
+            </a:r>
+            <a:r>
+              <a:rPr lang="pl-PL" sz="1600" b="1" dirty="0" err="1"/>
+              <a:t>store</a:t>
+            </a:r>
+            <a:r>
+              <a:rPr lang="pl-PL" sz="1600" b="1" dirty="0"/>
+              <a:t>';</a:t>
+            </a:r>
+          </a:p>
+          <a:p>
+            <a:r>
+              <a:rPr lang="pl-PL" sz="1600" b="1" dirty="0"/>
+              <a:t>import { </a:t>
+            </a:r>
+            <a:r>
+              <a:rPr lang="pl-PL" sz="1600" b="1" dirty="0" err="1"/>
+              <a:t>PersistGate</a:t>
+            </a:r>
+            <a:r>
+              <a:rPr lang="pl-PL" sz="1600" b="1" dirty="0"/>
+              <a:t> } from '</a:t>
+            </a:r>
+            <a:r>
+              <a:rPr lang="pl-PL" sz="1600" b="1" dirty="0" err="1"/>
+              <a:t>redux-persist</a:t>
+            </a:r>
+            <a:r>
+              <a:rPr lang="pl-PL" sz="1600" b="1" dirty="0"/>
+              <a:t>/</a:t>
+            </a:r>
+            <a:r>
+              <a:rPr lang="pl-PL" sz="1600" b="1" dirty="0" err="1"/>
+              <a:t>integration</a:t>
+            </a:r>
+            <a:r>
+              <a:rPr lang="pl-PL" sz="1600" b="1" dirty="0"/>
+              <a:t>/</a:t>
+            </a:r>
+            <a:r>
+              <a:rPr lang="pl-PL" sz="1600" b="1" dirty="0" err="1"/>
+              <a:t>react</a:t>
+            </a:r>
+            <a:r>
+              <a:rPr lang="pl-PL" sz="1600" b="1" dirty="0"/>
+              <a:t>'</a:t>
+            </a:r>
+          </a:p>
+          <a:p>
+            <a:r>
+              <a:rPr lang="pl-PL" sz="1600" b="1" dirty="0"/>
+              <a:t>import { </a:t>
+            </a:r>
+            <a:r>
+              <a:rPr lang="pl-PL" sz="1600" b="1" dirty="0" err="1"/>
+              <a:t>persistor</a:t>
+            </a:r>
+            <a:r>
+              <a:rPr lang="pl-PL" sz="1600" b="1" dirty="0"/>
+              <a:t> } from './</a:t>
+            </a:r>
+            <a:r>
+              <a:rPr lang="pl-PL" sz="1600" b="1" dirty="0" err="1"/>
+              <a:t>store</a:t>
+            </a:r>
+            <a:r>
+              <a:rPr lang="pl-PL" sz="1600" b="1" dirty="0"/>
+              <a:t>'</a:t>
+            </a:r>
+          </a:p>
+          <a:p>
+            <a:endParaRPr lang="pl-PL" sz="1600" b="1" dirty="0"/>
+          </a:p>
+          <a:p>
+            <a:r>
+              <a:rPr lang="pl-PL" sz="1600" b="1" dirty="0" err="1"/>
+              <a:t>const</a:t>
+            </a:r>
+            <a:r>
+              <a:rPr lang="pl-PL" sz="1600" b="1" dirty="0"/>
+              <a:t> </a:t>
+            </a:r>
+            <a:r>
+              <a:rPr lang="pl-PL" sz="1600" b="1" dirty="0" err="1"/>
+              <a:t>root</a:t>
+            </a:r>
+            <a:r>
+              <a:rPr lang="pl-PL" sz="1600" b="1" dirty="0"/>
+              <a:t> = </a:t>
+            </a:r>
+            <a:r>
+              <a:rPr lang="pl-PL" sz="1600" b="1" dirty="0" err="1"/>
+              <a:t>ReactDOM.createRoot</a:t>
+            </a:r>
+            <a:r>
+              <a:rPr lang="pl-PL" sz="1600" b="1" dirty="0"/>
+              <a:t>(</a:t>
+            </a:r>
+            <a:r>
+              <a:rPr lang="pl-PL" sz="1600" b="1" dirty="0" err="1"/>
+              <a:t>document.getElementById</a:t>
+            </a:r>
+            <a:r>
+              <a:rPr lang="pl-PL" sz="1600" b="1" dirty="0"/>
+              <a:t>('</a:t>
+            </a:r>
+            <a:r>
+              <a:rPr lang="pl-PL" sz="1600" b="1" dirty="0" err="1"/>
+              <a:t>root</a:t>
+            </a:r>
+            <a:r>
+              <a:rPr lang="pl-PL" sz="1600" b="1" dirty="0"/>
+              <a:t>'))</a:t>
+            </a:r>
+          </a:p>
+          <a:p>
+            <a:r>
+              <a:rPr lang="pl-PL" sz="1600" b="1" dirty="0" err="1"/>
+              <a:t>root.render</a:t>
+            </a:r>
+            <a:r>
+              <a:rPr lang="pl-PL" sz="1600" b="1" dirty="0"/>
+              <a:t>(</a:t>
+            </a:r>
+          </a:p>
+          <a:p>
+            <a:r>
+              <a:rPr lang="pl-PL" sz="1600" b="1" dirty="0"/>
+              <a:t>&lt;Provider </a:t>
+            </a:r>
+            <a:r>
+              <a:rPr lang="pl-PL" sz="1600" b="1" dirty="0" err="1"/>
+              <a:t>store</a:t>
+            </a:r>
+            <a:r>
+              <a:rPr lang="pl-PL" sz="1600" b="1" dirty="0"/>
+              <a:t>={</a:t>
+            </a:r>
+            <a:r>
+              <a:rPr lang="pl-PL" sz="1600" b="1" dirty="0" err="1"/>
+              <a:t>store</a:t>
+            </a:r>
+            <a:r>
+              <a:rPr lang="pl-PL" sz="1600" b="1" dirty="0"/>
+              <a:t>}&gt;</a:t>
+            </a:r>
+          </a:p>
+          <a:p>
+            <a:r>
+              <a:rPr lang="pl-PL" sz="1600" b="1" dirty="0"/>
+              <a:t>  &lt;</a:t>
+            </a:r>
+            <a:r>
+              <a:rPr lang="pl-PL" sz="1600" b="1" dirty="0" err="1"/>
+              <a:t>PersistGate</a:t>
+            </a:r>
+            <a:r>
+              <a:rPr lang="pl-PL" sz="1600" b="1" dirty="0"/>
+              <a:t> </a:t>
+            </a:r>
+            <a:r>
+              <a:rPr lang="pl-PL" sz="1600" b="1" dirty="0" err="1"/>
+              <a:t>loading</a:t>
+            </a:r>
+            <a:r>
+              <a:rPr lang="pl-PL" sz="1600" b="1" dirty="0"/>
+              <a:t>={</a:t>
+            </a:r>
+            <a:r>
+              <a:rPr lang="pl-PL" sz="1600" b="1" dirty="0" err="1"/>
+              <a:t>null</a:t>
+            </a:r>
+            <a:r>
+              <a:rPr lang="pl-PL" sz="1600" b="1" dirty="0"/>
+              <a:t>} </a:t>
+            </a:r>
+            <a:r>
+              <a:rPr lang="pl-PL" sz="1600" b="1" dirty="0" err="1"/>
+              <a:t>persistor</a:t>
+            </a:r>
+            <a:r>
+              <a:rPr lang="pl-PL" sz="1600" b="1" dirty="0"/>
+              <a:t>={</a:t>
+            </a:r>
+            <a:r>
+              <a:rPr lang="pl-PL" sz="1600" b="1" dirty="0" err="1"/>
+              <a:t>persistor</a:t>
+            </a:r>
+            <a:r>
+              <a:rPr lang="pl-PL" sz="1600" b="1" dirty="0"/>
+              <a:t>}&gt;</a:t>
+            </a:r>
+          </a:p>
+          <a:p>
+            <a:r>
+              <a:rPr lang="pl-PL" sz="1600" b="1" dirty="0"/>
+              <a:t>    &lt;</a:t>
+            </a:r>
+            <a:r>
+              <a:rPr lang="pl-PL" sz="1600" b="1" dirty="0" err="1"/>
+              <a:t>App</a:t>
+            </a:r>
+            <a:r>
+              <a:rPr lang="pl-PL" sz="1600" b="1" dirty="0"/>
+              <a:t> /&gt;</a:t>
+            </a:r>
+          </a:p>
+          <a:p>
+            <a:r>
+              <a:rPr lang="pl-PL" sz="1600" b="1" dirty="0"/>
+              <a:t>  &lt;/</a:t>
+            </a:r>
+            <a:r>
+              <a:rPr lang="pl-PL" sz="1600" b="1" dirty="0" err="1"/>
+              <a:t>PersistGate</a:t>
+            </a:r>
+            <a:r>
+              <a:rPr lang="pl-PL" sz="1600" b="1" dirty="0"/>
+              <a:t>&gt;</a:t>
+            </a:r>
+          </a:p>
+          <a:p>
+            <a:r>
+              <a:rPr lang="pl-PL" sz="1600" b="1" dirty="0"/>
+              <a:t>&lt;/Provider&gt;</a:t>
+            </a:r>
+          </a:p>
+          <a:p>
+            <a:r>
+              <a:rPr lang="pl-PL" sz="1600" b="1" dirty="0"/>
+              <a:t>)</a:t>
+            </a:r>
+          </a:p>
+        </p:txBody>
+      </p:sp>
+      <p:sp>
+        <p:nvSpPr>
+          <p:cNvPr id="7" name="pole tekstowe 6">
+            <a:extLst>
+              <a:ext uri="{FF2B5EF4-FFF2-40B4-BE49-F238E27FC236}">
+                <a16:creationId xmlns:a16="http://schemas.microsoft.com/office/drawing/2014/main" id="{2D589532-61FC-2B8E-96BB-A085C7B16CFB}"/>
+              </a:ext>
+            </a:extLst>
+          </p:cNvPr>
+          <p:cNvSpPr txBox="1"/>
+          <p:nvPr/>
+        </p:nvSpPr>
+        <p:spPr>
+          <a:xfrm>
+            <a:off x="6442872" y="1443841"/>
+            <a:ext cx="5592601" cy="3970318"/>
+          </a:xfrm>
+          <a:prstGeom prst="rect">
+            <a:avLst/>
+          </a:prstGeom>
+          <a:noFill/>
+        </p:spPr>
+        <p:txBody>
+          <a:bodyPr wrap="square" rtlCol="0">
+            <a:spAutoFit/>
+          </a:bodyPr>
+          <a:lstStyle/>
+          <a:p>
+            <a:r>
+              <a:rPr lang="pl-PL" b="1" dirty="0"/>
+              <a:t>import {</a:t>
+            </a:r>
+            <a:r>
+              <a:rPr lang="pl-PL" b="1" dirty="0" err="1"/>
+              <a:t>createSlice</a:t>
+            </a:r>
+            <a:r>
+              <a:rPr lang="pl-PL" b="1" dirty="0"/>
+              <a:t>} from '@</a:t>
+            </a:r>
+            <a:r>
+              <a:rPr lang="pl-PL" b="1" dirty="0" err="1"/>
+              <a:t>reduxjs</a:t>
+            </a:r>
+            <a:r>
+              <a:rPr lang="pl-PL" b="1" dirty="0"/>
+              <a:t>/</a:t>
+            </a:r>
+            <a:r>
+              <a:rPr lang="pl-PL" b="1" dirty="0" err="1"/>
+              <a:t>toolkit</a:t>
+            </a:r>
+            <a:r>
+              <a:rPr lang="pl-PL" b="1" dirty="0"/>
+              <a:t>';</a:t>
+            </a:r>
+          </a:p>
+          <a:p>
+            <a:endParaRPr lang="pl-PL" b="1" dirty="0"/>
+          </a:p>
+          <a:p>
+            <a:r>
+              <a:rPr lang="pl-PL" b="1" dirty="0" err="1"/>
+              <a:t>const</a:t>
+            </a:r>
+            <a:r>
+              <a:rPr lang="pl-PL" b="1" dirty="0"/>
+              <a:t> </a:t>
+            </a:r>
+            <a:r>
+              <a:rPr lang="pl-PL" b="1" dirty="0" err="1"/>
+              <a:t>counterSlice</a:t>
+            </a:r>
+            <a:r>
+              <a:rPr lang="pl-PL" b="1" dirty="0"/>
+              <a:t> = </a:t>
+            </a:r>
+            <a:r>
+              <a:rPr lang="pl-PL" b="1" dirty="0" err="1"/>
+              <a:t>createSlice</a:t>
+            </a:r>
+            <a:r>
+              <a:rPr lang="pl-PL" b="1" dirty="0"/>
+              <a:t>({</a:t>
+            </a:r>
+          </a:p>
+          <a:p>
+            <a:r>
+              <a:rPr lang="pl-PL" b="1" dirty="0"/>
+              <a:t>    </a:t>
+            </a:r>
+            <a:r>
+              <a:rPr lang="pl-PL" b="1" dirty="0" err="1"/>
+              <a:t>name</a:t>
+            </a:r>
+            <a:r>
+              <a:rPr lang="pl-PL" b="1" dirty="0"/>
+              <a:t>: '</a:t>
+            </a:r>
+            <a:r>
+              <a:rPr lang="pl-PL" b="1" dirty="0" err="1"/>
+              <a:t>counter</a:t>
+            </a:r>
+            <a:r>
+              <a:rPr lang="pl-PL" b="1" dirty="0"/>
+              <a:t>',</a:t>
+            </a:r>
+          </a:p>
+          <a:p>
+            <a:r>
+              <a:rPr lang="pl-PL" b="1" dirty="0"/>
+              <a:t>    </a:t>
+            </a:r>
+            <a:r>
+              <a:rPr lang="pl-PL" b="1" dirty="0" err="1"/>
+              <a:t>initialState</a:t>
+            </a:r>
+            <a:r>
+              <a:rPr lang="pl-PL" b="1" dirty="0"/>
+              <a:t>: { </a:t>
+            </a:r>
+            <a:r>
+              <a:rPr lang="pl-PL" b="1" dirty="0" err="1"/>
+              <a:t>value</a:t>
+            </a:r>
+            <a:r>
+              <a:rPr lang="pl-PL" b="1" dirty="0"/>
+              <a:t>: 0},</a:t>
+            </a:r>
+          </a:p>
+          <a:p>
+            <a:r>
+              <a:rPr lang="pl-PL" b="1" dirty="0"/>
+              <a:t>    </a:t>
+            </a:r>
+            <a:r>
+              <a:rPr lang="pl-PL" b="1" dirty="0" err="1"/>
+              <a:t>reducers</a:t>
+            </a:r>
+            <a:r>
+              <a:rPr lang="pl-PL" b="1" dirty="0"/>
+              <a:t>: {</a:t>
+            </a:r>
+          </a:p>
+          <a:p>
+            <a:r>
+              <a:rPr lang="pl-PL" b="1" dirty="0"/>
+              <a:t>        </a:t>
+            </a:r>
+            <a:r>
+              <a:rPr lang="pl-PL" b="1" dirty="0" err="1"/>
+              <a:t>increment</a:t>
+            </a:r>
+            <a:r>
+              <a:rPr lang="pl-PL" b="1" dirty="0"/>
+              <a:t>: (</a:t>
+            </a:r>
+            <a:r>
+              <a:rPr lang="pl-PL" b="1" dirty="0" err="1"/>
+              <a:t>state</a:t>
+            </a:r>
+            <a:r>
+              <a:rPr lang="pl-PL" b="1" dirty="0"/>
+              <a:t>) =&gt; {</a:t>
+            </a:r>
+            <a:r>
+              <a:rPr lang="pl-PL" b="1" dirty="0" err="1"/>
+              <a:t>state.value</a:t>
+            </a:r>
+            <a:r>
+              <a:rPr lang="pl-PL" b="1" dirty="0"/>
+              <a:t> += 1},</a:t>
+            </a:r>
+          </a:p>
+          <a:p>
+            <a:r>
+              <a:rPr lang="pl-PL" b="1" dirty="0"/>
+              <a:t>        reset: (</a:t>
+            </a:r>
+            <a:r>
+              <a:rPr lang="pl-PL" b="1" dirty="0" err="1"/>
+              <a:t>state</a:t>
+            </a:r>
+            <a:r>
+              <a:rPr lang="pl-PL" b="1" dirty="0"/>
+              <a:t>) =&gt; { </a:t>
+            </a:r>
+            <a:r>
+              <a:rPr lang="pl-PL" b="1" dirty="0" err="1"/>
+              <a:t>state.value</a:t>
+            </a:r>
+            <a:r>
+              <a:rPr lang="pl-PL" b="1" dirty="0"/>
+              <a:t> = 0 }</a:t>
+            </a:r>
+          </a:p>
+          <a:p>
+            <a:r>
+              <a:rPr lang="pl-PL" b="1" dirty="0"/>
+              <a:t>    }</a:t>
+            </a:r>
+          </a:p>
+          <a:p>
+            <a:r>
+              <a:rPr lang="pl-PL" b="1" dirty="0"/>
+              <a:t>})</a:t>
+            </a:r>
+          </a:p>
+          <a:p>
+            <a:endParaRPr lang="pl-PL" b="1" dirty="0"/>
+          </a:p>
+          <a:p>
+            <a:r>
+              <a:rPr lang="pl-PL" b="1" dirty="0"/>
+              <a:t>export </a:t>
+            </a:r>
+            <a:r>
+              <a:rPr lang="pl-PL" b="1" dirty="0" err="1"/>
+              <a:t>const</a:t>
+            </a:r>
+            <a:r>
+              <a:rPr lang="pl-PL" b="1" dirty="0"/>
+              <a:t> { </a:t>
+            </a:r>
+            <a:r>
+              <a:rPr lang="pl-PL" b="1" dirty="0" err="1"/>
+              <a:t>increment</a:t>
+            </a:r>
+            <a:r>
+              <a:rPr lang="pl-PL" b="1" dirty="0"/>
+              <a:t>, reset } = </a:t>
+            </a:r>
+            <a:r>
+              <a:rPr lang="pl-PL" b="1" dirty="0" err="1"/>
+              <a:t>counterSlice.actions</a:t>
+            </a:r>
+            <a:endParaRPr lang="pl-PL" b="1" dirty="0"/>
+          </a:p>
+          <a:p>
+            <a:r>
+              <a:rPr lang="pl-PL" b="1" dirty="0"/>
+              <a:t>export </a:t>
+            </a:r>
+            <a:r>
+              <a:rPr lang="pl-PL" b="1" dirty="0" err="1"/>
+              <a:t>default</a:t>
+            </a:r>
+            <a:r>
+              <a:rPr lang="pl-PL" b="1" dirty="0"/>
+              <a:t> </a:t>
+            </a:r>
+            <a:r>
+              <a:rPr lang="pl-PL" b="1" dirty="0" err="1"/>
+              <a:t>counterSlice.reducer</a:t>
+            </a:r>
+            <a:endParaRPr lang="pl-PL" b="1" dirty="0"/>
+          </a:p>
+        </p:txBody>
+      </p:sp>
+    </p:spTree>
+    <p:extLst>
+      <p:ext uri="{BB962C8B-B14F-4D97-AF65-F5344CB8AC3E}">
+        <p14:creationId xmlns:p14="http://schemas.microsoft.com/office/powerpoint/2010/main" val="423936433"/>
+      </p:ext>
+    </p:extLst>
+  </p:cSld>
+  <p:clrMapOvr>
+    <a:masterClrMapping/>
+  </p:clrMapOvr>
+</p:sld>
+</file>
+
+<file path=ppt/slides/slide11.xml><?xml version="1.0" encoding="utf-8"?>
+<p:sld xmlns:a="http://schemas.openxmlformats.org/drawingml/2006/main" xmlns:r="http://schemas.openxmlformats.org/officeDocument/2006/relationships" xmlns:p="http://schemas.openxmlformats.org/presentationml/2006/main">
+  <p:cSld>
+    <p:spTree>
+      <p:nvGrpSpPr>
+        <p:cNvPr id="1" name="">
+          <a:extLst>
+            <a:ext uri="{FF2B5EF4-FFF2-40B4-BE49-F238E27FC236}">
+              <a16:creationId xmlns:a16="http://schemas.microsoft.com/office/drawing/2014/main" id="{A8698174-8D7D-7B17-F1F5-B51525EA0CE7}"/>
+            </a:ext>
+          </a:extLst>
+        </p:cNvPr>
+        <p:cNvGrpSpPr/>
+        <p:nvPr/>
+      </p:nvGrpSpPr>
+      <p:grpSpPr>
+        <a:xfrm>
+          <a:off x="0" y="0"/>
+          <a:ext cx="0" cy="0"/>
+          <a:chOff x="0" y="0"/>
+          <a:chExt cx="0" cy="0"/>
+        </a:xfrm>
+      </p:grpSpPr>
+      <p:pic>
+        <p:nvPicPr>
+          <p:cNvPr id="15" name="Obraz — symbol zastępczy 14" descr="Otwarta książka na biurku">
+            <a:extLst>
+              <a:ext uri="{FF2B5EF4-FFF2-40B4-BE49-F238E27FC236}">
+                <a16:creationId xmlns:a16="http://schemas.microsoft.com/office/drawing/2014/main" id="{8D93816D-E4C0-B583-79F5-37E759F6B7CA}"/>
+              </a:ext>
+            </a:extLst>
+          </p:cNvPr>
+          <p:cNvPicPr>
+            <a:picLocks noGrp="1" noChangeAspect="1"/>
+          </p:cNvPicPr>
+          <p:nvPr>
+            <p:ph type="pic" sz="quarter" idx="13"/>
+          </p:nvPr>
+        </p:nvPicPr>
+        <p:blipFill rotWithShape="1">
+          <a:blip r:embed="rId3">
+            <a:extLst>
+              <a:ext uri="{28A0092B-C50C-407E-A947-70E740481C1C}">
+                <a14:useLocalDpi xmlns:a14="http://schemas.microsoft.com/office/drawing/2010/main" val="0"/>
+              </a:ext>
+            </a:extLst>
+          </a:blip>
+          <a:srcRect/>
+          <a:stretch/>
+        </p:blipFill>
+        <p:spPr>
+          <a:xfrm>
+            <a:off x="12192" y="2849880"/>
+            <a:ext cx="12143232" cy="4008120"/>
+          </a:xfrm>
+          <a:blipFill>
+            <a:blip r:embed="rId4"/>
+            <a:tile tx="0" ty="0" sx="100000" sy="100000" flip="none" algn="tl"/>
+          </a:blipFill>
+        </p:spPr>
+      </p:pic>
+      <p:sp>
+        <p:nvSpPr>
+          <p:cNvPr id="9" name="Tytuł 8">
+            <a:extLst>
+              <a:ext uri="{FF2B5EF4-FFF2-40B4-BE49-F238E27FC236}">
+                <a16:creationId xmlns:a16="http://schemas.microsoft.com/office/drawing/2014/main" id="{83191FF2-98E9-6880-8399-8060331FCC27}"/>
+              </a:ext>
+            </a:extLst>
+          </p:cNvPr>
+          <p:cNvSpPr>
+            <a:spLocks noGrp="1"/>
+          </p:cNvSpPr>
+          <p:nvPr>
+            <p:ph type="ctrTitle"/>
+          </p:nvPr>
+        </p:nvSpPr>
+        <p:spPr>
+          <a:xfrm>
+            <a:off x="12192" y="-1"/>
+            <a:ext cx="12167616" cy="4284581"/>
+          </a:xfrm>
+          <a:solidFill>
+            <a:schemeClr val="accent5"/>
+          </a:solidFill>
+        </p:spPr>
+        <p:txBody>
+          <a:bodyPr rtlCol="0"/>
+          <a:lstStyle/>
+          <a:p>
+            <a:pPr algn="ctr"/>
+            <a:r>
+              <a:rPr lang="pl-PL" sz="4800" b="1" dirty="0" err="1"/>
+              <a:t>Redux</a:t>
+            </a:r>
+            <a:r>
+              <a:rPr lang="pl-PL" sz="4800" b="1" dirty="0"/>
+              <a:t> Toolkit – kroki do zapamiętywania stanu</a:t>
+            </a:r>
+          </a:p>
+        </p:txBody>
+      </p:sp>
+      <p:sp>
+        <p:nvSpPr>
+          <p:cNvPr id="6" name="pole tekstowe 5">
+            <a:extLst>
+              <a:ext uri="{FF2B5EF4-FFF2-40B4-BE49-F238E27FC236}">
+                <a16:creationId xmlns:a16="http://schemas.microsoft.com/office/drawing/2014/main" id="{082F7134-E541-D335-BAAC-8A5343196423}"/>
+              </a:ext>
+            </a:extLst>
+          </p:cNvPr>
+          <p:cNvSpPr txBox="1"/>
+          <p:nvPr/>
+        </p:nvSpPr>
+        <p:spPr>
+          <a:xfrm>
+            <a:off x="487070" y="2061611"/>
+            <a:ext cx="6011701" cy="4093428"/>
+          </a:xfrm>
+          <a:prstGeom prst="rect">
+            <a:avLst/>
+          </a:prstGeom>
+          <a:noFill/>
+        </p:spPr>
+        <p:txBody>
+          <a:bodyPr wrap="square" rtlCol="0">
+            <a:spAutoFit/>
+          </a:bodyPr>
+          <a:lstStyle/>
+          <a:p>
+            <a:r>
+              <a:rPr lang="pl-PL" sz="2000" b="1" dirty="0"/>
+              <a:t>Instalacja </a:t>
+            </a:r>
+          </a:p>
+          <a:p>
+            <a:r>
+              <a:rPr lang="pl-PL" sz="2000" dirty="0" err="1"/>
+              <a:t>npm</a:t>
+            </a:r>
+            <a:r>
+              <a:rPr lang="pl-PL" sz="2000" dirty="0"/>
+              <a:t> </a:t>
+            </a:r>
+            <a:r>
+              <a:rPr lang="pl-PL" sz="2000" dirty="0" err="1"/>
+              <a:t>install</a:t>
+            </a:r>
+            <a:r>
+              <a:rPr lang="pl-PL" sz="2000" dirty="0"/>
+              <a:t> </a:t>
+            </a:r>
+            <a:r>
+              <a:rPr lang="pl-PL" sz="2000" dirty="0" err="1"/>
+              <a:t>redux-persist</a:t>
+            </a:r>
+            <a:endParaRPr lang="pl-PL" sz="2000" dirty="0"/>
+          </a:p>
+          <a:p>
+            <a:endParaRPr lang="pl-PL" sz="2000" b="1" dirty="0"/>
+          </a:p>
+          <a:p>
+            <a:r>
+              <a:rPr lang="pl-PL" sz="2000" b="1" dirty="0"/>
+              <a:t>Plik store.js</a:t>
+            </a:r>
+          </a:p>
+          <a:p>
+            <a:r>
+              <a:rPr lang="pl-PL" sz="2000" dirty="0" err="1"/>
+              <a:t>const</a:t>
+            </a:r>
+            <a:r>
+              <a:rPr lang="pl-PL" sz="2000" dirty="0"/>
+              <a:t> </a:t>
+            </a:r>
+            <a:r>
+              <a:rPr lang="pl-PL" sz="2000" dirty="0" err="1"/>
+              <a:t>persistConfig</a:t>
+            </a:r>
+            <a:r>
+              <a:rPr lang="pl-PL" sz="2000" dirty="0"/>
+              <a:t> = {</a:t>
+            </a:r>
+            <a:br>
+              <a:rPr lang="pl-PL" sz="2000" dirty="0"/>
+            </a:br>
+            <a:r>
+              <a:rPr lang="pl-PL" sz="2000" dirty="0"/>
+              <a:t>    </a:t>
+            </a:r>
+            <a:r>
+              <a:rPr lang="pl-PL" sz="2000" dirty="0" err="1"/>
+              <a:t>key</a:t>
+            </a:r>
+            <a:r>
+              <a:rPr lang="pl-PL" sz="2000" dirty="0"/>
+              <a:t>: '</a:t>
+            </a:r>
+            <a:r>
+              <a:rPr lang="pl-PL" sz="2000" dirty="0" err="1"/>
+              <a:t>root</a:t>
+            </a:r>
+            <a:r>
+              <a:rPr lang="pl-PL" sz="2000" dirty="0"/>
+              <a:t>',</a:t>
+            </a:r>
+            <a:br>
+              <a:rPr lang="pl-PL" sz="2000" dirty="0"/>
+            </a:br>
+            <a:r>
+              <a:rPr lang="pl-PL" sz="2000" dirty="0"/>
+              <a:t>    </a:t>
+            </a:r>
+            <a:r>
+              <a:rPr lang="pl-PL" sz="2000" dirty="0" err="1"/>
+              <a:t>storage</a:t>
+            </a:r>
+            <a:r>
+              <a:rPr lang="pl-PL" sz="2000" dirty="0"/>
+              <a:t>,</a:t>
+            </a:r>
+            <a:br>
+              <a:rPr lang="pl-PL" sz="2000" dirty="0"/>
+            </a:br>
+            <a:r>
+              <a:rPr lang="pl-PL" sz="2000" dirty="0"/>
+              <a:t>}</a:t>
+            </a:r>
+            <a:br>
+              <a:rPr lang="pl-PL" sz="2000" dirty="0"/>
+            </a:br>
+            <a:br>
+              <a:rPr lang="pl-PL" sz="2000" dirty="0"/>
+            </a:br>
+            <a:r>
+              <a:rPr lang="pl-PL" sz="2000" dirty="0" err="1"/>
+              <a:t>const</a:t>
+            </a:r>
+            <a:r>
+              <a:rPr lang="pl-PL" sz="2000" dirty="0"/>
+              <a:t> </a:t>
+            </a:r>
+            <a:r>
+              <a:rPr lang="pl-PL" sz="2000" dirty="0" err="1"/>
+              <a:t>persistedReducer</a:t>
+            </a:r>
+            <a:r>
+              <a:rPr lang="pl-PL" sz="2000" dirty="0"/>
+              <a:t> = </a:t>
+            </a:r>
+            <a:r>
+              <a:rPr lang="pl-PL" sz="2000" dirty="0" err="1"/>
+              <a:t>persistReducer</a:t>
+            </a:r>
+            <a:r>
+              <a:rPr lang="pl-PL" sz="2000" dirty="0"/>
+              <a:t>(</a:t>
+            </a:r>
+            <a:br>
+              <a:rPr lang="pl-PL" sz="2000" dirty="0"/>
+            </a:br>
+            <a:r>
+              <a:rPr lang="pl-PL" sz="2000" dirty="0"/>
+              <a:t>    </a:t>
+            </a:r>
+            <a:r>
+              <a:rPr lang="pl-PL" sz="2000" dirty="0" err="1"/>
+              <a:t>persistConfig</a:t>
+            </a:r>
+            <a:r>
+              <a:rPr lang="pl-PL" sz="2000" dirty="0"/>
+              <a:t>,</a:t>
+            </a:r>
+            <a:br>
+              <a:rPr lang="pl-PL" sz="2000" dirty="0"/>
+            </a:br>
+            <a:r>
+              <a:rPr lang="pl-PL" sz="2000" dirty="0"/>
+              <a:t>    </a:t>
+            </a:r>
+            <a:r>
+              <a:rPr lang="pl-PL" sz="2000" dirty="0" err="1"/>
+              <a:t>counterReducer</a:t>
+            </a:r>
+            <a:br>
+              <a:rPr lang="pl-PL" sz="2000" dirty="0"/>
+            </a:br>
+            <a:r>
+              <a:rPr lang="pl-PL" sz="2000" dirty="0"/>
+              <a:t>)</a:t>
+            </a:r>
+          </a:p>
+        </p:txBody>
+      </p:sp>
+      <p:sp>
+        <p:nvSpPr>
+          <p:cNvPr id="4" name="pole tekstowe 3">
+            <a:extLst>
+              <a:ext uri="{FF2B5EF4-FFF2-40B4-BE49-F238E27FC236}">
+                <a16:creationId xmlns:a16="http://schemas.microsoft.com/office/drawing/2014/main" id="{82DA57B7-3EBF-AB26-BC38-618C570834DC}"/>
+              </a:ext>
+            </a:extLst>
+          </p:cNvPr>
+          <p:cNvSpPr txBox="1"/>
+          <p:nvPr/>
+        </p:nvSpPr>
+        <p:spPr>
+          <a:xfrm>
+            <a:off x="5966199" y="2357488"/>
+            <a:ext cx="6011701" cy="2862322"/>
+          </a:xfrm>
+          <a:prstGeom prst="rect">
+            <a:avLst/>
+          </a:prstGeom>
+          <a:noFill/>
+        </p:spPr>
+        <p:txBody>
+          <a:bodyPr wrap="square" rtlCol="0">
+            <a:spAutoFit/>
+          </a:bodyPr>
+          <a:lstStyle/>
+          <a:p>
+            <a:r>
+              <a:rPr lang="pl-PL" sz="2000" b="1" dirty="0"/>
+              <a:t>Plik  index.js</a:t>
+            </a:r>
+          </a:p>
+          <a:p>
+            <a:r>
+              <a:rPr lang="pl-PL" sz="2000" dirty="0"/>
+              <a:t>&lt;</a:t>
+            </a:r>
+            <a:r>
+              <a:rPr lang="pl-PL" sz="2000" dirty="0" err="1"/>
+              <a:t>PersistGate</a:t>
+            </a:r>
+            <a:r>
+              <a:rPr lang="pl-PL" sz="2000" dirty="0"/>
+              <a:t> </a:t>
+            </a:r>
+            <a:r>
+              <a:rPr lang="pl-PL" sz="2000" dirty="0" err="1"/>
+              <a:t>loading</a:t>
+            </a:r>
+            <a:r>
+              <a:rPr lang="pl-PL" sz="2000" dirty="0"/>
+              <a:t>={</a:t>
+            </a:r>
+            <a:r>
+              <a:rPr lang="pl-PL" sz="2000" dirty="0" err="1"/>
+              <a:t>null</a:t>
+            </a:r>
+            <a:r>
+              <a:rPr lang="pl-PL" sz="2000" dirty="0"/>
+              <a:t>} </a:t>
+            </a:r>
+            <a:r>
+              <a:rPr lang="pl-PL" sz="2000" dirty="0" err="1"/>
+              <a:t>persistor</a:t>
+            </a:r>
+            <a:r>
+              <a:rPr lang="pl-PL" sz="2000" dirty="0"/>
+              <a:t>={</a:t>
+            </a:r>
+            <a:r>
+              <a:rPr lang="pl-PL" sz="2000" dirty="0" err="1"/>
+              <a:t>persistor</a:t>
+            </a:r>
+            <a:r>
+              <a:rPr lang="pl-PL" sz="2000" dirty="0"/>
+              <a:t>}&gt;</a:t>
+            </a:r>
+            <a:br>
+              <a:rPr lang="pl-PL" sz="2000" dirty="0"/>
+            </a:br>
+            <a:r>
+              <a:rPr lang="pl-PL" sz="2000" dirty="0"/>
+              <a:t>    &lt;</a:t>
+            </a:r>
+            <a:r>
+              <a:rPr lang="pl-PL" sz="2000" dirty="0" err="1"/>
+              <a:t>App</a:t>
+            </a:r>
+            <a:r>
+              <a:rPr lang="pl-PL" sz="2000" dirty="0"/>
+              <a:t> /&gt;</a:t>
+            </a:r>
+            <a:br>
+              <a:rPr lang="pl-PL" sz="2000" dirty="0"/>
+            </a:br>
+            <a:r>
+              <a:rPr lang="pl-PL" sz="2000" dirty="0"/>
+              <a:t>&lt;/</a:t>
+            </a:r>
+            <a:r>
+              <a:rPr lang="pl-PL" sz="2000" dirty="0" err="1"/>
+              <a:t>PersistGate</a:t>
+            </a:r>
+            <a:r>
+              <a:rPr lang="pl-PL" sz="2000" dirty="0"/>
+              <a:t>&gt;</a:t>
+            </a:r>
+          </a:p>
+          <a:p>
+            <a:endParaRPr lang="pl-PL" sz="2000" dirty="0"/>
+          </a:p>
+          <a:p>
+            <a:endParaRPr lang="pl-PL" sz="2000" dirty="0"/>
+          </a:p>
+          <a:p>
+            <a:r>
+              <a:rPr lang="pl-PL" sz="2000" dirty="0"/>
+              <a:t>„</a:t>
+            </a:r>
+            <a:r>
+              <a:rPr lang="pl-PL" sz="2000" dirty="0" err="1"/>
+              <a:t>Redux</a:t>
+            </a:r>
+            <a:r>
+              <a:rPr lang="pl-PL" sz="2000" dirty="0"/>
+              <a:t> wymaga większej konfiguracji niż </a:t>
+            </a:r>
+            <a:r>
+              <a:rPr lang="pl-PL" sz="2000" dirty="0" err="1"/>
+              <a:t>Zustand</a:t>
+            </a:r>
+            <a:r>
+              <a:rPr lang="pl-PL" sz="2000" dirty="0"/>
+              <a:t>, ale daje większą kontrolę i rozbudowane możliwości.”</a:t>
+            </a:r>
+          </a:p>
+        </p:txBody>
+      </p:sp>
+    </p:spTree>
+    <p:extLst>
+      <p:ext uri="{BB962C8B-B14F-4D97-AF65-F5344CB8AC3E}">
+        <p14:creationId xmlns:p14="http://schemas.microsoft.com/office/powerpoint/2010/main" val="2188677238"/>
+      </p:ext>
+    </p:extLst>
+  </p:cSld>
+  <p:clrMapOvr>
+    <a:masterClrMapping/>
+  </p:clrMapOvr>
+</p:sld>
+</file>
+
+<file path=ppt/slides/slide12.xml><?xml version="1.0" encoding="utf-8"?>
+<p:sld xmlns:a="http://schemas.openxmlformats.org/drawingml/2006/main" xmlns:r="http://schemas.openxmlformats.org/officeDocument/2006/relationships" xmlns:p="http://schemas.openxmlformats.org/presentationml/2006/main">
+  <p:cSld>
+    <p:spTree>
+      <p:nvGrpSpPr>
+        <p:cNvPr id="1" name="">
+          <a:extLst>
+            <a:ext uri="{FF2B5EF4-FFF2-40B4-BE49-F238E27FC236}">
+              <a16:creationId xmlns:a16="http://schemas.microsoft.com/office/drawing/2014/main" id="{D113FDC9-4CFD-7EFA-A745-3419AB752F48}"/>
+            </a:ext>
+          </a:extLst>
+        </p:cNvPr>
+        <p:cNvGrpSpPr/>
+        <p:nvPr/>
+      </p:nvGrpSpPr>
+      <p:grpSpPr>
+        <a:xfrm>
+          <a:off x="0" y="0"/>
+          <a:ext cx="0" cy="0"/>
+          <a:chOff x="0" y="0"/>
+          <a:chExt cx="0" cy="0"/>
+        </a:xfrm>
+      </p:grpSpPr>
+      <p:pic>
+        <p:nvPicPr>
+          <p:cNvPr id="15" name="Obraz — symbol zastępczy 14" descr="Otwarta książka na biurku">
+            <a:extLst>
+              <a:ext uri="{FF2B5EF4-FFF2-40B4-BE49-F238E27FC236}">
+                <a16:creationId xmlns:a16="http://schemas.microsoft.com/office/drawing/2014/main" id="{CF12FC7B-3AEA-F040-7F25-90B4E3308C0E}"/>
+              </a:ext>
+            </a:extLst>
+          </p:cNvPr>
+          <p:cNvPicPr>
+            <a:picLocks noGrp="1" noChangeAspect="1"/>
+          </p:cNvPicPr>
+          <p:nvPr>
+            <p:ph type="pic" sz="quarter" idx="13"/>
+          </p:nvPr>
+        </p:nvPicPr>
+        <p:blipFill rotWithShape="1">
+          <a:blip r:embed="rId3">
+            <a:extLst>
+              <a:ext uri="{28A0092B-C50C-407E-A947-70E740481C1C}">
+                <a14:useLocalDpi xmlns:a14="http://schemas.microsoft.com/office/drawing/2010/main" val="0"/>
+              </a:ext>
+            </a:extLst>
+          </a:blip>
+          <a:srcRect/>
+          <a:stretch/>
+        </p:blipFill>
+        <p:spPr>
+          <a:xfrm>
+            <a:off x="12192" y="2849880"/>
+            <a:ext cx="12143232" cy="4008120"/>
+          </a:xfrm>
+          <a:blipFill>
+            <a:blip r:embed="rId4"/>
+            <a:tile tx="0" ty="0" sx="100000" sy="100000" flip="none" algn="tl"/>
+          </a:blipFill>
+        </p:spPr>
+      </p:pic>
+      <p:sp>
+        <p:nvSpPr>
+          <p:cNvPr id="9" name="Tytuł 8">
+            <a:extLst>
+              <a:ext uri="{FF2B5EF4-FFF2-40B4-BE49-F238E27FC236}">
+                <a16:creationId xmlns:a16="http://schemas.microsoft.com/office/drawing/2014/main" id="{DF033830-0078-42D9-4ABA-0818C9A903EE}"/>
+              </a:ext>
+            </a:extLst>
+          </p:cNvPr>
+          <p:cNvSpPr>
+            <a:spLocks noGrp="1"/>
+          </p:cNvSpPr>
+          <p:nvPr>
+            <p:ph type="ctrTitle"/>
+          </p:nvPr>
+        </p:nvSpPr>
+        <p:spPr>
+          <a:xfrm>
+            <a:off x="12192" y="-1"/>
+            <a:ext cx="12167616" cy="4284581"/>
+          </a:xfrm>
+          <a:solidFill>
+            <a:schemeClr val="accent5"/>
+          </a:solidFill>
+        </p:spPr>
+        <p:txBody>
+          <a:bodyPr rtlCol="0"/>
+          <a:lstStyle/>
+          <a:p>
+            <a:pPr algn="ctr"/>
+            <a:r>
+              <a:rPr lang="pl-PL" sz="4800" b="1" dirty="0"/>
+              <a:t>Porównanie w praktyce</a:t>
+            </a:r>
+          </a:p>
+        </p:txBody>
+      </p:sp>
+      <p:graphicFrame>
+        <p:nvGraphicFramePr>
+          <p:cNvPr id="2" name="Tabela 1">
+            <a:extLst>
+              <a:ext uri="{FF2B5EF4-FFF2-40B4-BE49-F238E27FC236}">
+                <a16:creationId xmlns:a16="http://schemas.microsoft.com/office/drawing/2014/main" id="{21F32AD8-8B5F-4962-6A3E-0E9FE65AB3D9}"/>
+              </a:ext>
+            </a:extLst>
+          </p:cNvPr>
+          <p:cNvGraphicFramePr>
+            <a:graphicFrameLocks noGrp="1"/>
+          </p:cNvGraphicFramePr>
+          <p:nvPr>
+            <p:extLst>
+              <p:ext uri="{D42A27DB-BD31-4B8C-83A1-F6EECF244321}">
+                <p14:modId xmlns:p14="http://schemas.microsoft.com/office/powerpoint/2010/main" val="2779652372"/>
+              </p:ext>
+            </p:extLst>
+          </p:nvPr>
+        </p:nvGraphicFramePr>
+        <p:xfrm>
+          <a:off x="2128251" y="1737360"/>
+          <a:ext cx="8127999" cy="3383280"/>
+        </p:xfrm>
+        <a:graphic>
+          <a:graphicData uri="http://schemas.openxmlformats.org/drawingml/2006/table">
+            <a:tbl>
+              <a:tblPr firstRow="1" bandRow="1">
+                <a:tableStyleId>{073A0DAA-6AF3-43AB-8588-CEC1D06C72B9}</a:tableStyleId>
+              </a:tblPr>
+              <a:tblGrid>
+                <a:gridCol w="2709333">
+                  <a:extLst>
+                    <a:ext uri="{9D8B030D-6E8A-4147-A177-3AD203B41FA5}">
+                      <a16:colId xmlns:a16="http://schemas.microsoft.com/office/drawing/2014/main" val="1885101566"/>
+                    </a:ext>
+                  </a:extLst>
+                </a:gridCol>
+                <a:gridCol w="2709333">
+                  <a:extLst>
+                    <a:ext uri="{9D8B030D-6E8A-4147-A177-3AD203B41FA5}">
+                      <a16:colId xmlns:a16="http://schemas.microsoft.com/office/drawing/2014/main" val="630441010"/>
+                    </a:ext>
+                  </a:extLst>
+                </a:gridCol>
+                <a:gridCol w="2709333">
+                  <a:extLst>
+                    <a:ext uri="{9D8B030D-6E8A-4147-A177-3AD203B41FA5}">
+                      <a16:colId xmlns:a16="http://schemas.microsoft.com/office/drawing/2014/main" val="1743079580"/>
+                    </a:ext>
+                  </a:extLst>
+                </a:gridCol>
+              </a:tblGrid>
+              <a:tr h="370840">
+                <a:tc>
+                  <a:txBody>
+                    <a:bodyPr/>
+                    <a:lstStyle/>
+                    <a:p>
+                      <a:r>
+                        <a:rPr lang="pl-PL" sz="2400" dirty="0"/>
+                        <a:t>Cecha</a:t>
+                      </a:r>
+                    </a:p>
+                  </a:txBody>
+                  <a:tcPr/>
+                </a:tc>
+                <a:tc>
+                  <a:txBody>
+                    <a:bodyPr/>
+                    <a:lstStyle/>
+                    <a:p>
+                      <a:r>
+                        <a:rPr lang="pl-PL" sz="2400" dirty="0" err="1"/>
+                        <a:t>Zustand</a:t>
+                      </a:r>
+                      <a:endParaRPr lang="pl-PL" sz="2400" dirty="0"/>
+                    </a:p>
+                  </a:txBody>
+                  <a:tcPr/>
+                </a:tc>
+                <a:tc>
+                  <a:txBody>
+                    <a:bodyPr/>
+                    <a:lstStyle/>
+                    <a:p>
+                      <a:r>
+                        <a:rPr lang="pl-PL" sz="2400" dirty="0" err="1"/>
+                        <a:t>Redux</a:t>
+                      </a:r>
+                      <a:endParaRPr lang="pl-PL" sz="2400" dirty="0"/>
+                    </a:p>
+                  </a:txBody>
+                  <a:tcPr/>
+                </a:tc>
+                <a:extLst>
+                  <a:ext uri="{0D108BD9-81ED-4DB2-BD59-A6C34878D82A}">
+                    <a16:rowId xmlns:a16="http://schemas.microsoft.com/office/drawing/2014/main" val="1926025281"/>
+                  </a:ext>
+                </a:extLst>
+              </a:tr>
+              <a:tr h="370840">
+                <a:tc>
+                  <a:txBody>
+                    <a:bodyPr/>
+                    <a:lstStyle/>
+                    <a:p>
+                      <a:r>
+                        <a:rPr lang="pl-PL" sz="2400" dirty="0"/>
+                        <a:t>Ilość kodu</a:t>
+                      </a:r>
+                    </a:p>
+                  </a:txBody>
+                  <a:tcPr/>
+                </a:tc>
+                <a:tc>
+                  <a:txBody>
+                    <a:bodyPr/>
+                    <a:lstStyle/>
+                    <a:p>
+                      <a:r>
+                        <a:rPr lang="pl-PL" sz="2400" dirty="0"/>
+                        <a:t>Mała</a:t>
+                      </a:r>
+                    </a:p>
+                  </a:txBody>
+                  <a:tcPr/>
+                </a:tc>
+                <a:tc>
+                  <a:txBody>
+                    <a:bodyPr/>
+                    <a:lstStyle/>
+                    <a:p>
+                      <a:r>
+                        <a:rPr lang="pl-PL" sz="2400" dirty="0"/>
+                        <a:t>Większa</a:t>
+                      </a:r>
+                    </a:p>
+                  </a:txBody>
+                  <a:tcPr/>
+                </a:tc>
+                <a:extLst>
+                  <a:ext uri="{0D108BD9-81ED-4DB2-BD59-A6C34878D82A}">
+                    <a16:rowId xmlns:a16="http://schemas.microsoft.com/office/drawing/2014/main" val="1804799733"/>
+                  </a:ext>
+                </a:extLst>
+              </a:tr>
+              <a:tr h="370840">
+                <a:tc>
+                  <a:txBody>
+                    <a:bodyPr/>
+                    <a:lstStyle/>
+                    <a:p>
+                      <a:r>
+                        <a:rPr lang="pl-PL" sz="2400" dirty="0"/>
+                        <a:t>Konfiguracja</a:t>
+                      </a:r>
+                    </a:p>
+                  </a:txBody>
+                  <a:tcPr/>
+                </a:tc>
+                <a:tc>
+                  <a:txBody>
+                    <a:bodyPr/>
+                    <a:lstStyle/>
+                    <a:p>
+                      <a:r>
+                        <a:rPr lang="pl-PL" sz="2400" dirty="0"/>
+                        <a:t>Prosta</a:t>
+                      </a:r>
+                    </a:p>
+                  </a:txBody>
+                  <a:tcPr/>
+                </a:tc>
+                <a:tc>
+                  <a:txBody>
+                    <a:bodyPr/>
+                    <a:lstStyle/>
+                    <a:p>
+                      <a:r>
+                        <a:rPr lang="pl-PL" sz="2400" dirty="0"/>
+                        <a:t>Bardziej rozbudowana</a:t>
+                      </a:r>
+                    </a:p>
+                  </a:txBody>
+                  <a:tcPr/>
+                </a:tc>
+                <a:extLst>
+                  <a:ext uri="{0D108BD9-81ED-4DB2-BD59-A6C34878D82A}">
+                    <a16:rowId xmlns:a16="http://schemas.microsoft.com/office/drawing/2014/main" val="1957737910"/>
+                  </a:ext>
+                </a:extLst>
+              </a:tr>
+              <a:tr h="370840">
+                <a:tc>
+                  <a:txBody>
+                    <a:bodyPr/>
+                    <a:lstStyle/>
+                    <a:p>
+                      <a:r>
+                        <a:rPr lang="pl-PL" sz="2400" dirty="0" err="1"/>
+                        <a:t>Persist</a:t>
+                      </a:r>
+                      <a:endParaRPr lang="pl-PL" sz="2400" dirty="0"/>
+                    </a:p>
+                  </a:txBody>
+                  <a:tcPr/>
+                </a:tc>
+                <a:tc>
+                  <a:txBody>
+                    <a:bodyPr/>
+                    <a:lstStyle/>
+                    <a:p>
+                      <a:r>
+                        <a:rPr lang="pl-PL" sz="2400" dirty="0"/>
+                        <a:t>Łatwy</a:t>
+                      </a:r>
+                    </a:p>
+                  </a:txBody>
+                  <a:tcPr/>
+                </a:tc>
+                <a:tc>
+                  <a:txBody>
+                    <a:bodyPr/>
+                    <a:lstStyle/>
+                    <a:p>
+                      <a:r>
+                        <a:rPr lang="pl-PL" sz="2400" dirty="0"/>
+                        <a:t>Wymaga </a:t>
+                      </a:r>
+                      <a:r>
+                        <a:rPr lang="pl-PL" sz="2400" dirty="0" err="1"/>
+                        <a:t>redux-persist</a:t>
+                      </a:r>
+                      <a:endParaRPr lang="pl-PL" sz="2400" dirty="0"/>
+                    </a:p>
+                  </a:txBody>
+                  <a:tcPr/>
+                </a:tc>
+                <a:extLst>
+                  <a:ext uri="{0D108BD9-81ED-4DB2-BD59-A6C34878D82A}">
+                    <a16:rowId xmlns:a16="http://schemas.microsoft.com/office/drawing/2014/main" val="2641481639"/>
+                  </a:ext>
+                </a:extLst>
+              </a:tr>
+              <a:tr h="370840">
+                <a:tc>
+                  <a:txBody>
+                    <a:bodyPr/>
+                    <a:lstStyle/>
+                    <a:p>
+                      <a:r>
+                        <a:rPr lang="pl-PL" sz="2400" dirty="0" err="1"/>
+                        <a:t>DevTools</a:t>
+                      </a:r>
+                      <a:endParaRPr lang="pl-PL" sz="2400" dirty="0"/>
+                    </a:p>
+                  </a:txBody>
+                  <a:tcPr/>
+                </a:tc>
+                <a:tc>
+                  <a:txBody>
+                    <a:bodyPr/>
+                    <a:lstStyle/>
+                    <a:p>
+                      <a:r>
+                        <a:rPr lang="pl-PL" sz="2400" dirty="0"/>
+                        <a:t>Podstawowe</a:t>
+                      </a:r>
+                    </a:p>
+                  </a:txBody>
+                  <a:tcPr/>
+                </a:tc>
+                <a:tc>
+                  <a:txBody>
+                    <a:bodyPr/>
+                    <a:lstStyle/>
+                    <a:p>
+                      <a:r>
+                        <a:rPr lang="pl-PL" sz="2400" dirty="0"/>
+                        <a:t>Bardzo rozbudowane</a:t>
+                      </a:r>
+                    </a:p>
+                  </a:txBody>
+                  <a:tcPr/>
+                </a:tc>
+                <a:extLst>
+                  <a:ext uri="{0D108BD9-81ED-4DB2-BD59-A6C34878D82A}">
+                    <a16:rowId xmlns:a16="http://schemas.microsoft.com/office/drawing/2014/main" val="482443653"/>
+                  </a:ext>
+                </a:extLst>
+              </a:tr>
+            </a:tbl>
+          </a:graphicData>
+        </a:graphic>
+      </p:graphicFrame>
+      <p:sp>
+        <p:nvSpPr>
+          <p:cNvPr id="3" name="pole tekstowe 2">
+            <a:extLst>
+              <a:ext uri="{FF2B5EF4-FFF2-40B4-BE49-F238E27FC236}">
+                <a16:creationId xmlns:a16="http://schemas.microsoft.com/office/drawing/2014/main" id="{C8709483-144F-A678-5623-1873E243A12B}"/>
+              </a:ext>
+            </a:extLst>
+          </p:cNvPr>
+          <p:cNvSpPr txBox="1"/>
+          <p:nvPr/>
+        </p:nvSpPr>
+        <p:spPr>
+          <a:xfrm>
+            <a:off x="1208314" y="5763986"/>
+            <a:ext cx="9633857" cy="461665"/>
+          </a:xfrm>
+          <a:prstGeom prst="rect">
+            <a:avLst/>
+          </a:prstGeom>
+          <a:noFill/>
+        </p:spPr>
+        <p:txBody>
+          <a:bodyPr wrap="square" rtlCol="0">
+            <a:spAutoFit/>
+          </a:bodyPr>
+          <a:lstStyle/>
+          <a:p>
+            <a:r>
+              <a:rPr lang="pl-PL" sz="2400" b="1" dirty="0" err="1"/>
+              <a:t>Zustand</a:t>
+            </a:r>
+            <a:r>
+              <a:rPr lang="pl-PL" sz="2400" b="1" dirty="0"/>
+              <a:t> stawia na prostotę, </a:t>
+            </a:r>
+            <a:r>
+              <a:rPr lang="pl-PL" sz="2400" b="1" dirty="0" err="1"/>
+              <a:t>Redux</a:t>
+            </a:r>
+            <a:r>
+              <a:rPr lang="pl-PL" sz="2400" b="1" dirty="0"/>
+              <a:t> na kontrolę i skalowalność.</a:t>
+            </a:r>
+          </a:p>
+        </p:txBody>
+      </p:sp>
+    </p:spTree>
+    <p:extLst>
+      <p:ext uri="{BB962C8B-B14F-4D97-AF65-F5344CB8AC3E}">
+        <p14:creationId xmlns:p14="http://schemas.microsoft.com/office/powerpoint/2010/main" val="3839271840"/>
+      </p:ext>
+    </p:extLst>
+  </p:cSld>
+  <p:clrMapOvr>
+    <a:masterClrMapping/>
+  </p:clrMapOvr>
+</p:sld>
+</file>
+
+<file path=ppt/slides/slide13.xml><?xml version="1.0" encoding="utf-8"?>
+<p:sld xmlns:a="http://schemas.openxmlformats.org/drawingml/2006/main" xmlns:r="http://schemas.openxmlformats.org/officeDocument/2006/relationships" xmlns:p="http://schemas.openxmlformats.org/presentationml/2006/main">
+  <p:cSld>
+    <p:spTree>
+      <p:nvGrpSpPr>
+        <p:cNvPr id="1" name="">
+          <a:extLst>
+            <a:ext uri="{FF2B5EF4-FFF2-40B4-BE49-F238E27FC236}">
+              <a16:creationId xmlns:a16="http://schemas.microsoft.com/office/drawing/2014/main" id="{5DF7DBF4-3059-89BB-C4D0-B9A95EC29631}"/>
+            </a:ext>
+          </a:extLst>
+        </p:cNvPr>
+        <p:cNvGrpSpPr/>
+        <p:nvPr/>
+      </p:nvGrpSpPr>
+      <p:grpSpPr>
+        <a:xfrm>
+          <a:off x="0" y="0"/>
+          <a:ext cx="0" cy="0"/>
+          <a:chOff x="0" y="0"/>
+          <a:chExt cx="0" cy="0"/>
+        </a:xfrm>
+      </p:grpSpPr>
+      <p:pic>
+        <p:nvPicPr>
+          <p:cNvPr id="15" name="Obraz — symbol zastępczy 14" descr="Otwarta książka na biurku">
+            <a:extLst>
+              <a:ext uri="{FF2B5EF4-FFF2-40B4-BE49-F238E27FC236}">
+                <a16:creationId xmlns:a16="http://schemas.microsoft.com/office/drawing/2014/main" id="{B97407C0-DD29-E6BC-4B75-E21710B41806}"/>
+              </a:ext>
+            </a:extLst>
+          </p:cNvPr>
+          <p:cNvPicPr>
+            <a:picLocks noGrp="1" noChangeAspect="1"/>
+          </p:cNvPicPr>
+          <p:nvPr>
+            <p:ph type="pic" sz="quarter" idx="13"/>
+          </p:nvPr>
+        </p:nvPicPr>
+        <p:blipFill rotWithShape="1">
+          <a:blip r:embed="rId3">
+            <a:extLst>
+              <a:ext uri="{28A0092B-C50C-407E-A947-70E740481C1C}">
+                <a14:useLocalDpi xmlns:a14="http://schemas.microsoft.com/office/drawing/2010/main" val="0"/>
+              </a:ext>
+            </a:extLst>
+          </a:blip>
+          <a:srcRect/>
+          <a:stretch/>
+        </p:blipFill>
+        <p:spPr>
+          <a:xfrm>
+            <a:off x="12192" y="2849880"/>
+            <a:ext cx="12143232" cy="4008120"/>
+          </a:xfrm>
+          <a:blipFill>
+            <a:blip r:embed="rId4"/>
+            <a:tile tx="0" ty="0" sx="100000" sy="100000" flip="none" algn="tl"/>
+          </a:blipFill>
+        </p:spPr>
+      </p:pic>
+      <p:sp>
+        <p:nvSpPr>
+          <p:cNvPr id="9" name="Tytuł 8">
+            <a:extLst>
+              <a:ext uri="{FF2B5EF4-FFF2-40B4-BE49-F238E27FC236}">
+                <a16:creationId xmlns:a16="http://schemas.microsoft.com/office/drawing/2014/main" id="{D74207C1-AB54-2738-EC22-71CD8968636E}"/>
+              </a:ext>
+            </a:extLst>
+          </p:cNvPr>
+          <p:cNvSpPr>
+            <a:spLocks noGrp="1"/>
+          </p:cNvSpPr>
+          <p:nvPr>
+            <p:ph type="ctrTitle"/>
+          </p:nvPr>
+        </p:nvSpPr>
+        <p:spPr>
+          <a:xfrm>
+            <a:off x="12192" y="-1"/>
+            <a:ext cx="12167616" cy="4284581"/>
+          </a:xfrm>
+          <a:solidFill>
+            <a:schemeClr val="accent5"/>
+          </a:solidFill>
+        </p:spPr>
+        <p:txBody>
+          <a:bodyPr rtlCol="0"/>
+          <a:lstStyle/>
+          <a:p>
+            <a:pPr algn="ctr"/>
+            <a:r>
               <a:rPr lang="pl-PL" sz="6600" b="1" dirty="0" err="1">
                 <a:solidFill>
                   <a:schemeClr val="bg1"/>
@@ -27310,7 +29486,7 @@
                 <a:ea typeface="+mn-ea"/>
                 <a:cs typeface="+mn-cs"/>
               </a:rPr>
-              <a:t>Persystencja</a:t>
+              <a:t>DevTools</a:t>
             </a:r>
             <a:endParaRPr lang="pl-PL" sz="6600" b="1" dirty="0">
               <a:solidFill>
@@ -27325,44 +29501,10 @@
       </p:sp>
       <p:sp>
         <p:nvSpPr>
-          <p:cNvPr id="75" name="Stopka — symbol zastępczy 74">
-            <a:extLst>
-              <a:ext uri="{FF2B5EF4-FFF2-40B4-BE49-F238E27FC236}">
-                <a16:creationId xmlns:a16="http://schemas.microsoft.com/office/drawing/2014/main" id="{95A8EBB6-7EEB-BE7C-B980-8366BB83C533}"/>
-              </a:ext>
-            </a:extLst>
-          </p:cNvPr>
-          <p:cNvSpPr>
-            <a:spLocks noGrp="1"/>
-          </p:cNvSpPr>
-          <p:nvPr>
-            <p:ph type="ftr" sz="quarter" idx="11"/>
-          </p:nvPr>
-        </p:nvSpPr>
-        <p:spPr>
-          <a:xfrm>
-            <a:off x="4200861" y="6319838"/>
-            <a:ext cx="3982781" cy="365125"/>
-          </a:xfrm>
-        </p:spPr>
-        <p:txBody>
-          <a:bodyPr rtlCol="0"/>
-          <a:lstStyle/>
-          <a:p>
-            <a:pPr rtl="0"/>
-            <a:r>
-              <a:rPr lang="pl-PL"/>
-              <a:t>TYTUŁ PREZENTACJI</a:t>
-            </a:r>
-          </a:p>
-        </p:txBody>
-      </p:sp>
-      <p:sp>
-        <p:nvSpPr>
           <p:cNvPr id="6" name="pole tekstowe 5">
             <a:extLst>
               <a:ext uri="{FF2B5EF4-FFF2-40B4-BE49-F238E27FC236}">
-                <a16:creationId xmlns:a16="http://schemas.microsoft.com/office/drawing/2014/main" id="{CB259DA0-091A-9356-F11D-860A7B5EFE03}"/>
+                <a16:creationId xmlns:a16="http://schemas.microsoft.com/office/drawing/2014/main" id="{054CFECF-5962-787B-F85D-F4A864E34AC0}"/>
               </a:ext>
             </a:extLst>
           </p:cNvPr>
@@ -27372,7 +29514,7 @@
         <p:spPr>
           <a:xfrm>
             <a:off x="595220" y="1634456"/>
-            <a:ext cx="10549030" cy="2554545"/>
+            <a:ext cx="8331610" cy="707886"/>
           </a:xfrm>
           <a:prstGeom prst="rect">
             <a:avLst/>
@@ -27386,93 +29528,282 @@
           <a:lstStyle/>
           <a:p>
             <a:r>
-              <a:rPr lang="pl-PL" sz="2000" b="1" dirty="0"/>
-              <a:t>Co się dzieje po odświeżeniu strony? </a:t>
+              <a:rPr lang="pl-PL" sz="2000" dirty="0">
+                <a:solidFill>
+                  <a:schemeClr val="bg1"/>
+                </a:solidFill>
+              </a:rPr>
+              <a:t>Narzędzia programistyczne pozwalają śledzić zmiany w czasie rzeczywistym. </a:t>
+            </a:r>
+            <a:r>
+              <a:rPr lang="pl-PL" sz="2000" dirty="0" err="1">
+                <a:solidFill>
+                  <a:schemeClr val="bg1"/>
+                </a:solidFill>
+              </a:rPr>
+              <a:t>Zustand</a:t>
+            </a:r>
+            <a:r>
+              <a:rPr lang="pl-PL" sz="2000" dirty="0">
+                <a:solidFill>
+                  <a:schemeClr val="bg1"/>
+                </a:solidFill>
+              </a:rPr>
+              <a:t> też z nimi współpracuje</a:t>
             </a:r>
           </a:p>
+        </p:txBody>
+      </p:sp>
+      <p:pic>
+        <p:nvPicPr>
+          <p:cNvPr id="2" name="Picture 3" descr="redux_devtools.png"/>
+          <p:cNvPicPr>
+            <a:picLocks noChangeAspect="1"/>
+          </p:cNvPicPr>
+          <p:nvPr/>
+        </p:nvPicPr>
+        <p:blipFill>
+          <a:blip r:embed="rId5"/>
+          <a:srcRect l="-56975" r="56975"/>
+          <a:stretch>
+            <a:fillRect/>
+          </a:stretch>
+        </p:blipFill>
+        <p:spPr>
+          <a:xfrm>
+            <a:off x="1779268" y="2363086"/>
+            <a:ext cx="8128184" cy="4515658"/>
+          </a:xfrm>
+          <a:prstGeom prst="rect">
+            <a:avLst/>
+          </a:prstGeom>
+        </p:spPr>
+      </p:pic>
+      <p:pic>
+        <p:nvPicPr>
+          <p:cNvPr id="5" name="Picture 4" descr="zustand_devtools.png"/>
+          <p:cNvPicPr>
+            <a:picLocks noChangeAspect="1"/>
+          </p:cNvPicPr>
+          <p:nvPr/>
+        </p:nvPicPr>
+        <p:blipFill>
+          <a:blip r:embed="rId6"/>
+          <a:srcRect l="-58111" r="58111"/>
+          <a:stretch>
+            <a:fillRect/>
+          </a:stretch>
+        </p:blipFill>
+        <p:spPr>
+          <a:xfrm>
+            <a:off x="-4038944" y="2404575"/>
+            <a:ext cx="8053504" cy="4474169"/>
+          </a:xfrm>
+          <a:prstGeom prst="rect">
+            <a:avLst/>
+          </a:prstGeom>
+        </p:spPr>
+      </p:pic>
+      <p:sp>
+        <p:nvSpPr>
+          <p:cNvPr id="3" name="TextBox 5"/>
+          <p:cNvSpPr txBox="1"/>
+          <p:nvPr/>
+        </p:nvSpPr>
+        <p:spPr>
+          <a:xfrm>
+            <a:off x="9907452" y="2743200"/>
+            <a:ext cx="2066834" cy="1815882"/>
+          </a:xfrm>
+          <a:prstGeom prst="rect">
+            <a:avLst/>
+          </a:prstGeom>
+          <a:noFill/>
+        </p:spPr>
+        <p:txBody>
+          <a:bodyPr wrap="square">
+            <a:spAutoFit/>
+          </a:bodyPr>
+          <a:lstStyle/>
           <a:p>
-            <a:r>
-              <a:rPr lang="pl-PL" sz="2000" dirty="0"/>
-              <a:t>Normalnie stan znika.</a:t>
-            </a:r>
+            <a:pPr>
+              <a:defRPr sz="1600"/>
+            </a:pPr>
+            <a:r>
+              <a:rPr b="1" dirty="0"/>
+              <a:t>Redux Toolkit:</a:t>
+            </a:r>
+            <a:br>
+              <a:rPr b="1" dirty="0"/>
+            </a:br>
+            <a:r>
+              <a:rPr b="1" dirty="0"/>
+              <a:t>• </a:t>
+            </a:r>
+            <a:r>
+              <a:rPr b="1" dirty="0" err="1"/>
+              <a:t>dokładna</a:t>
+            </a:r>
+            <a:r>
+              <a:rPr b="1" dirty="0"/>
+              <a:t> </a:t>
+            </a:r>
+            <a:r>
+              <a:rPr b="1" dirty="0" err="1"/>
+              <a:t>historia</a:t>
+            </a:r>
+            <a:r>
+              <a:rPr b="1" dirty="0"/>
+              <a:t> </a:t>
+            </a:r>
+            <a:r>
+              <a:rPr b="1" dirty="0" err="1"/>
+              <a:t>akcji</a:t>
+            </a:r>
+            <a:br>
+              <a:rPr b="1" dirty="0"/>
+            </a:br>
+            <a:r>
+              <a:rPr b="1" dirty="0"/>
+              <a:t>• time-travel debugging</a:t>
+            </a:r>
+            <a:br>
+              <a:rPr b="1" dirty="0"/>
+            </a:br>
+            <a:r>
+              <a:rPr b="1" dirty="0"/>
+              <a:t>• </a:t>
+            </a:r>
+            <a:r>
+              <a:rPr b="1" dirty="0" err="1"/>
+              <a:t>lepszy</a:t>
+            </a:r>
+            <a:r>
+              <a:rPr b="1" dirty="0"/>
+              <a:t> do </a:t>
+            </a:r>
+            <a:r>
+              <a:rPr b="1" dirty="0" err="1"/>
+              <a:t>dużych</a:t>
+            </a:r>
+            <a:r>
+              <a:rPr b="1" dirty="0"/>
+              <a:t> </a:t>
+            </a:r>
+            <a:r>
+              <a:rPr b="1" dirty="0" err="1"/>
+              <a:t>aplikacji</a:t>
+            </a:r>
+            <a:endParaRPr b="1" dirty="0"/>
           </a:p>
+        </p:txBody>
+      </p:sp>
+      <p:sp>
+        <p:nvSpPr>
+          <p:cNvPr id="8" name="TextBox 6"/>
+          <p:cNvSpPr txBox="1"/>
+          <p:nvPr/>
+        </p:nvSpPr>
+        <p:spPr>
+          <a:xfrm>
+            <a:off x="4014560" y="2674171"/>
+            <a:ext cx="2313669" cy="1569660"/>
+          </a:xfrm>
+          <a:prstGeom prst="rect">
+            <a:avLst/>
+          </a:prstGeom>
+          <a:noFill/>
+        </p:spPr>
+        <p:txBody>
+          <a:bodyPr wrap="square">
+            <a:spAutoFit/>
+          </a:bodyPr>
+          <a:lstStyle/>
           <a:p>
-            <a:endParaRPr lang="pl-PL" sz="2000" dirty="0">
-              <a:solidFill>
-                <a:schemeClr val="bg1"/>
-              </a:solidFill>
-            </a:endParaRPr>
-          </a:p>
-          <a:p>
-            <a:r>
-              <a:rPr lang="pl-PL" sz="2000" b="1" dirty="0"/>
-              <a:t>Rozwiązanie:</a:t>
-            </a:r>
-            <a:r>
-              <a:rPr lang="pl-PL" sz="2000" dirty="0"/>
+            <a:pPr>
+              <a:defRPr sz="1600"/>
+            </a:pPr>
+            <a:r>
+              <a:rPr b="1" dirty="0" err="1"/>
+              <a:t>Zustand</a:t>
+            </a:r>
+            <a:r>
+              <a:rPr b="1" dirty="0"/>
+              <a:t>:</a:t>
+            </a:r>
+            <a:br>
+              <a:rPr b="1" dirty="0"/>
+            </a:br>
+            <a:r>
+              <a:rPr b="1" dirty="0"/>
+              <a:t>• </a:t>
+            </a:r>
+            <a:r>
+              <a:rPr b="1" dirty="0" err="1"/>
+              <a:t>prostszy</a:t>
+            </a:r>
+            <a:r>
+              <a:rPr b="1" dirty="0"/>
               <a:t> </a:t>
             </a:r>
-          </a:p>
-          <a:p>
-            <a:r>
-              <a:rPr lang="pl-PL" sz="2000" dirty="0" err="1"/>
-              <a:t>Middleware</a:t>
-            </a:r>
-            <a:r>
-              <a:rPr lang="pl-PL" sz="2000" dirty="0"/>
+            <a:r>
+              <a:rPr b="1" dirty="0" err="1"/>
+              <a:t>podgląd</a:t>
+            </a:r>
+            <a:r>
+              <a:rPr b="1" dirty="0"/>
               <a:t> </a:t>
             </a:r>
             <a:r>
-              <a:rPr lang="pl-PL" dirty="0" err="1"/>
-              <a:t>persist</a:t>
-            </a:r>
-            <a:r>
-              <a:rPr lang="pl-PL" sz="2000" dirty="0"/>
-              <a:t>. Pozwala on automatycznie zapisywać dane w </a:t>
-            </a:r>
-            <a:r>
-              <a:rPr lang="pl-PL" dirty="0" err="1"/>
-              <a:t>localStorage</a:t>
-            </a:r>
-            <a:r>
-              <a:rPr lang="pl-PL" sz="2000" dirty="0"/>
-              <a:t> przeglądarki.</a:t>
-            </a:r>
-          </a:p>
-          <a:p>
-            <a:endParaRPr lang="pl-PL" sz="2000" dirty="0">
-              <a:solidFill>
-                <a:schemeClr val="bg1"/>
-              </a:solidFill>
-            </a:endParaRPr>
-          </a:p>
-          <a:p>
-            <a:r>
-              <a:rPr lang="pl-PL" sz="2000" b="1" dirty="0"/>
-              <a:t>Zaleta:</a:t>
-            </a:r>
-            <a:r>
-              <a:rPr lang="pl-PL" sz="2000" dirty="0"/>
+              <a:rPr b="1" dirty="0" err="1"/>
+              <a:t>stanu</a:t>
+            </a:r>
+            <a:br>
+              <a:rPr b="1" dirty="0"/>
+            </a:br>
+            <a:r>
+              <a:rPr b="1" dirty="0"/>
+              <a:t>• </a:t>
+            </a:r>
+            <a:r>
+              <a:rPr b="1" dirty="0" err="1"/>
+              <a:t>mniej</a:t>
+            </a:r>
+            <a:r>
+              <a:rPr b="1" dirty="0"/>
               <a:t> </a:t>
             </a:r>
-          </a:p>
-          <a:p>
-            <a:r>
-              <a:rPr lang="pl-PL" sz="2000" dirty="0"/>
-              <a:t>Użytkownik wraca na stronę, a jego koszyk zakupowy lub ustawienia są nadal na miejscu.</a:t>
-            </a:r>
-            <a:endParaRPr lang="pl-PL" sz="2000" dirty="0">
-              <a:solidFill>
-                <a:schemeClr val="bg1"/>
-              </a:solidFill>
-            </a:endParaRPr>
+            <a:r>
+              <a:rPr b="1" dirty="0" err="1"/>
+              <a:t>konfiguracji</a:t>
+            </a:r>
+            <a:br>
+              <a:rPr b="1" dirty="0"/>
+            </a:br>
+            <a:r>
+              <a:rPr b="1" dirty="0"/>
+              <a:t>• </a:t>
+            </a:r>
+            <a:r>
+              <a:rPr b="1" dirty="0" err="1"/>
+              <a:t>szybszy</a:t>
+            </a:r>
+            <a:r>
+              <a:rPr b="1" dirty="0"/>
+              <a:t> start </a:t>
+            </a:r>
+            <a:r>
+              <a:rPr b="1" dirty="0" err="1"/>
+              <a:t>projektu</a:t>
+            </a:r>
+            <a:endParaRPr b="1" dirty="0"/>
           </a:p>
         </p:txBody>
       </p:sp>
     </p:spTree>
     <p:extLst>
       <p:ext uri="{BB962C8B-B14F-4D97-AF65-F5344CB8AC3E}">
-        <p14:creationId xmlns:p14="http://schemas.microsoft.com/office/powerpoint/2010/main" val="4073367003"/>
+        <p14:creationId xmlns:p14="http://schemas.microsoft.com/office/powerpoint/2010/main" val="426389140"/>
       </p:ext>
     </p:extLst>
   </p:cSld>
@@ -27482,7 +29813,262 @@
 </p:sld>
 </file>
 
-<file path=ppt/slides/slide11.xml><?xml version="1.0" encoding="utf-8"?>
+<file path=ppt/slides/slide14.xml><?xml version="1.0" encoding="utf-8"?>
+<p:sld xmlns:a="http://schemas.openxmlformats.org/drawingml/2006/main" xmlns:r="http://schemas.openxmlformats.org/officeDocument/2006/relationships" xmlns:p="http://schemas.openxmlformats.org/presentationml/2006/main">
+  <p:cSld>
+    <p:spTree>
+      <p:nvGrpSpPr>
+        <p:cNvPr id="1" name="">
+          <a:extLst>
+            <a:ext uri="{FF2B5EF4-FFF2-40B4-BE49-F238E27FC236}">
+              <a16:creationId xmlns:a16="http://schemas.microsoft.com/office/drawing/2014/main" id="{91B0047E-8795-E21F-F751-6C94A112A3B5}"/>
+            </a:ext>
+          </a:extLst>
+        </p:cNvPr>
+        <p:cNvGrpSpPr/>
+        <p:nvPr/>
+      </p:nvGrpSpPr>
+      <p:grpSpPr>
+        <a:xfrm>
+          <a:off x="0" y="0"/>
+          <a:ext cx="0" cy="0"/>
+          <a:chOff x="0" y="0"/>
+          <a:chExt cx="0" cy="0"/>
+        </a:xfrm>
+      </p:grpSpPr>
+      <p:pic>
+        <p:nvPicPr>
+          <p:cNvPr id="15" name="Obraz — symbol zastępczy 14" descr="Otwarta książka na biurku">
+            <a:extLst>
+              <a:ext uri="{FF2B5EF4-FFF2-40B4-BE49-F238E27FC236}">
+                <a16:creationId xmlns:a16="http://schemas.microsoft.com/office/drawing/2014/main" id="{F8E11E46-05B0-91B7-3D1E-07F14A8FC790}"/>
+              </a:ext>
+            </a:extLst>
+          </p:cNvPr>
+          <p:cNvPicPr>
+            <a:picLocks noGrp="1" noChangeAspect="1"/>
+          </p:cNvPicPr>
+          <p:nvPr>
+            <p:ph type="pic" sz="quarter" idx="13"/>
+          </p:nvPr>
+        </p:nvPicPr>
+        <p:blipFill rotWithShape="1">
+          <a:blip r:embed="rId3">
+            <a:extLst>
+              <a:ext uri="{28A0092B-C50C-407E-A947-70E740481C1C}">
+                <a14:useLocalDpi xmlns:a14="http://schemas.microsoft.com/office/drawing/2010/main" val="0"/>
+              </a:ext>
+            </a:extLst>
+          </a:blip>
+          <a:srcRect/>
+          <a:stretch/>
+        </p:blipFill>
+        <p:spPr>
+          <a:xfrm>
+            <a:off x="12192" y="2849880"/>
+            <a:ext cx="12143232" cy="4008120"/>
+          </a:xfrm>
+          <a:blipFill>
+            <a:blip r:embed="rId4"/>
+            <a:tile tx="0" ty="0" sx="100000" sy="100000" flip="none" algn="tl"/>
+          </a:blipFill>
+        </p:spPr>
+      </p:pic>
+      <p:sp>
+        <p:nvSpPr>
+          <p:cNvPr id="9" name="Tytuł 8">
+            <a:extLst>
+              <a:ext uri="{FF2B5EF4-FFF2-40B4-BE49-F238E27FC236}">
+                <a16:creationId xmlns:a16="http://schemas.microsoft.com/office/drawing/2014/main" id="{578846EB-E069-EE61-93CA-B621C7701A9D}"/>
+              </a:ext>
+            </a:extLst>
+          </p:cNvPr>
+          <p:cNvSpPr>
+            <a:spLocks noGrp="1"/>
+          </p:cNvSpPr>
+          <p:nvPr>
+            <p:ph type="ctrTitle"/>
+          </p:nvPr>
+        </p:nvSpPr>
+        <p:spPr>
+          <a:xfrm>
+            <a:off x="12192" y="-1"/>
+            <a:ext cx="12167616" cy="4284581"/>
+          </a:xfrm>
+          <a:solidFill>
+            <a:schemeClr val="accent5"/>
+          </a:solidFill>
+        </p:spPr>
+        <p:txBody>
+          <a:bodyPr rtlCol="0"/>
+          <a:lstStyle/>
+          <a:p>
+            <a:pPr algn="ctr"/>
+            <a:r>
+              <a:rPr lang="pl-PL" sz="4800" b="1" dirty="0">
+                <a:latin typeface="+mn-lt"/>
+              </a:rPr>
+              <a:t>Zasady używania i dobre praktyki</a:t>
+            </a:r>
+            <a:endParaRPr lang="pl-PL" sz="2800" b="1" dirty="0">
+              <a:latin typeface="+mn-lt"/>
+            </a:endParaRPr>
+          </a:p>
+        </p:txBody>
+      </p:sp>
+      <p:sp>
+        <p:nvSpPr>
+          <p:cNvPr id="6" name="pole tekstowe 5">
+            <a:extLst>
+              <a:ext uri="{FF2B5EF4-FFF2-40B4-BE49-F238E27FC236}">
+                <a16:creationId xmlns:a16="http://schemas.microsoft.com/office/drawing/2014/main" id="{36305BF4-09ED-1E3C-4760-0E35925AC3CC}"/>
+              </a:ext>
+            </a:extLst>
+          </p:cNvPr>
+          <p:cNvSpPr txBox="1"/>
+          <p:nvPr/>
+        </p:nvSpPr>
+        <p:spPr>
+          <a:xfrm>
+            <a:off x="606650" y="1653090"/>
+            <a:ext cx="10467750" cy="4893647"/>
+          </a:xfrm>
+          <a:prstGeom prst="rect">
+            <a:avLst/>
+          </a:prstGeom>
+          <a:noFill/>
+        </p:spPr>
+        <p:txBody>
+          <a:bodyPr wrap="square" rtlCol="0">
+            <a:spAutoFit/>
+          </a:bodyPr>
+          <a:lstStyle/>
+          <a:p>
+            <a:r>
+              <a:rPr lang="pl-PL" sz="2400" b="1" dirty="0"/>
+              <a:t>✔ </a:t>
+            </a:r>
+            <a:r>
+              <a:rPr lang="pl-PL" sz="2400" b="1" dirty="0" err="1"/>
+              <a:t>useState</a:t>
+            </a:r>
+            <a:r>
+              <a:rPr lang="pl-PL" sz="2400" b="1" dirty="0"/>
+              <a:t> – mały lokalny stan</a:t>
+            </a:r>
+            <a:br>
+              <a:rPr lang="pl-PL" sz="2400" b="1" dirty="0"/>
+            </a:br>
+            <a:br>
+              <a:rPr lang="pl-PL" sz="2400" b="1" dirty="0"/>
+            </a:br>
+            <a:r>
+              <a:rPr lang="pl-PL" sz="2400" b="1" dirty="0"/>
+              <a:t>✔ </a:t>
+            </a:r>
+            <a:r>
+              <a:rPr lang="pl-PL" sz="2400" b="1" dirty="0" err="1"/>
+              <a:t>Zustand</a:t>
+            </a:r>
+            <a:r>
+              <a:rPr lang="pl-PL" sz="2400" b="1" dirty="0"/>
+              <a:t> – średnie aplikacje i szybki development</a:t>
+            </a:r>
+            <a:br>
+              <a:rPr lang="pl-PL" sz="2400" b="1" dirty="0"/>
+            </a:br>
+            <a:br>
+              <a:rPr lang="pl-PL" sz="2400" b="1" dirty="0"/>
+            </a:br>
+            <a:r>
+              <a:rPr lang="pl-PL" sz="2400" b="1" dirty="0"/>
+              <a:t>✔ </a:t>
+            </a:r>
+            <a:r>
+              <a:rPr lang="pl-PL" sz="2400" b="1" dirty="0" err="1"/>
+              <a:t>Redux</a:t>
+            </a:r>
+            <a:r>
+              <a:rPr lang="pl-PL" sz="2400" b="1" dirty="0"/>
+              <a:t> Toolkit – duże aplikacje i rozbudowana logika</a:t>
+            </a:r>
+            <a:br>
+              <a:rPr lang="pl-PL" sz="2400" b="1" dirty="0"/>
+            </a:br>
+            <a:br>
+              <a:rPr lang="pl-PL" sz="2400" b="1" dirty="0"/>
+            </a:br>
+            <a:r>
+              <a:rPr lang="pl-PL" sz="2400" b="1" dirty="0"/>
+              <a:t>✔ Unikaj </a:t>
+            </a:r>
+            <a:r>
+              <a:rPr lang="pl-PL" sz="2400" b="1" dirty="0" err="1"/>
+              <a:t>prop</a:t>
+            </a:r>
+            <a:r>
+              <a:rPr lang="pl-PL" sz="2400" b="1" dirty="0"/>
+              <a:t> </a:t>
+            </a:r>
+            <a:r>
+              <a:rPr lang="pl-PL" sz="2400" b="1" dirty="0" err="1"/>
+              <a:t>drillingu</a:t>
+            </a:r>
+            <a:br>
+              <a:rPr lang="pl-PL" sz="2400" b="1" dirty="0"/>
+            </a:br>
+            <a:br>
+              <a:rPr lang="pl-PL" sz="2400" b="1" dirty="0"/>
+            </a:br>
+            <a:r>
+              <a:rPr lang="pl-PL" sz="2400" b="1" dirty="0"/>
+              <a:t>✔ Korzystaj z </a:t>
+            </a:r>
+            <a:r>
+              <a:rPr lang="pl-PL" sz="2400" b="1" dirty="0" err="1"/>
+              <a:t>selectorów</a:t>
+            </a:r>
+            <a:br>
+              <a:rPr lang="pl-PL" sz="2400" b="1" dirty="0"/>
+            </a:br>
+            <a:br>
+              <a:rPr lang="pl-PL" sz="2400" b="1" dirty="0"/>
+            </a:br>
+            <a:r>
+              <a:rPr lang="pl-PL" sz="2400" b="1" dirty="0"/>
+              <a:t>✔ Nie trzymaj wszystkiego w globalnym </a:t>
+            </a:r>
+            <a:r>
+              <a:rPr lang="pl-PL" sz="2400" b="1" dirty="0" err="1"/>
+              <a:t>store</a:t>
+            </a:r>
+            <a:br>
+              <a:rPr lang="pl-PL" sz="2400" b="1" dirty="0"/>
+            </a:br>
+            <a:br>
+              <a:rPr lang="pl-PL" sz="2400" b="1" dirty="0"/>
+            </a:br>
+            <a:r>
+              <a:rPr lang="pl-PL" sz="2400" b="1" dirty="0"/>
+              <a:t>✔ Oddzielaj logikę od UI</a:t>
+            </a:r>
+          </a:p>
+        </p:txBody>
+      </p:sp>
+    </p:spTree>
+    <p:extLst>
+      <p:ext uri="{BB962C8B-B14F-4D97-AF65-F5344CB8AC3E}">
+        <p14:creationId xmlns:p14="http://schemas.microsoft.com/office/powerpoint/2010/main" val="4178255800"/>
+      </p:ext>
+    </p:extLst>
+  </p:cSld>
+  <p:clrMapOvr>
+    <a:masterClrMapping/>
+  </p:clrMapOvr>
+</p:sld>
+</file>
+
+<file path=ppt/slides/slide15.xml><?xml version="1.0" encoding="utf-8"?>
 <p:sld xmlns:a="http://schemas.openxmlformats.org/drawingml/2006/main" xmlns:r="http://schemas.openxmlformats.org/officeDocument/2006/relationships" xmlns:p="http://schemas.openxmlformats.org/presentationml/2006/main">
   <p:cSld>
     <p:spTree>
@@ -27755,7 +30341,7 @@
             <a:fld id="{11A71338-8BA2-4C79-A6C5-5A8E30081D0C}" type="slidenum">
               <a:rPr lang="pl-PL" smtClean="0"/>
               <a:pPr rtl="0"/>
-              <a:t>11</a:t>
+              <a:t>15</a:t>
             </a:fld>
             <a:endParaRPr lang="pl-PL"/>
           </a:p>
@@ -27774,7 +30360,7 @@
 </p:sld>
 </file>
 
-<file path=ppt/slides/slide12.xml><?xml version="1.0" encoding="utf-8"?>
+<file path=ppt/slides/slide16.xml><?xml version="1.0" encoding="utf-8"?>
 <p:sld xmlns:a="http://schemas.openxmlformats.org/drawingml/2006/main" xmlns:r="http://schemas.openxmlformats.org/officeDocument/2006/relationships" xmlns:p="http://schemas.openxmlformats.org/presentationml/2006/main">
   <p:cSld>
     <p:spTree>
@@ -27968,7 +30554,7 @@
             <a:fld id="{11A71338-8BA2-4C79-A6C5-5A8E30081D0C}" type="slidenum">
               <a:rPr lang="pl-PL" smtClean="0"/>
               <a:pPr rtl="0"/>
-              <a:t>12</a:t>
+              <a:t>16</a:t>
             </a:fld>
             <a:endParaRPr lang="pl-PL"/>
           </a:p>
@@ -28393,40 +30979,6 @@
             <a:r>
               <a:rPr lang="pl-PL"/>
               <a:t>20XX-02-02</a:t>
-            </a:r>
-          </a:p>
-        </p:txBody>
-      </p:sp>
-      <p:sp>
-        <p:nvSpPr>
-          <p:cNvPr id="75" name="Stopka — symbol zastępczy 74">
-            <a:extLst>
-              <a:ext uri="{FF2B5EF4-FFF2-40B4-BE49-F238E27FC236}">
-                <a16:creationId xmlns:a16="http://schemas.microsoft.com/office/drawing/2014/main" id="{A8951722-FA1A-4F09-A3E3-A7AA2499DE79}"/>
-              </a:ext>
-            </a:extLst>
-          </p:cNvPr>
-          <p:cNvSpPr>
-            <a:spLocks noGrp="1"/>
-          </p:cNvSpPr>
-          <p:nvPr>
-            <p:ph type="ftr" sz="quarter" idx="11"/>
-          </p:nvPr>
-        </p:nvSpPr>
-        <p:spPr>
-          <a:xfrm>
-            <a:off x="4200861" y="6319838"/>
-            <a:ext cx="3982781" cy="365125"/>
-          </a:xfrm>
-        </p:spPr>
-        <p:txBody>
-          <a:bodyPr rtlCol="0"/>
-          <a:lstStyle/>
-          <a:p>
-            <a:pPr rtl="0"/>
-            <a:r>
-              <a:rPr lang="pl-PL"/>
-              <a:t>TYTUŁ PREZENTACJI</a:t>
             </a:r>
           </a:p>
         </p:txBody>
@@ -30099,53 +32651,7 @@
               <a:rPr lang="pl-PL" sz="2800" b="1" dirty="0">
                 <a:latin typeface="+mj-lt"/>
               </a:rPr>
-              <a:t> </a:t>
-            </a:r>
-            <a:r>
-              <a:rPr lang="pl-PL" sz="2800" b="1" dirty="0" err="1">
-                <a:latin typeface="+mj-lt"/>
-              </a:rPr>
-              <a:t>Toolkid</a:t>
-            </a:r>
-            <a:r>
-              <a:rPr lang="pl-PL" sz="2800" b="1" dirty="0">
-                <a:latin typeface="+mj-lt"/>
-              </a:rPr>
-              <a:t>:</a:t>
-            </a:r>
-          </a:p>
-        </p:txBody>
-      </p:sp>
-      <p:sp>
-        <p:nvSpPr>
-          <p:cNvPr id="75" name="Stopka — symbol zastępczy 74">
-            <a:extLst>
-              <a:ext uri="{FF2B5EF4-FFF2-40B4-BE49-F238E27FC236}">
-                <a16:creationId xmlns:a16="http://schemas.microsoft.com/office/drawing/2014/main" id="{243565F7-16B8-6760-1D1D-F8C13654FF12}"/>
-              </a:ext>
-            </a:extLst>
-          </p:cNvPr>
-          <p:cNvSpPr>
-            <a:spLocks noGrp="1"/>
-          </p:cNvSpPr>
-          <p:nvPr>
-            <p:ph type="ftr" sz="quarter" idx="11"/>
-          </p:nvPr>
-        </p:nvSpPr>
-        <p:spPr>
-          <a:xfrm>
-            <a:off x="4200861" y="6319838"/>
-            <a:ext cx="3982781" cy="365125"/>
-          </a:xfrm>
-        </p:spPr>
-        <p:txBody>
-          <a:bodyPr rtlCol="0"/>
-          <a:lstStyle/>
-          <a:p>
-            <a:pPr rtl="0"/>
-            <a:r>
-              <a:rPr lang="pl-PL"/>
-              <a:t>TYTUŁ PREZENTACJI</a:t>
+              <a:t> Toolkit:</a:t>
             </a:r>
           </a:p>
         </p:txBody>
@@ -30969,41 +33475,11 @@
               <a:rPr lang="pl-PL" sz="4800" b="1" dirty="0" err="1"/>
               <a:t>Zustand</a:t>
             </a:r>
+            <a:r>
+              <a:rPr lang="pl-PL" sz="4800" b="1" dirty="0"/>
+              <a:t> – store.js</a:t>
+            </a:r>
             <a:endParaRPr lang="pl-PL" sz="2800" dirty="0"/>
-          </a:p>
-        </p:txBody>
-      </p:sp>
-      <p:sp>
-        <p:nvSpPr>
-          <p:cNvPr id="75" name="Stopka — symbol zastępczy 74">
-            <a:extLst>
-              <a:ext uri="{FF2B5EF4-FFF2-40B4-BE49-F238E27FC236}">
-                <a16:creationId xmlns:a16="http://schemas.microsoft.com/office/drawing/2014/main" id="{042EB41D-4CDC-D849-AEF0-809E4B03D9A4}"/>
-              </a:ext>
-            </a:extLst>
-          </p:cNvPr>
-          <p:cNvSpPr>
-            <a:spLocks noGrp="1"/>
-          </p:cNvSpPr>
-          <p:nvPr>
-            <p:ph type="ftr" sz="quarter" idx="11"/>
-          </p:nvPr>
-        </p:nvSpPr>
-        <p:spPr>
-          <a:xfrm>
-            <a:off x="4200861" y="6319838"/>
-            <a:ext cx="3982781" cy="365125"/>
-          </a:xfrm>
-        </p:spPr>
-        <p:txBody>
-          <a:bodyPr rtlCol="0"/>
-          <a:lstStyle/>
-          <a:p>
-            <a:pPr rtl="0"/>
-            <a:r>
-              <a:rPr lang="pl-PL"/>
-              <a:t>TYTUŁ PREZENTACJI</a:t>
-            </a:r>
           </a:p>
         </p:txBody>
       </p:sp>
@@ -31021,8 +33497,8 @@
         </p:nvSpPr>
         <p:spPr>
           <a:xfrm>
-            <a:off x="171929" y="223896"/>
-            <a:ext cx="3417091" cy="2308324"/>
+            <a:off x="503399" y="1378058"/>
+            <a:ext cx="6514621" cy="4278094"/>
           </a:xfrm>
           <a:prstGeom prst="rect">
             <a:avLst/>
@@ -31036,822 +33512,168 @@
           <a:lstStyle/>
           <a:p>
             <a:r>
-              <a:rPr lang="pl-PL" sz="1200" b="1" dirty="0"/>
+              <a:rPr lang="pl-PL" sz="2000" b="1" dirty="0"/>
               <a:t>store.js</a:t>
             </a:r>
           </a:p>
           <a:p>
             <a:r>
-              <a:rPr lang="pl-PL" sz="1200" b="1" dirty="0"/>
+              <a:rPr lang="pl-PL" sz="2000" b="1" dirty="0"/>
               <a:t>import { </a:t>
             </a:r>
             <a:r>
-              <a:rPr lang="pl-PL" sz="1200" b="1" dirty="0" err="1"/>
+              <a:rPr lang="pl-PL" sz="2000" b="1" dirty="0" err="1"/>
               <a:t>create</a:t>
             </a:r>
             <a:r>
-              <a:rPr lang="pl-PL" sz="1200" b="1" dirty="0"/>
+              <a:rPr lang="pl-PL" sz="2000" b="1" dirty="0"/>
               <a:t> } from '</a:t>
             </a:r>
             <a:r>
-              <a:rPr lang="pl-PL" sz="1200" b="1" dirty="0" err="1"/>
+              <a:rPr lang="pl-PL" sz="2000" b="1" dirty="0" err="1"/>
               <a:t>zustand</a:t>
             </a:r>
             <a:r>
-              <a:rPr lang="pl-PL" sz="1200" b="1" dirty="0"/>
+              <a:rPr lang="pl-PL" sz="2000" b="1" dirty="0"/>
               <a:t>'</a:t>
             </a:r>
           </a:p>
           <a:p>
-            <a:endParaRPr lang="pl-PL" sz="1200" b="1" dirty="0"/>
+            <a:endParaRPr lang="pl-PL" sz="2000" b="1" dirty="0"/>
           </a:p>
           <a:p>
             <a:r>
-              <a:rPr lang="pl-PL" sz="1200" b="1" dirty="0"/>
+              <a:rPr lang="pl-PL" sz="2000" b="1" dirty="0"/>
               <a:t>// To jest nasz globalny "magazyn" danych</a:t>
             </a:r>
           </a:p>
           <a:p>
             <a:r>
-              <a:rPr lang="pl-PL" sz="1200" b="1" dirty="0"/>
+              <a:rPr lang="pl-PL" sz="2000" b="1" dirty="0"/>
               <a:t>export </a:t>
             </a:r>
             <a:r>
-              <a:rPr lang="pl-PL" sz="1200" b="1" dirty="0" err="1"/>
+              <a:rPr lang="pl-PL" sz="2000" b="1" dirty="0" err="1"/>
               <a:t>const</a:t>
             </a:r>
             <a:r>
-              <a:rPr lang="pl-PL" sz="1200" b="1" dirty="0"/>
+              <a:rPr lang="pl-PL" sz="2000" b="1" dirty="0"/>
               <a:t> </a:t>
             </a:r>
             <a:r>
-              <a:rPr lang="pl-PL" sz="1200" b="1" dirty="0" err="1"/>
+              <a:rPr lang="pl-PL" sz="2000" b="1" dirty="0" err="1"/>
               <a:t>useStore</a:t>
             </a:r>
             <a:r>
-              <a:rPr lang="pl-PL" sz="1200" b="1" dirty="0"/>
+              <a:rPr lang="pl-PL" sz="2000" b="1" dirty="0"/>
               <a:t> = </a:t>
             </a:r>
             <a:r>
-              <a:rPr lang="pl-PL" sz="1200" b="1" dirty="0" err="1"/>
+              <a:rPr lang="pl-PL" sz="2000" b="1" dirty="0" err="1"/>
               <a:t>create</a:t>
             </a:r>
             <a:r>
-              <a:rPr lang="pl-PL" sz="1200" b="1" dirty="0"/>
+              <a:rPr lang="pl-PL" sz="2000" b="1" dirty="0"/>
               <a:t>((set) =&gt; ({</a:t>
             </a:r>
           </a:p>
           <a:p>
             <a:r>
-              <a:rPr lang="pl-PL" sz="1200" b="1" dirty="0"/>
+              <a:rPr lang="pl-PL" sz="2000" b="1" dirty="0"/>
               <a:t>  </a:t>
             </a:r>
             <a:r>
-              <a:rPr lang="pl-PL" sz="1200" b="1" dirty="0" err="1"/>
+              <a:rPr lang="pl-PL" sz="2000" b="1" dirty="0" err="1"/>
               <a:t>bears</a:t>
             </a:r>
             <a:r>
-              <a:rPr lang="pl-PL" sz="1200" b="1" dirty="0"/>
+              <a:rPr lang="pl-PL" sz="2000" b="1" dirty="0"/>
               <a:t>: 0,</a:t>
             </a:r>
           </a:p>
           <a:p>
-            <a:r>
-              <a:rPr lang="pl-PL" sz="1200" b="1" dirty="0"/>
-              <a:t>  // Akcja: dodawanie</a:t>
-            </a:r>
+            <a:endParaRPr lang="pl-PL" sz="2000" b="1" dirty="0"/>
           </a:p>
           <a:p>
             <a:r>
-              <a:rPr lang="pl-PL" sz="1200" b="1" dirty="0"/>
-              <a:t>  </a:t>
-            </a:r>
-            <a:r>
-              <a:rPr lang="pl-PL" sz="1200" b="1" dirty="0" err="1"/>
-              <a:t>increasePopulation</a:t>
-            </a:r>
-            <a:r>
-              <a:rPr lang="pl-PL" sz="1200" b="1" dirty="0"/>
-              <a:t>: () =&gt; set((</a:t>
-            </a:r>
-            <a:r>
-              <a:rPr lang="pl-PL" sz="1200" b="1" dirty="0" err="1"/>
-              <a:t>state</a:t>
-            </a:r>
-            <a:r>
-              <a:rPr lang="pl-PL" sz="1200" b="1" dirty="0"/>
-              <a:t>) =&gt; ({ </a:t>
-            </a:r>
-            <a:r>
-              <a:rPr lang="pl-PL" sz="1200" b="1" dirty="0" err="1"/>
-              <a:t>bears</a:t>
-            </a:r>
-            <a:r>
-              <a:rPr lang="pl-PL" sz="1200" b="1" dirty="0"/>
-              <a:t>: </a:t>
-            </a:r>
-            <a:r>
-              <a:rPr lang="pl-PL" sz="1200" b="1" dirty="0" err="1"/>
-              <a:t>state.bears</a:t>
-            </a:r>
-            <a:r>
-              <a:rPr lang="pl-PL" sz="1200" b="1" dirty="0"/>
-              <a:t> + 1 })),</a:t>
+              <a:rPr lang="pl-PL" sz="2000" b="1" dirty="0"/>
+              <a:t>  // Akcja: dodawanie</a:t>
             </a:r>
           </a:p>
           <a:p>
             <a:r>
-              <a:rPr lang="pl-PL" sz="1200" b="1" dirty="0"/>
-              <a:t>  // Akcja: resetowanie</a:t>
+              <a:rPr lang="pl-PL" sz="2000" b="1" dirty="0"/>
+              <a:t>  </a:t>
+            </a:r>
+            <a:r>
+              <a:rPr lang="pl-PL" sz="2000" b="1" dirty="0" err="1"/>
+              <a:t>increasePopulation</a:t>
+            </a:r>
+            <a:r>
+              <a:rPr lang="pl-PL" sz="2000" b="1" dirty="0"/>
+              <a:t>: () =&gt; set((</a:t>
+            </a:r>
+            <a:r>
+              <a:rPr lang="pl-PL" sz="2000" b="1" dirty="0" err="1"/>
+              <a:t>state</a:t>
+            </a:r>
+            <a:r>
+              <a:rPr lang="pl-PL" sz="2000" b="1" dirty="0"/>
+              <a:t>) =&gt; ({ </a:t>
+            </a:r>
+            <a:r>
+              <a:rPr lang="pl-PL" sz="2000" b="1" dirty="0" err="1"/>
+              <a:t>bears</a:t>
+            </a:r>
+            <a:r>
+              <a:rPr lang="pl-PL" sz="2000" b="1" dirty="0"/>
+              <a:t>: </a:t>
+            </a:r>
+            <a:r>
+              <a:rPr lang="pl-PL" sz="2000" b="1" dirty="0" err="1"/>
+              <a:t>state.bears</a:t>
+            </a:r>
+            <a:r>
+              <a:rPr lang="pl-PL" sz="2000" b="1" dirty="0"/>
+              <a:t> + 1 })),</a:t>
             </a:r>
           </a:p>
           <a:p>
-            <a:r>
-              <a:rPr lang="pl-PL" sz="1200" b="1" dirty="0"/>
-              <a:t>  </a:t>
-            </a:r>
-            <a:r>
-              <a:rPr lang="pl-PL" sz="1200" b="1" dirty="0" err="1"/>
-              <a:t>removeAllBears</a:t>
-            </a:r>
-            <a:r>
-              <a:rPr lang="pl-PL" sz="1200" b="1" dirty="0"/>
-              <a:t>: () =&gt; set({ </a:t>
-            </a:r>
-            <a:r>
-              <a:rPr lang="pl-PL" sz="1200" b="1" dirty="0" err="1"/>
-              <a:t>bears</a:t>
-            </a:r>
-            <a:r>
-              <a:rPr lang="pl-PL" sz="1200" b="1" dirty="0"/>
-              <a:t>: 0 }),</a:t>
-            </a:r>
+            <a:endParaRPr lang="pl-PL" sz="2000" b="1" dirty="0"/>
           </a:p>
           <a:p>
             <a:r>
+              <a:rPr lang="pl-PL" sz="2000" b="1" dirty="0"/>
+              <a:t>  // Akcja: resetowanie</a:t>
+            </a:r>
+          </a:p>
+          <a:p>
+            <a:r>
+              <a:rPr lang="pl-PL" sz="2000" b="1" dirty="0"/>
+              <a:t>  </a:t>
+            </a:r>
+            <a:r>
+              <a:rPr lang="pl-PL" sz="2000" b="1" dirty="0" err="1"/>
+              <a:t>removeAllBears</a:t>
+            </a:r>
+            <a:r>
+              <a:rPr lang="pl-PL" sz="2000" b="1" dirty="0"/>
+              <a:t>: () =&gt; set({ </a:t>
+            </a:r>
+            <a:r>
+              <a:rPr lang="pl-PL" sz="2000" b="1" dirty="0" err="1"/>
+              <a:t>bears</a:t>
+            </a:r>
+            <a:r>
+              <a:rPr lang="pl-PL" sz="2000" b="1" dirty="0"/>
+              <a:t>: 0 }),</a:t>
+            </a:r>
+          </a:p>
+          <a:p>
+            <a:r>
               <a:rPr lang="pl-PL" sz="1200" b="1" dirty="0"/>
               <a:t>}))</a:t>
             </a:r>
-          </a:p>
-        </p:txBody>
-      </p:sp>
-      <p:sp>
-        <p:nvSpPr>
-          <p:cNvPr id="12" name="pole tekstowe 11">
-            <a:extLst>
-              <a:ext uri="{FF2B5EF4-FFF2-40B4-BE49-F238E27FC236}">
-                <a16:creationId xmlns:a16="http://schemas.microsoft.com/office/drawing/2014/main" id="{3328BC66-ACD6-0F1E-E47B-D235305C005F}"/>
-              </a:ext>
-            </a:extLst>
-          </p:cNvPr>
-          <p:cNvSpPr txBox="1"/>
-          <p:nvPr/>
-        </p:nvSpPr>
-        <p:spPr>
-          <a:xfrm>
-            <a:off x="7669530" y="18156"/>
-            <a:ext cx="4350541" cy="6863417"/>
-          </a:xfrm>
-          <a:prstGeom prst="rect">
-            <a:avLst/>
-          </a:prstGeom>
-          <a:noFill/>
-        </p:spPr>
-        <p:txBody>
-          <a:bodyPr wrap="square" rtlCol="0">
-            <a:spAutoFit/>
-          </a:bodyPr>
-          <a:lstStyle/>
-          <a:p>
-            <a:r>
-              <a:rPr lang="pl-PL" sz="1100" b="1" dirty="0" err="1"/>
-              <a:t>App.jsx</a:t>
-            </a:r>
-            <a:endParaRPr lang="pl-PL" sz="1100" b="1" dirty="0"/>
-          </a:p>
-          <a:p>
-            <a:r>
-              <a:rPr lang="pl-PL" sz="1100" b="1" dirty="0"/>
-              <a:t>import { </a:t>
-            </a:r>
-            <a:r>
-              <a:rPr lang="pl-PL" sz="1100" b="1" dirty="0" err="1"/>
-              <a:t>useStore</a:t>
-            </a:r>
-            <a:r>
-              <a:rPr lang="pl-PL" sz="1100" b="1" dirty="0"/>
-              <a:t> } from './</a:t>
-            </a:r>
-            <a:r>
-              <a:rPr lang="pl-PL" sz="1100" b="1" dirty="0" err="1"/>
-              <a:t>store</a:t>
-            </a:r>
-            <a:r>
-              <a:rPr lang="pl-PL" sz="1100" b="1" dirty="0"/>
-              <a:t>'</a:t>
-            </a:r>
-          </a:p>
-          <a:p>
-            <a:endParaRPr lang="pl-PL" sz="1100" b="1" dirty="0"/>
-          </a:p>
-          <a:p>
-            <a:r>
-              <a:rPr lang="pl-PL" sz="1100" b="1" dirty="0" err="1"/>
-              <a:t>function</a:t>
-            </a:r>
-            <a:r>
-              <a:rPr lang="pl-PL" sz="1100" b="1" dirty="0"/>
-              <a:t> </a:t>
-            </a:r>
-            <a:r>
-              <a:rPr lang="pl-PL" sz="1100" b="1" dirty="0" err="1"/>
-              <a:t>App</a:t>
-            </a:r>
-            <a:r>
-              <a:rPr lang="pl-PL" sz="1100" b="1" dirty="0"/>
-              <a:t>() {</a:t>
-            </a:r>
-          </a:p>
-          <a:p>
-            <a:r>
-              <a:rPr lang="pl-PL" sz="1100" b="1" dirty="0"/>
-              <a:t>  // Pobieramy dane i funkcje ze </a:t>
-            </a:r>
-            <a:r>
-              <a:rPr lang="pl-PL" sz="1100" b="1" dirty="0" err="1"/>
-              <a:t>store'a</a:t>
-            </a:r>
-            <a:endParaRPr lang="pl-PL" sz="1100" b="1" dirty="0"/>
-          </a:p>
-          <a:p>
-            <a:r>
-              <a:rPr lang="pl-PL" sz="1100" b="1" dirty="0"/>
-              <a:t>  </a:t>
-            </a:r>
-            <a:r>
-              <a:rPr lang="pl-PL" sz="1100" b="1" dirty="0" err="1"/>
-              <a:t>const</a:t>
-            </a:r>
-            <a:r>
-              <a:rPr lang="pl-PL" sz="1100" b="1" dirty="0"/>
-              <a:t> </a:t>
-            </a:r>
-            <a:r>
-              <a:rPr lang="pl-PL" sz="1100" b="1" dirty="0" err="1"/>
-              <a:t>bears</a:t>
-            </a:r>
-            <a:r>
-              <a:rPr lang="pl-PL" sz="1100" b="1" dirty="0"/>
-              <a:t> = </a:t>
-            </a:r>
-            <a:r>
-              <a:rPr lang="pl-PL" sz="1100" b="1" dirty="0" err="1"/>
-              <a:t>useStore</a:t>
-            </a:r>
-            <a:r>
-              <a:rPr lang="pl-PL" sz="1100" b="1" dirty="0"/>
-              <a:t>((</a:t>
-            </a:r>
-            <a:r>
-              <a:rPr lang="pl-PL" sz="1100" b="1" dirty="0" err="1"/>
-              <a:t>state</a:t>
-            </a:r>
-            <a:r>
-              <a:rPr lang="pl-PL" sz="1100" b="1" dirty="0"/>
-              <a:t>) =&gt; </a:t>
-            </a:r>
-            <a:r>
-              <a:rPr lang="pl-PL" sz="1100" b="1" dirty="0" err="1"/>
-              <a:t>state.bears</a:t>
-            </a:r>
-            <a:r>
-              <a:rPr lang="pl-PL" sz="1100" b="1" dirty="0"/>
-              <a:t>)</a:t>
-            </a:r>
-          </a:p>
-          <a:p>
-            <a:r>
-              <a:rPr lang="pl-PL" sz="1100" b="1" dirty="0"/>
-              <a:t>  </a:t>
-            </a:r>
-            <a:r>
-              <a:rPr lang="pl-PL" sz="1100" b="1" dirty="0" err="1"/>
-              <a:t>const</a:t>
-            </a:r>
-            <a:r>
-              <a:rPr lang="pl-PL" sz="1100" b="1" dirty="0"/>
-              <a:t> </a:t>
-            </a:r>
-            <a:r>
-              <a:rPr lang="pl-PL" sz="1100" b="1" dirty="0" err="1"/>
-              <a:t>increase</a:t>
-            </a:r>
-            <a:r>
-              <a:rPr lang="pl-PL" sz="1100" b="1" dirty="0"/>
-              <a:t> = </a:t>
-            </a:r>
-            <a:r>
-              <a:rPr lang="pl-PL" sz="1100" b="1" dirty="0" err="1"/>
-              <a:t>useStore</a:t>
-            </a:r>
-            <a:r>
-              <a:rPr lang="pl-PL" sz="1100" b="1" dirty="0"/>
-              <a:t>((</a:t>
-            </a:r>
-            <a:r>
-              <a:rPr lang="pl-PL" sz="1100" b="1" dirty="0" err="1"/>
-              <a:t>state</a:t>
-            </a:r>
-            <a:r>
-              <a:rPr lang="pl-PL" sz="1100" b="1" dirty="0"/>
-              <a:t>) =&gt; </a:t>
-            </a:r>
-            <a:r>
-              <a:rPr lang="pl-PL" sz="1100" b="1" dirty="0" err="1"/>
-              <a:t>state.increasePopulation</a:t>
-            </a:r>
-            <a:r>
-              <a:rPr lang="pl-PL" sz="1100" b="1" dirty="0"/>
-              <a:t>)</a:t>
-            </a:r>
-          </a:p>
-          <a:p>
-            <a:r>
-              <a:rPr lang="pl-PL" sz="1100" b="1" dirty="0"/>
-              <a:t>  </a:t>
-            </a:r>
-            <a:r>
-              <a:rPr lang="pl-PL" sz="1100" b="1" dirty="0" err="1"/>
-              <a:t>const</a:t>
-            </a:r>
-            <a:r>
-              <a:rPr lang="pl-PL" sz="1100" b="1" dirty="0"/>
-              <a:t> reset = </a:t>
-            </a:r>
-            <a:r>
-              <a:rPr lang="pl-PL" sz="1100" b="1" dirty="0" err="1"/>
-              <a:t>useStore</a:t>
-            </a:r>
-            <a:r>
-              <a:rPr lang="pl-PL" sz="1100" b="1" dirty="0"/>
-              <a:t>((</a:t>
-            </a:r>
-            <a:r>
-              <a:rPr lang="pl-PL" sz="1100" b="1" dirty="0" err="1"/>
-              <a:t>state</a:t>
-            </a:r>
-            <a:r>
-              <a:rPr lang="pl-PL" sz="1100" b="1" dirty="0"/>
-              <a:t>) =&gt; </a:t>
-            </a:r>
-            <a:r>
-              <a:rPr lang="pl-PL" sz="1100" b="1" dirty="0" err="1"/>
-              <a:t>state.removeAllBears</a:t>
-            </a:r>
-            <a:r>
-              <a:rPr lang="pl-PL" sz="1100" b="1" dirty="0"/>
-              <a:t>)</a:t>
-            </a:r>
-          </a:p>
-          <a:p>
-            <a:endParaRPr lang="pl-PL" sz="1100" b="1" dirty="0"/>
-          </a:p>
-          <a:p>
-            <a:r>
-              <a:rPr lang="pl-PL" sz="1100" b="1" dirty="0"/>
-              <a:t>  return (</a:t>
-            </a:r>
-          </a:p>
-          <a:p>
-            <a:r>
-              <a:rPr lang="pl-PL" sz="1100" b="1" dirty="0"/>
-              <a:t>    &lt;div style={{ </a:t>
-            </a:r>
-            <a:r>
-              <a:rPr lang="pl-PL" sz="1100" b="1" dirty="0" err="1"/>
-              <a:t>textAlign</a:t>
-            </a:r>
-            <a:r>
-              <a:rPr lang="pl-PL" sz="1100" b="1" dirty="0"/>
-              <a:t>: '</a:t>
-            </a:r>
-            <a:r>
-              <a:rPr lang="pl-PL" sz="1100" b="1" dirty="0" err="1"/>
-              <a:t>center</a:t>
-            </a:r>
-            <a:r>
-              <a:rPr lang="pl-PL" sz="1100" b="1" dirty="0"/>
-              <a:t>', </a:t>
-            </a:r>
-            <a:r>
-              <a:rPr lang="pl-PL" sz="1100" b="1" dirty="0" err="1"/>
-              <a:t>marginTop</a:t>
-            </a:r>
-            <a:r>
-              <a:rPr lang="pl-PL" sz="1100" b="1" dirty="0"/>
-              <a:t>: '50px', </a:t>
-            </a:r>
-            <a:r>
-              <a:rPr lang="pl-PL" sz="1100" b="1" dirty="0" err="1"/>
-              <a:t>fontFamily</a:t>
-            </a:r>
-            <a:r>
-              <a:rPr lang="pl-PL" sz="1100" b="1" dirty="0"/>
-              <a:t>: '</a:t>
-            </a:r>
-            <a:r>
-              <a:rPr lang="pl-PL" sz="1100" b="1" dirty="0" err="1"/>
-              <a:t>sans-serif</a:t>
-            </a:r>
-            <a:r>
-              <a:rPr lang="pl-PL" sz="1100" b="1" dirty="0"/>
-              <a:t>' }}&gt;</a:t>
-            </a:r>
-          </a:p>
-          <a:p>
-            <a:r>
-              <a:rPr lang="pl-PL" sz="1100" b="1" dirty="0"/>
-              <a:t>      &lt;h1&gt;Prezentacja: </a:t>
-            </a:r>
-            <a:r>
-              <a:rPr lang="pl-PL" sz="1100" b="1" dirty="0" err="1"/>
-              <a:t>Zustand</a:t>
-            </a:r>
-            <a:r>
-              <a:rPr lang="pl-PL" sz="1100" b="1" dirty="0"/>
-              <a:t>&lt;/h1&gt;</a:t>
-            </a:r>
-          </a:p>
-          <a:p>
-            <a:r>
-              <a:rPr lang="pl-PL" sz="1100" b="1" dirty="0"/>
-              <a:t>      &lt;div style={{ </a:t>
-            </a:r>
-            <a:r>
-              <a:rPr lang="pl-PL" sz="1100" b="1" dirty="0" err="1"/>
-              <a:t>fontSize</a:t>
-            </a:r>
-            <a:r>
-              <a:rPr lang="pl-PL" sz="1100" b="1" dirty="0"/>
-              <a:t>: '50px', </a:t>
-            </a:r>
-            <a:r>
-              <a:rPr lang="pl-PL" sz="1100" b="1" dirty="0" err="1"/>
-              <a:t>margin</a:t>
-            </a:r>
-            <a:r>
-              <a:rPr lang="pl-PL" sz="1100" b="1" dirty="0"/>
-              <a:t>: '20px' }}&gt;</a:t>
-            </a:r>
-          </a:p>
-          <a:p>
-            <a:r>
-              <a:rPr lang="pl-PL" sz="1100" b="1" dirty="0"/>
-              <a:t>        🐻 {</a:t>
-            </a:r>
-            <a:r>
-              <a:rPr lang="pl-PL" sz="1100" b="1" dirty="0" err="1"/>
-              <a:t>bears</a:t>
-            </a:r>
-            <a:r>
-              <a:rPr lang="pl-PL" sz="1100" b="1" dirty="0"/>
-              <a:t>}</a:t>
-            </a:r>
-          </a:p>
-          <a:p>
-            <a:r>
-              <a:rPr lang="pl-PL" sz="1100" b="1" dirty="0"/>
-              <a:t>      &lt;/div&gt;</a:t>
-            </a:r>
-          </a:p>
-          <a:p>
-            <a:r>
-              <a:rPr lang="pl-PL" sz="1100" b="1" dirty="0"/>
-              <a:t>      &lt;</a:t>
-            </a:r>
-            <a:r>
-              <a:rPr lang="pl-PL" sz="1100" b="1" dirty="0" err="1"/>
-              <a:t>button</a:t>
-            </a:r>
-            <a:r>
-              <a:rPr lang="pl-PL" sz="1100" b="1" dirty="0"/>
-              <a:t> </a:t>
-            </a:r>
-          </a:p>
-          <a:p>
-            <a:r>
-              <a:rPr lang="pl-PL" sz="1100" b="1" dirty="0"/>
-              <a:t>        </a:t>
-            </a:r>
-            <a:r>
-              <a:rPr lang="pl-PL" sz="1100" b="1" dirty="0" err="1"/>
-              <a:t>onClick</a:t>
-            </a:r>
-            <a:r>
-              <a:rPr lang="pl-PL" sz="1100" b="1" dirty="0"/>
-              <a:t>={</a:t>
-            </a:r>
-            <a:r>
-              <a:rPr lang="pl-PL" sz="1100" b="1" dirty="0" err="1"/>
-              <a:t>increase</a:t>
-            </a:r>
-            <a:r>
-              <a:rPr lang="pl-PL" sz="1100" b="1" dirty="0"/>
-              <a:t>} </a:t>
-            </a:r>
-          </a:p>
-          <a:p>
-            <a:r>
-              <a:rPr lang="pl-PL" sz="1100" b="1" dirty="0"/>
-              <a:t>        style={{ </a:t>
-            </a:r>
-            <a:r>
-              <a:rPr lang="pl-PL" sz="1100" b="1" dirty="0" err="1"/>
-              <a:t>padding</a:t>
-            </a:r>
-            <a:r>
-              <a:rPr lang="pl-PL" sz="1100" b="1" dirty="0"/>
-              <a:t>: '10px 20px', </a:t>
-            </a:r>
-            <a:r>
-              <a:rPr lang="pl-PL" sz="1100" b="1" dirty="0" err="1"/>
-              <a:t>fontSize</a:t>
-            </a:r>
-            <a:r>
-              <a:rPr lang="pl-PL" sz="1100" b="1" dirty="0"/>
-              <a:t>: '18px', </a:t>
-            </a:r>
-            <a:r>
-              <a:rPr lang="pl-PL" sz="1100" b="1" dirty="0" err="1"/>
-              <a:t>cursor</a:t>
-            </a:r>
-            <a:r>
-              <a:rPr lang="pl-PL" sz="1100" b="1" dirty="0"/>
-              <a:t>: 'pointer', </a:t>
-            </a:r>
-            <a:r>
-              <a:rPr lang="pl-PL" sz="1100" b="1" dirty="0" err="1"/>
-              <a:t>backgroundColor</a:t>
-            </a:r>
-            <a:r>
-              <a:rPr lang="pl-PL" sz="1100" b="1" dirty="0"/>
-              <a:t>: '#4CAF50', </a:t>
-            </a:r>
-            <a:r>
-              <a:rPr lang="pl-PL" sz="1100" b="1" dirty="0" err="1"/>
-              <a:t>color</a:t>
-            </a:r>
-            <a:r>
-              <a:rPr lang="pl-PL" sz="1100" b="1" dirty="0"/>
-              <a:t>: '</a:t>
-            </a:r>
-            <a:r>
-              <a:rPr lang="pl-PL" sz="1100" b="1" dirty="0" err="1"/>
-              <a:t>white</a:t>
-            </a:r>
-            <a:r>
-              <a:rPr lang="pl-PL" sz="1100" b="1" dirty="0"/>
-              <a:t>', </a:t>
-            </a:r>
-            <a:r>
-              <a:rPr lang="pl-PL" sz="1100" b="1" dirty="0" err="1"/>
-              <a:t>border</a:t>
-            </a:r>
-            <a:r>
-              <a:rPr lang="pl-PL" sz="1100" b="1" dirty="0"/>
-              <a:t>: '</a:t>
-            </a:r>
-            <a:r>
-              <a:rPr lang="pl-PL" sz="1100" b="1" dirty="0" err="1"/>
-              <a:t>none</a:t>
-            </a:r>
-            <a:r>
-              <a:rPr lang="pl-PL" sz="1100" b="1" dirty="0"/>
-              <a:t>', </a:t>
-            </a:r>
-            <a:r>
-              <a:rPr lang="pl-PL" sz="1100" b="1" dirty="0" err="1"/>
-              <a:t>borderRadius</a:t>
-            </a:r>
-            <a:r>
-              <a:rPr lang="pl-PL" sz="1100" b="1" dirty="0"/>
-              <a:t>: '5px' }}</a:t>
-            </a:r>
-          </a:p>
-          <a:p>
-            <a:r>
-              <a:rPr lang="pl-PL" sz="1100" b="1" dirty="0"/>
-              <a:t>      &gt;</a:t>
-            </a:r>
-          </a:p>
-          <a:p>
-            <a:r>
-              <a:rPr lang="pl-PL" sz="1100" b="1" dirty="0"/>
-              <a:t>        Dodaj misia</a:t>
-            </a:r>
-          </a:p>
-          <a:p>
-            <a:r>
-              <a:rPr lang="pl-PL" sz="1100" b="1" dirty="0"/>
-              <a:t>      &lt;/</a:t>
-            </a:r>
-            <a:r>
-              <a:rPr lang="pl-PL" sz="1100" b="1" dirty="0" err="1"/>
-              <a:t>button</a:t>
-            </a:r>
-            <a:r>
-              <a:rPr lang="pl-PL" sz="1100" b="1" dirty="0"/>
-              <a:t>&gt;</a:t>
-            </a:r>
-          </a:p>
-          <a:p>
-            <a:r>
-              <a:rPr lang="pl-PL" sz="1100" b="1" dirty="0"/>
-              <a:t>      &lt;</a:t>
-            </a:r>
-            <a:r>
-              <a:rPr lang="pl-PL" sz="1100" b="1" dirty="0" err="1"/>
-              <a:t>br</a:t>
-            </a:r>
-            <a:r>
-              <a:rPr lang="pl-PL" sz="1100" b="1" dirty="0"/>
-              <a:t> /&gt;</a:t>
-            </a:r>
-          </a:p>
-          <a:p>
-            <a:r>
-              <a:rPr lang="pl-PL" sz="1100" b="1" dirty="0"/>
-              <a:t>      &lt;</a:t>
-            </a:r>
-            <a:r>
-              <a:rPr lang="pl-PL" sz="1100" b="1" dirty="0" err="1"/>
-              <a:t>button</a:t>
-            </a:r>
-            <a:r>
-              <a:rPr lang="pl-PL" sz="1100" b="1" dirty="0"/>
-              <a:t> </a:t>
-            </a:r>
-          </a:p>
-          <a:p>
-            <a:r>
-              <a:rPr lang="pl-PL" sz="1100" b="1" dirty="0"/>
-              <a:t>        </a:t>
-            </a:r>
-            <a:r>
-              <a:rPr lang="pl-PL" sz="1100" b="1" dirty="0" err="1"/>
-              <a:t>onClick</a:t>
-            </a:r>
-            <a:r>
-              <a:rPr lang="pl-PL" sz="1100" b="1" dirty="0"/>
-              <a:t>={reset} </a:t>
-            </a:r>
-          </a:p>
-          <a:p>
-            <a:r>
-              <a:rPr lang="pl-PL" sz="1100" b="1" dirty="0"/>
-              <a:t>        style={{ </a:t>
-            </a:r>
-            <a:r>
-              <a:rPr lang="pl-PL" sz="1100" b="1" dirty="0" err="1"/>
-              <a:t>marginTop</a:t>
-            </a:r>
-            <a:r>
-              <a:rPr lang="pl-PL" sz="1100" b="1" dirty="0"/>
-              <a:t>: '20px', </a:t>
-            </a:r>
-            <a:r>
-              <a:rPr lang="pl-PL" sz="1100" b="1" dirty="0" err="1"/>
-              <a:t>background</a:t>
-            </a:r>
-            <a:r>
-              <a:rPr lang="pl-PL" sz="1100" b="1" dirty="0"/>
-              <a:t>: '</a:t>
-            </a:r>
-            <a:r>
-              <a:rPr lang="pl-PL" sz="1100" b="1" dirty="0" err="1"/>
-              <a:t>none</a:t>
-            </a:r>
-            <a:r>
-              <a:rPr lang="pl-PL" sz="1100" b="1" dirty="0"/>
-              <a:t>', </a:t>
-            </a:r>
-            <a:r>
-              <a:rPr lang="pl-PL" sz="1100" b="1" dirty="0" err="1"/>
-              <a:t>border</a:t>
-            </a:r>
-            <a:r>
-              <a:rPr lang="pl-PL" sz="1100" b="1" dirty="0"/>
-              <a:t>: '</a:t>
-            </a:r>
-            <a:r>
-              <a:rPr lang="pl-PL" sz="1100" b="1" dirty="0" err="1"/>
-              <a:t>none</a:t>
-            </a:r>
-            <a:r>
-              <a:rPr lang="pl-PL" sz="1100" b="1" dirty="0"/>
-              <a:t>', </a:t>
-            </a:r>
-            <a:r>
-              <a:rPr lang="pl-PL" sz="1100" b="1" dirty="0" err="1"/>
-              <a:t>color</a:t>
-            </a:r>
-            <a:r>
-              <a:rPr lang="pl-PL" sz="1100" b="1" dirty="0"/>
-              <a:t>: 'red', </a:t>
-            </a:r>
-            <a:r>
-              <a:rPr lang="pl-PL" sz="1100" b="1" dirty="0" err="1"/>
-              <a:t>cursor</a:t>
-            </a:r>
-            <a:r>
-              <a:rPr lang="pl-PL" sz="1100" b="1" dirty="0"/>
-              <a:t>: 'pointer', </a:t>
-            </a:r>
-            <a:r>
-              <a:rPr lang="pl-PL" sz="1100" b="1" dirty="0" err="1"/>
-              <a:t>textDecoration</a:t>
-            </a:r>
-            <a:r>
-              <a:rPr lang="pl-PL" sz="1100" b="1" dirty="0"/>
-              <a:t>: '</a:t>
-            </a:r>
-            <a:r>
-              <a:rPr lang="pl-PL" sz="1100" b="1" dirty="0" err="1"/>
-              <a:t>underline</a:t>
-            </a:r>
-            <a:r>
-              <a:rPr lang="pl-PL" sz="1100" b="1" dirty="0"/>
-              <a:t>' }}</a:t>
-            </a:r>
-          </a:p>
-          <a:p>
-            <a:r>
-              <a:rPr lang="pl-PL" sz="1100" b="1" dirty="0"/>
-              <a:t>      &gt;</a:t>
-            </a:r>
-          </a:p>
-          <a:p>
-            <a:r>
-              <a:rPr lang="pl-PL" sz="1100" b="1" dirty="0"/>
-              <a:t>        Resetuj licznik</a:t>
-            </a:r>
-          </a:p>
-          <a:p>
-            <a:r>
-              <a:rPr lang="pl-PL" sz="1100" b="1" dirty="0"/>
-              <a:t>      &lt;/</a:t>
-            </a:r>
-            <a:r>
-              <a:rPr lang="pl-PL" sz="1100" b="1" dirty="0" err="1"/>
-              <a:t>button</a:t>
-            </a:r>
-            <a:r>
-              <a:rPr lang="pl-PL" sz="1100" b="1" dirty="0"/>
-              <a:t>&gt;</a:t>
-            </a:r>
-          </a:p>
-          <a:p>
-            <a:r>
-              <a:rPr lang="pl-PL" sz="1100" b="1" dirty="0"/>
-              <a:t>    &lt;/div&gt;</a:t>
-            </a:r>
-          </a:p>
-          <a:p>
-            <a:r>
-              <a:rPr lang="pl-PL" sz="1100" b="1" dirty="0"/>
-              <a:t>  )</a:t>
-            </a:r>
-          </a:p>
-          <a:p>
-            <a:r>
-              <a:rPr lang="pl-PL" sz="1100" b="1" dirty="0"/>
-              <a:t>}</a:t>
-            </a:r>
-          </a:p>
-          <a:p>
-            <a:br>
-              <a:rPr lang="pl-PL" sz="1100" b="1" dirty="0"/>
-            </a:br>
-            <a:endParaRPr lang="pl-PL" sz="1100" b="1" dirty="0"/>
-          </a:p>
-          <a:p>
-            <a:r>
-              <a:rPr lang="pl-PL" sz="1100" b="1" dirty="0"/>
-              <a:t>export </a:t>
-            </a:r>
-            <a:r>
-              <a:rPr lang="pl-PL" sz="1100" b="1" dirty="0" err="1"/>
-              <a:t>default</a:t>
-            </a:r>
-            <a:r>
-              <a:rPr lang="pl-PL" sz="1100" b="1" dirty="0"/>
-              <a:t> </a:t>
-            </a:r>
-            <a:r>
-              <a:rPr lang="pl-PL" sz="1100" b="1" dirty="0" err="1"/>
-              <a:t>App</a:t>
-            </a:r>
-            <a:endParaRPr lang="pl-PL" sz="1100" b="1" dirty="0"/>
           </a:p>
         </p:txBody>
       </p:sp>
@@ -31877,7 +33699,7 @@
         </p:blipFill>
         <p:spPr>
           <a:xfrm>
-            <a:off x="3223260" y="1826218"/>
+            <a:off x="7573801" y="1378058"/>
             <a:ext cx="4446270" cy="4732827"/>
           </a:xfrm>
           <a:prstGeom prst="rect">
@@ -31906,7 +33728,7 @@
         <p:cNvPr id="1" name="">
           <a:extLst>
             <a:ext uri="{FF2B5EF4-FFF2-40B4-BE49-F238E27FC236}">
-              <a16:creationId xmlns:a16="http://schemas.microsoft.com/office/drawing/2014/main" id="{91B0047E-8795-E21F-F751-6C94A112A3B5}"/>
+              <a16:creationId xmlns:a16="http://schemas.microsoft.com/office/drawing/2014/main" id="{2A8B02F8-F10F-BE02-2F3E-1E466B4E53C1}"/>
             </a:ext>
           </a:extLst>
         </p:cNvPr>
@@ -31926,7 +33748,7 @@
           <p:cNvPr id="15" name="Obraz — symbol zastępczy 14" descr="Otwarta książka na biurku">
             <a:extLst>
               <a:ext uri="{FF2B5EF4-FFF2-40B4-BE49-F238E27FC236}">
-                <a16:creationId xmlns:a16="http://schemas.microsoft.com/office/drawing/2014/main" id="{F8E11E46-05B0-91B7-3D1E-07F14A8FC790}"/>
+                <a16:creationId xmlns:a16="http://schemas.microsoft.com/office/drawing/2014/main" id="{6CF1A6EF-2B0D-A2BB-4418-F03F34097A9C}"/>
               </a:ext>
             </a:extLst>
           </p:cNvPr>
@@ -31964,7 +33786,7 @@
           <p:cNvPr id="9" name="Tytuł 8">
             <a:extLst>
               <a:ext uri="{FF2B5EF4-FFF2-40B4-BE49-F238E27FC236}">
-                <a16:creationId xmlns:a16="http://schemas.microsoft.com/office/drawing/2014/main" id="{578846EB-E069-EE61-93CA-B621C7701A9D}"/>
+                <a16:creationId xmlns:a16="http://schemas.microsoft.com/office/drawing/2014/main" id="{26EE8059-5BBB-54D7-7706-52F630BEFAA0}"/>
               </a:ext>
             </a:extLst>
           </p:cNvPr>
@@ -31990,48 +33812,18 @@
           <a:p>
             <a:pPr algn="ctr"/>
             <a:r>
-              <a:rPr lang="pl-PL" sz="4800" b="1" dirty="0">
-                <a:latin typeface="+mn-lt"/>
-              </a:rPr>
-              <a:t>Selektory i Akcje</a:t>
-            </a:r>
-            <a:endParaRPr lang="pl-PL" sz="2800" b="1" dirty="0">
-              <a:latin typeface="+mn-lt"/>
-            </a:endParaRPr>
-          </a:p>
-        </p:txBody>
-      </p:sp>
-      <p:sp>
-        <p:nvSpPr>
-          <p:cNvPr id="75" name="Stopka — symbol zastępczy 74">
-            <a:extLst>
-              <a:ext uri="{FF2B5EF4-FFF2-40B4-BE49-F238E27FC236}">
-                <a16:creationId xmlns:a16="http://schemas.microsoft.com/office/drawing/2014/main" id="{48F18788-A304-0A73-DA94-2EEBC96A0B2E}"/>
-              </a:ext>
-            </a:extLst>
-          </p:cNvPr>
-          <p:cNvSpPr>
-            <a:spLocks noGrp="1"/>
-          </p:cNvSpPr>
-          <p:nvPr>
-            <p:ph type="ftr" sz="quarter" idx="11"/>
-          </p:nvPr>
-        </p:nvSpPr>
-        <p:spPr>
-          <a:xfrm>
-            <a:off x="4200861" y="6319838"/>
-            <a:ext cx="3982781" cy="365125"/>
-          </a:xfrm>
-        </p:spPr>
-        <p:txBody>
-          <a:bodyPr rtlCol="0"/>
-          <a:lstStyle/>
-          <a:p>
-            <a:pPr rtl="0"/>
-            <a:r>
-              <a:rPr lang="pl-PL"/>
-              <a:t>TYTUŁ PREZENTACJI</a:t>
-            </a:r>
+              <a:rPr lang="pl-PL" sz="4800" b="1" dirty="0" err="1"/>
+              <a:t>Zustand</a:t>
+            </a:r>
+            <a:r>
+              <a:rPr lang="pl-PL" sz="4800" b="1" dirty="0"/>
+              <a:t> – </a:t>
+            </a:r>
+            <a:r>
+              <a:rPr lang="pl-PL" sz="4800" b="1" dirty="0" err="1"/>
+              <a:t>App.jsx</a:t>
+            </a:r>
+            <a:endParaRPr lang="pl-PL" sz="2800" dirty="0"/>
           </a:p>
         </p:txBody>
       </p:sp>
@@ -32040,7 +33832,7 @@
           <p:cNvPr id="6" name="pole tekstowe 5">
             <a:extLst>
               <a:ext uri="{FF2B5EF4-FFF2-40B4-BE49-F238E27FC236}">
-                <a16:creationId xmlns:a16="http://schemas.microsoft.com/office/drawing/2014/main" id="{36305BF4-09ED-1E3C-4760-0E35925AC3CC}"/>
+                <a16:creationId xmlns:a16="http://schemas.microsoft.com/office/drawing/2014/main" id="{B4DB0D6B-C59E-4260-D4F3-A4E476CE97C8}"/>
               </a:ext>
             </a:extLst>
           </p:cNvPr>
@@ -32049,8 +33841,8 @@
         </p:nvSpPr>
         <p:spPr>
           <a:xfrm>
-            <a:off x="606650" y="1726495"/>
-            <a:ext cx="3417091" cy="2246769"/>
+            <a:off x="68918" y="1378058"/>
+            <a:ext cx="5817532" cy="4524315"/>
           </a:xfrm>
           <a:prstGeom prst="rect">
             <a:avLst/>
@@ -32064,38 +33856,308 @@
           <a:lstStyle/>
           <a:p>
             <a:r>
-              <a:rPr lang="pl-PL" sz="2000" b="1" dirty="0"/>
-              <a:t>Akcje (</a:t>
-            </a:r>
-            <a:r>
-              <a:rPr lang="pl-PL" sz="2000" b="1" dirty="0" err="1"/>
-              <a:t>Actions</a:t>
-            </a:r>
-            <a:r>
-              <a:rPr lang="pl-PL" sz="2000" b="1" dirty="0"/>
-              <a:t>):</a:t>
-            </a:r>
-            <a:r>
-              <a:rPr lang="pl-PL" sz="2000" dirty="0"/>
-              <a:t> To funkcje wewnątrz </a:t>
-            </a:r>
-            <a:r>
-              <a:rPr lang="pl-PL" sz="2000" dirty="0" err="1"/>
+              <a:rPr lang="pl-PL" sz="1600" b="1" dirty="0" err="1"/>
+              <a:t>App.jsx</a:t>
+            </a:r>
+            <a:endParaRPr lang="pl-PL" sz="1600" b="1" dirty="0"/>
+          </a:p>
+          <a:p>
+            <a:r>
+              <a:rPr lang="pl-PL" sz="1600" b="1" dirty="0"/>
+              <a:t>import { </a:t>
+            </a:r>
+            <a:r>
+              <a:rPr lang="pl-PL" sz="1600" b="1" dirty="0" err="1"/>
+              <a:t>useStore</a:t>
+            </a:r>
+            <a:r>
+              <a:rPr lang="pl-PL" sz="1600" b="1" dirty="0"/>
+              <a:t> } from './</a:t>
+            </a:r>
+            <a:r>
+              <a:rPr lang="pl-PL" sz="1600" b="1" dirty="0" err="1"/>
+              <a:t>store</a:t>
+            </a:r>
+            <a:r>
+              <a:rPr lang="pl-PL" sz="1600" b="1" dirty="0"/>
+              <a:t>'</a:t>
+            </a:r>
+          </a:p>
+          <a:p>
+            <a:endParaRPr lang="pl-PL" sz="1600" b="1" dirty="0"/>
+          </a:p>
+          <a:p>
+            <a:r>
+              <a:rPr lang="pl-PL" sz="1600" b="1" dirty="0" err="1"/>
+              <a:t>function</a:t>
+            </a:r>
+            <a:r>
+              <a:rPr lang="pl-PL" sz="1600" b="1" dirty="0"/>
+              <a:t> </a:t>
+            </a:r>
+            <a:r>
+              <a:rPr lang="pl-PL" sz="1600" b="1" dirty="0" err="1"/>
+              <a:t>App</a:t>
+            </a:r>
+            <a:r>
+              <a:rPr lang="pl-PL" sz="1600" b="1" dirty="0"/>
+              <a:t>() {</a:t>
+            </a:r>
+          </a:p>
+          <a:p>
+            <a:r>
+              <a:rPr lang="pl-PL" sz="1600" b="1" dirty="0"/>
+              <a:t>  // Pobieramy dane i funkcje ze </a:t>
+            </a:r>
+            <a:r>
+              <a:rPr lang="pl-PL" sz="1600" b="1" dirty="0" err="1"/>
               <a:t>store'a</a:t>
             </a:r>
-            <a:r>
-              <a:rPr lang="pl-PL" sz="2000" dirty="0"/>
-              <a:t>, które zmieniają dane (u mnie to </a:t>
-            </a:r>
-            <a:r>
-              <a:rPr lang="pl-PL" sz="2000" dirty="0" err="1"/>
-              <a:t>increasePopulation</a:t>
-            </a:r>
-            <a:r>
-              <a:rPr lang="pl-PL" sz="2000" dirty="0"/>
-              <a:t>). Dzięki nim logika zmiany danych nie jest rozproszona po całej aplikacji.</a:t>
-            </a:r>
-            <a:endParaRPr lang="pl-PL" sz="2000" b="1" dirty="0"/>
+            <a:endParaRPr lang="pl-PL" sz="1600" b="1" dirty="0"/>
+          </a:p>
+          <a:p>
+            <a:r>
+              <a:rPr lang="pl-PL" sz="1600" b="1" dirty="0"/>
+              <a:t>  </a:t>
+            </a:r>
+            <a:r>
+              <a:rPr lang="pl-PL" sz="1600" b="1" dirty="0" err="1"/>
+              <a:t>const</a:t>
+            </a:r>
+            <a:r>
+              <a:rPr lang="pl-PL" sz="1600" b="1" dirty="0"/>
+              <a:t> </a:t>
+            </a:r>
+            <a:r>
+              <a:rPr lang="pl-PL" sz="1600" b="1" dirty="0" err="1"/>
+              <a:t>bears</a:t>
+            </a:r>
+            <a:r>
+              <a:rPr lang="pl-PL" sz="1600" b="1" dirty="0"/>
+              <a:t> = </a:t>
+            </a:r>
+            <a:r>
+              <a:rPr lang="pl-PL" sz="1600" b="1" dirty="0" err="1"/>
+              <a:t>useStore</a:t>
+            </a:r>
+            <a:r>
+              <a:rPr lang="pl-PL" sz="1600" b="1" dirty="0"/>
+              <a:t>((</a:t>
+            </a:r>
+            <a:r>
+              <a:rPr lang="pl-PL" sz="1600" b="1" dirty="0" err="1"/>
+              <a:t>state</a:t>
+            </a:r>
+            <a:r>
+              <a:rPr lang="pl-PL" sz="1600" b="1" dirty="0"/>
+              <a:t>) =&gt; </a:t>
+            </a:r>
+            <a:r>
+              <a:rPr lang="pl-PL" sz="1600" b="1" dirty="0" err="1"/>
+              <a:t>state.bears</a:t>
+            </a:r>
+            <a:r>
+              <a:rPr lang="pl-PL" sz="1600" b="1" dirty="0"/>
+              <a:t>)</a:t>
+            </a:r>
+          </a:p>
+          <a:p>
+            <a:r>
+              <a:rPr lang="pl-PL" sz="1600" b="1" dirty="0"/>
+              <a:t>  </a:t>
+            </a:r>
+            <a:r>
+              <a:rPr lang="pl-PL" sz="1600" b="1" dirty="0" err="1"/>
+              <a:t>const</a:t>
+            </a:r>
+            <a:r>
+              <a:rPr lang="pl-PL" sz="1600" b="1" dirty="0"/>
+              <a:t> </a:t>
+            </a:r>
+            <a:r>
+              <a:rPr lang="pl-PL" sz="1600" b="1" dirty="0" err="1"/>
+              <a:t>increase</a:t>
+            </a:r>
+            <a:r>
+              <a:rPr lang="pl-PL" sz="1600" b="1" dirty="0"/>
+              <a:t> = </a:t>
+            </a:r>
+            <a:r>
+              <a:rPr lang="pl-PL" sz="1600" b="1" dirty="0" err="1"/>
+              <a:t>useStore</a:t>
+            </a:r>
+            <a:r>
+              <a:rPr lang="pl-PL" sz="1600" b="1" dirty="0"/>
+              <a:t>((</a:t>
+            </a:r>
+            <a:r>
+              <a:rPr lang="pl-PL" sz="1600" b="1" dirty="0" err="1"/>
+              <a:t>state</a:t>
+            </a:r>
+            <a:r>
+              <a:rPr lang="pl-PL" sz="1600" b="1" dirty="0"/>
+              <a:t>) =&gt; </a:t>
+            </a:r>
+            <a:r>
+              <a:rPr lang="pl-PL" sz="1600" b="1" dirty="0" err="1"/>
+              <a:t>state.increasePopulation</a:t>
+            </a:r>
+            <a:r>
+              <a:rPr lang="pl-PL" sz="1600" b="1" dirty="0"/>
+              <a:t>)</a:t>
+            </a:r>
+          </a:p>
+          <a:p>
+            <a:r>
+              <a:rPr lang="pl-PL" sz="1600" b="1" dirty="0"/>
+              <a:t>  </a:t>
+            </a:r>
+            <a:r>
+              <a:rPr lang="pl-PL" sz="1600" b="1" dirty="0" err="1"/>
+              <a:t>const</a:t>
+            </a:r>
+            <a:r>
+              <a:rPr lang="pl-PL" sz="1600" b="1" dirty="0"/>
+              <a:t> reset = </a:t>
+            </a:r>
+            <a:r>
+              <a:rPr lang="pl-PL" sz="1600" b="1" dirty="0" err="1"/>
+              <a:t>useStore</a:t>
+            </a:r>
+            <a:r>
+              <a:rPr lang="pl-PL" sz="1600" b="1" dirty="0"/>
+              <a:t>((</a:t>
+            </a:r>
+            <a:r>
+              <a:rPr lang="pl-PL" sz="1600" b="1" dirty="0" err="1"/>
+              <a:t>state</a:t>
+            </a:r>
+            <a:r>
+              <a:rPr lang="pl-PL" sz="1600" b="1" dirty="0"/>
+              <a:t>) =&gt; </a:t>
+            </a:r>
+            <a:r>
+              <a:rPr lang="pl-PL" sz="1600" b="1" dirty="0" err="1"/>
+              <a:t>state.removeAllBears</a:t>
+            </a:r>
+            <a:r>
+              <a:rPr lang="pl-PL" sz="1600" b="1" dirty="0"/>
+              <a:t>)</a:t>
+            </a:r>
+          </a:p>
+          <a:p>
+            <a:endParaRPr lang="pl-PL" sz="1600" b="1" dirty="0"/>
+          </a:p>
+          <a:p>
+            <a:r>
+              <a:rPr lang="pl-PL" sz="1600" b="1" dirty="0"/>
+              <a:t>  return (</a:t>
+            </a:r>
+          </a:p>
+          <a:p>
+            <a:r>
+              <a:rPr lang="pl-PL" sz="1600" b="1" dirty="0"/>
+              <a:t>    &lt;div style={{ </a:t>
+            </a:r>
+            <a:r>
+              <a:rPr lang="pl-PL" sz="1600" b="1" dirty="0" err="1"/>
+              <a:t>textAlign</a:t>
+            </a:r>
+            <a:r>
+              <a:rPr lang="pl-PL" sz="1600" b="1" dirty="0"/>
+              <a:t>: '</a:t>
+            </a:r>
+            <a:r>
+              <a:rPr lang="pl-PL" sz="1600" b="1" dirty="0" err="1"/>
+              <a:t>center</a:t>
+            </a:r>
+            <a:r>
+              <a:rPr lang="pl-PL" sz="1600" b="1" dirty="0"/>
+              <a:t>', </a:t>
+            </a:r>
+            <a:r>
+              <a:rPr lang="pl-PL" sz="1600" b="1" dirty="0" err="1"/>
+              <a:t>marginTop</a:t>
+            </a:r>
+            <a:r>
+              <a:rPr lang="pl-PL" sz="1600" b="1" dirty="0"/>
+              <a:t>: '50px', </a:t>
+            </a:r>
+            <a:r>
+              <a:rPr lang="pl-PL" sz="1600" b="1" dirty="0" err="1"/>
+              <a:t>fontFamily</a:t>
+            </a:r>
+            <a:r>
+              <a:rPr lang="pl-PL" sz="1600" b="1" dirty="0"/>
+              <a:t>: '</a:t>
+            </a:r>
+            <a:r>
+              <a:rPr lang="pl-PL" sz="1600" b="1" dirty="0" err="1"/>
+              <a:t>sans-serif</a:t>
+            </a:r>
+            <a:r>
+              <a:rPr lang="pl-PL" sz="1600" b="1" dirty="0"/>
+              <a:t>' }}&gt;</a:t>
+            </a:r>
+          </a:p>
+          <a:p>
+            <a:r>
+              <a:rPr lang="pl-PL" sz="1600" b="1" dirty="0"/>
+              <a:t>      &lt;h1&gt;Prezentacja: </a:t>
+            </a:r>
+            <a:r>
+              <a:rPr lang="pl-PL" sz="1600" b="1" dirty="0" err="1"/>
+              <a:t>Zustand</a:t>
+            </a:r>
+            <a:r>
+              <a:rPr lang="pl-PL" sz="1600" b="1" dirty="0"/>
+              <a:t>&lt;/h1&gt;</a:t>
+            </a:r>
+          </a:p>
+          <a:p>
+            <a:r>
+              <a:rPr lang="pl-PL" sz="1600" b="1" dirty="0"/>
+              <a:t>      &lt;div style={{ </a:t>
+            </a:r>
+            <a:r>
+              <a:rPr lang="pl-PL" sz="1600" b="1" dirty="0" err="1"/>
+              <a:t>fontSize</a:t>
+            </a:r>
+            <a:r>
+              <a:rPr lang="pl-PL" sz="1600" b="1" dirty="0"/>
+              <a:t>: '50px', </a:t>
+            </a:r>
+            <a:r>
+              <a:rPr lang="pl-PL" sz="1600" b="1" dirty="0" err="1"/>
+              <a:t>margin</a:t>
+            </a:r>
+            <a:r>
+              <a:rPr lang="pl-PL" sz="1600" b="1" dirty="0"/>
+              <a:t>: '20px' }}&gt;</a:t>
+            </a:r>
+          </a:p>
+          <a:p>
+            <a:r>
+              <a:rPr lang="pl-PL" sz="1600" b="1" dirty="0"/>
+              <a:t>        🐻 {</a:t>
+            </a:r>
+            <a:r>
+              <a:rPr lang="pl-PL" sz="1600" b="1" dirty="0" err="1"/>
+              <a:t>bears</a:t>
+            </a:r>
+            <a:r>
+              <a:rPr lang="pl-PL" sz="1600" b="1" dirty="0"/>
+              <a:t>}</a:t>
+            </a:r>
+          </a:p>
+          <a:p>
+            <a:r>
+              <a:rPr lang="pl-PL" sz="1600" b="1" dirty="0"/>
+              <a:t>      &lt;/div&gt;</a:t>
+            </a:r>
+          </a:p>
+          <a:p>
+            <a:endParaRPr lang="pl-PL" sz="1600" b="1" dirty="0"/>
           </a:p>
         </p:txBody>
       </p:sp>
@@ -32104,7 +34166,7 @@
           <p:cNvPr id="12" name="pole tekstowe 11">
             <a:extLst>
               <a:ext uri="{FF2B5EF4-FFF2-40B4-BE49-F238E27FC236}">
-                <a16:creationId xmlns:a16="http://schemas.microsoft.com/office/drawing/2014/main" id="{FA631DBA-8CC7-CA39-3158-110FF127C623}"/>
+                <a16:creationId xmlns:a16="http://schemas.microsoft.com/office/drawing/2014/main" id="{BB1DCD37-956E-95FC-A96C-014FA1619D96}"/>
               </a:ext>
             </a:extLst>
           </p:cNvPr>
@@ -32113,8 +34175,8 @@
         </p:nvSpPr>
         <p:spPr>
           <a:xfrm>
-            <a:off x="7578090" y="1661180"/>
-            <a:ext cx="4350541" cy="1015663"/>
+            <a:off x="6192251" y="1378058"/>
+            <a:ext cx="5930831" cy="5016758"/>
           </a:xfrm>
           <a:prstGeom prst="rect">
             <a:avLst/>
@@ -32128,84 +34190,327 @@
           <a:lstStyle/>
           <a:p>
             <a:r>
-              <a:rPr lang="pl-PL" sz="2000" b="1" dirty="0"/>
-              <a:t>Selektory (</a:t>
-            </a:r>
-            <a:r>
-              <a:rPr lang="pl-PL" sz="2000" b="1" dirty="0" err="1"/>
-              <a:t>Selectors</a:t>
-            </a:r>
-            <a:r>
-              <a:rPr lang="pl-PL" sz="2000" b="1" dirty="0"/>
-              <a:t>):</a:t>
-            </a:r>
-            <a:r>
-              <a:rPr lang="pl-PL" sz="2000" dirty="0"/>
-              <a:t> Pozwalają wyciągnąć ze stanu tylko to, co jest potrzebne (np. </a:t>
-            </a:r>
-            <a:r>
-              <a:rPr lang="pl-PL" sz="2000" dirty="0" err="1"/>
-              <a:t>state.bears</a:t>
-            </a:r>
-            <a:r>
-              <a:rPr lang="pl-PL" sz="2000" dirty="0"/>
-              <a:t>).</a:t>
-            </a:r>
-            <a:endParaRPr lang="pl-PL" sz="2000" b="1" dirty="0"/>
+              <a:rPr lang="pl-PL" sz="1600" b="1" dirty="0"/>
+              <a:t>      &lt;</a:t>
+            </a:r>
+            <a:r>
+              <a:rPr lang="pl-PL" sz="1600" b="1" dirty="0" err="1"/>
+              <a:t>button</a:t>
+            </a:r>
+            <a:r>
+              <a:rPr lang="pl-PL" sz="1600" b="1" dirty="0"/>
+              <a:t> </a:t>
+            </a:r>
           </a:p>
-        </p:txBody>
-      </p:sp>
-      <p:sp>
-        <p:nvSpPr>
-          <p:cNvPr id="2" name="pole tekstowe 1">
-            <a:extLst>
-              <a:ext uri="{FF2B5EF4-FFF2-40B4-BE49-F238E27FC236}">
-                <a16:creationId xmlns:a16="http://schemas.microsoft.com/office/drawing/2014/main" id="{EA26B8D1-A913-4DDF-2F3F-F2E12859E770}"/>
-              </a:ext>
-            </a:extLst>
-          </p:cNvPr>
-          <p:cNvSpPr txBox="1"/>
-          <p:nvPr/>
-        </p:nvSpPr>
-        <p:spPr>
-          <a:xfrm>
-            <a:off x="4343400" y="4294733"/>
-            <a:ext cx="6023610" cy="1200329"/>
-          </a:xfrm>
-          <a:prstGeom prst="rect">
-            <a:avLst/>
-          </a:prstGeom>
-          <a:noFill/>
-        </p:spPr>
-        <p:txBody>
-          <a:bodyPr wrap="square" rtlCol="0">
-            <a:spAutoFit/>
-          </a:bodyPr>
-          <a:lstStyle/>
           <a:p>
             <a:r>
-              <a:rPr lang="pl-PL" b="1" dirty="0"/>
-              <a:t>Dlaczego to ważne?</a:t>
-            </a:r>
-            <a:r>
-              <a:rPr lang="pl-PL" dirty="0"/>
-              <a:t> Dzięki selektorom komponent nie </a:t>
-            </a:r>
-            <a:r>
-              <a:rPr lang="pl-PL" dirty="0" err="1"/>
-              <a:t>renderuje</a:t>
-            </a:r>
-            <a:r>
-              <a:rPr lang="pl-PL" dirty="0"/>
-              <a:t> się ponownie, jeśli zmieni się inna część stanu, której ten komponent nie używa. To klucz do wydajności.</a:t>
-            </a:r>
+              <a:rPr lang="pl-PL" sz="1600" b="1" dirty="0"/>
+              <a:t>        </a:t>
+            </a:r>
+            <a:r>
+              <a:rPr lang="pl-PL" sz="1600" b="1" dirty="0" err="1"/>
+              <a:t>onClick</a:t>
+            </a:r>
+            <a:r>
+              <a:rPr lang="pl-PL" sz="1600" b="1" dirty="0"/>
+              <a:t>={</a:t>
+            </a:r>
+            <a:r>
+              <a:rPr lang="pl-PL" sz="1600" b="1" dirty="0" err="1"/>
+              <a:t>increase</a:t>
+            </a:r>
+            <a:r>
+              <a:rPr lang="pl-PL" sz="1600" b="1" dirty="0"/>
+              <a:t>} </a:t>
+            </a:r>
+          </a:p>
+          <a:p>
+            <a:r>
+              <a:rPr lang="pl-PL" sz="1600" b="1" dirty="0"/>
+              <a:t>        style={{ </a:t>
+            </a:r>
+            <a:r>
+              <a:rPr lang="pl-PL" sz="1600" b="1" dirty="0" err="1"/>
+              <a:t>padding</a:t>
+            </a:r>
+            <a:r>
+              <a:rPr lang="pl-PL" sz="1600" b="1" dirty="0"/>
+              <a:t>: '10px 20px', </a:t>
+            </a:r>
+            <a:r>
+              <a:rPr lang="pl-PL" sz="1600" b="1" dirty="0" err="1"/>
+              <a:t>fontSize</a:t>
+            </a:r>
+            <a:r>
+              <a:rPr lang="pl-PL" sz="1600" b="1" dirty="0"/>
+              <a:t>: '18px', </a:t>
+            </a:r>
+            <a:r>
+              <a:rPr lang="pl-PL" sz="1600" b="1" dirty="0" err="1"/>
+              <a:t>cursor</a:t>
+            </a:r>
+            <a:r>
+              <a:rPr lang="pl-PL" sz="1600" b="1" dirty="0"/>
+              <a:t>: 'pointer', </a:t>
+            </a:r>
+            <a:r>
+              <a:rPr lang="pl-PL" sz="1600" b="1" dirty="0" err="1"/>
+              <a:t>backgroundColor</a:t>
+            </a:r>
+            <a:r>
+              <a:rPr lang="pl-PL" sz="1600" b="1" dirty="0"/>
+              <a:t>: '#4CAF50', </a:t>
+            </a:r>
+            <a:r>
+              <a:rPr lang="pl-PL" sz="1600" b="1" dirty="0" err="1"/>
+              <a:t>color</a:t>
+            </a:r>
+            <a:r>
+              <a:rPr lang="pl-PL" sz="1600" b="1" dirty="0"/>
+              <a:t>: '</a:t>
+            </a:r>
+            <a:r>
+              <a:rPr lang="pl-PL" sz="1600" b="1" dirty="0" err="1"/>
+              <a:t>white</a:t>
+            </a:r>
+            <a:r>
+              <a:rPr lang="pl-PL" sz="1600" b="1" dirty="0"/>
+              <a:t>', </a:t>
+            </a:r>
+            <a:r>
+              <a:rPr lang="pl-PL" sz="1600" b="1" dirty="0" err="1"/>
+              <a:t>border</a:t>
+            </a:r>
+            <a:r>
+              <a:rPr lang="pl-PL" sz="1600" b="1" dirty="0"/>
+              <a:t>: '</a:t>
+            </a:r>
+            <a:r>
+              <a:rPr lang="pl-PL" sz="1600" b="1" dirty="0" err="1"/>
+              <a:t>none</a:t>
+            </a:r>
+            <a:r>
+              <a:rPr lang="pl-PL" sz="1600" b="1" dirty="0"/>
+              <a:t>', </a:t>
+            </a:r>
+            <a:r>
+              <a:rPr lang="pl-PL" sz="1600" b="1" dirty="0" err="1"/>
+              <a:t>borderRadius</a:t>
+            </a:r>
+            <a:r>
+              <a:rPr lang="pl-PL" sz="1600" b="1" dirty="0"/>
+              <a:t>: '5px' }}</a:t>
+            </a:r>
+          </a:p>
+          <a:p>
+            <a:r>
+              <a:rPr lang="pl-PL" sz="1600" b="1" dirty="0"/>
+              <a:t>      &gt;</a:t>
+            </a:r>
+          </a:p>
+          <a:p>
+            <a:r>
+              <a:rPr lang="pl-PL" sz="1600" b="1" dirty="0"/>
+              <a:t>        Dodaj misia</a:t>
+            </a:r>
+          </a:p>
+          <a:p>
+            <a:r>
+              <a:rPr lang="pl-PL" sz="1600" b="1" dirty="0"/>
+              <a:t>      &lt;/</a:t>
+            </a:r>
+            <a:r>
+              <a:rPr lang="pl-PL" sz="1600" b="1" dirty="0" err="1"/>
+              <a:t>button</a:t>
+            </a:r>
+            <a:r>
+              <a:rPr lang="pl-PL" sz="1600" b="1" dirty="0"/>
+              <a:t>&gt;</a:t>
+            </a:r>
+          </a:p>
+          <a:p>
+            <a:r>
+              <a:rPr lang="pl-PL" sz="1600" b="1" dirty="0"/>
+              <a:t>      &lt;</a:t>
+            </a:r>
+            <a:r>
+              <a:rPr lang="pl-PL" sz="1600" b="1" dirty="0" err="1"/>
+              <a:t>br</a:t>
+            </a:r>
+            <a:r>
+              <a:rPr lang="pl-PL" sz="1600" b="1" dirty="0"/>
+              <a:t> /&gt;</a:t>
+            </a:r>
+          </a:p>
+          <a:p>
+            <a:r>
+              <a:rPr lang="pl-PL" sz="1600" b="1" dirty="0"/>
+              <a:t>      &lt;</a:t>
+            </a:r>
+            <a:r>
+              <a:rPr lang="pl-PL" sz="1600" b="1" dirty="0" err="1"/>
+              <a:t>button</a:t>
+            </a:r>
+            <a:r>
+              <a:rPr lang="pl-PL" sz="1600" b="1" dirty="0"/>
+              <a:t> </a:t>
+            </a:r>
+          </a:p>
+          <a:p>
+            <a:r>
+              <a:rPr lang="pl-PL" sz="1600" b="1" dirty="0"/>
+              <a:t>        </a:t>
+            </a:r>
+            <a:r>
+              <a:rPr lang="pl-PL" sz="1600" b="1" dirty="0" err="1"/>
+              <a:t>onClick</a:t>
+            </a:r>
+            <a:r>
+              <a:rPr lang="pl-PL" sz="1600" b="1" dirty="0"/>
+              <a:t>={reset} </a:t>
+            </a:r>
+          </a:p>
+          <a:p>
+            <a:r>
+              <a:rPr lang="pl-PL" sz="1600" b="1" dirty="0"/>
+              <a:t>        style={{ </a:t>
+            </a:r>
+            <a:r>
+              <a:rPr lang="pl-PL" sz="1600" b="1" dirty="0" err="1"/>
+              <a:t>marginTop</a:t>
+            </a:r>
+            <a:r>
+              <a:rPr lang="pl-PL" sz="1600" b="1" dirty="0"/>
+              <a:t>: '20px', </a:t>
+            </a:r>
+            <a:r>
+              <a:rPr lang="pl-PL" sz="1600" b="1" dirty="0" err="1"/>
+              <a:t>background</a:t>
+            </a:r>
+            <a:r>
+              <a:rPr lang="pl-PL" sz="1600" b="1" dirty="0"/>
+              <a:t>: '</a:t>
+            </a:r>
+            <a:r>
+              <a:rPr lang="pl-PL" sz="1600" b="1" dirty="0" err="1"/>
+              <a:t>none</a:t>
+            </a:r>
+            <a:r>
+              <a:rPr lang="pl-PL" sz="1600" b="1" dirty="0"/>
+              <a:t>', </a:t>
+            </a:r>
+            <a:r>
+              <a:rPr lang="pl-PL" sz="1600" b="1" dirty="0" err="1"/>
+              <a:t>border</a:t>
+            </a:r>
+            <a:r>
+              <a:rPr lang="pl-PL" sz="1600" b="1" dirty="0"/>
+              <a:t>: '</a:t>
+            </a:r>
+            <a:r>
+              <a:rPr lang="pl-PL" sz="1600" b="1" dirty="0" err="1"/>
+              <a:t>none</a:t>
+            </a:r>
+            <a:r>
+              <a:rPr lang="pl-PL" sz="1600" b="1" dirty="0"/>
+              <a:t>', </a:t>
+            </a:r>
+            <a:r>
+              <a:rPr lang="pl-PL" sz="1600" b="1" dirty="0" err="1"/>
+              <a:t>color</a:t>
+            </a:r>
+            <a:r>
+              <a:rPr lang="pl-PL" sz="1600" b="1" dirty="0"/>
+              <a:t>: 'red', </a:t>
+            </a:r>
+            <a:r>
+              <a:rPr lang="pl-PL" sz="1600" b="1" dirty="0" err="1"/>
+              <a:t>cursor</a:t>
+            </a:r>
+            <a:r>
+              <a:rPr lang="pl-PL" sz="1600" b="1" dirty="0"/>
+              <a:t>: 'pointer', </a:t>
+            </a:r>
+            <a:r>
+              <a:rPr lang="pl-PL" sz="1600" b="1" dirty="0" err="1"/>
+              <a:t>textDecoration</a:t>
+            </a:r>
+            <a:r>
+              <a:rPr lang="pl-PL" sz="1600" b="1" dirty="0"/>
+              <a:t>: '</a:t>
+            </a:r>
+            <a:r>
+              <a:rPr lang="pl-PL" sz="1600" b="1" dirty="0" err="1"/>
+              <a:t>underline</a:t>
+            </a:r>
+            <a:r>
+              <a:rPr lang="pl-PL" sz="1600" b="1" dirty="0"/>
+              <a:t>' }}</a:t>
+            </a:r>
+          </a:p>
+          <a:p>
+            <a:r>
+              <a:rPr lang="pl-PL" sz="1600" b="1" dirty="0"/>
+              <a:t>      &gt;</a:t>
+            </a:r>
+          </a:p>
+          <a:p>
+            <a:r>
+              <a:rPr lang="pl-PL" sz="1600" b="1" dirty="0"/>
+              <a:t>        Resetuj licznik</a:t>
+            </a:r>
+          </a:p>
+          <a:p>
+            <a:r>
+              <a:rPr lang="pl-PL" sz="1600" b="1" dirty="0"/>
+              <a:t>      &lt;/</a:t>
+            </a:r>
+            <a:r>
+              <a:rPr lang="pl-PL" sz="1600" b="1" dirty="0" err="1"/>
+              <a:t>button</a:t>
+            </a:r>
+            <a:r>
+              <a:rPr lang="pl-PL" sz="1600" b="1" dirty="0"/>
+              <a:t>&gt;</a:t>
+            </a:r>
+          </a:p>
+          <a:p>
+            <a:r>
+              <a:rPr lang="pl-PL" sz="1600" b="1" dirty="0"/>
+              <a:t>    &lt;/div&gt;</a:t>
+            </a:r>
+          </a:p>
+          <a:p>
+            <a:r>
+              <a:rPr lang="pl-PL" sz="1600" b="1" dirty="0"/>
+              <a:t>  )}</a:t>
+            </a:r>
+          </a:p>
+          <a:p>
+            <a:r>
+              <a:rPr lang="pl-PL" sz="1600" b="1" dirty="0"/>
+              <a:t>export </a:t>
+            </a:r>
+            <a:r>
+              <a:rPr lang="pl-PL" sz="1600" b="1" dirty="0" err="1"/>
+              <a:t>default</a:t>
+            </a:r>
+            <a:r>
+              <a:rPr lang="pl-PL" sz="1600" b="1" dirty="0"/>
+              <a:t> </a:t>
+            </a:r>
+            <a:r>
+              <a:rPr lang="pl-PL" sz="1600" b="1" dirty="0" err="1"/>
+              <a:t>App</a:t>
+            </a:r>
+            <a:endParaRPr lang="pl-PL" sz="1600" b="1" dirty="0"/>
           </a:p>
         </p:txBody>
       </p:sp>
     </p:spTree>
     <p:extLst>
       <p:ext uri="{BB962C8B-B14F-4D97-AF65-F5344CB8AC3E}">
-        <p14:creationId xmlns:p14="http://schemas.microsoft.com/office/powerpoint/2010/main" val="4178255800"/>
+        <p14:creationId xmlns:p14="http://schemas.microsoft.com/office/powerpoint/2010/main" val="13067503"/>
       </p:ext>
     </p:extLst>
   </p:cSld>
@@ -32223,7 +34528,7 @@
         <p:cNvPr id="1" name="">
           <a:extLst>
             <a:ext uri="{FF2B5EF4-FFF2-40B4-BE49-F238E27FC236}">
-              <a16:creationId xmlns:a16="http://schemas.microsoft.com/office/drawing/2014/main" id="{5DF7DBF4-3059-89BB-C4D0-B9A95EC29631}"/>
+              <a16:creationId xmlns:a16="http://schemas.microsoft.com/office/drawing/2014/main" id="{2310E0AB-92A7-BE8E-1980-06E4D324D623}"/>
             </a:ext>
           </a:extLst>
         </p:cNvPr>
@@ -32243,7 +34548,7 @@
           <p:cNvPr id="15" name="Obraz — symbol zastępczy 14" descr="Otwarta książka na biurku">
             <a:extLst>
               <a:ext uri="{FF2B5EF4-FFF2-40B4-BE49-F238E27FC236}">
-                <a16:creationId xmlns:a16="http://schemas.microsoft.com/office/drawing/2014/main" id="{B97407C0-DD29-E6BC-4B75-E21710B41806}"/>
+                <a16:creationId xmlns:a16="http://schemas.microsoft.com/office/drawing/2014/main" id="{D72824DE-C15C-60C4-CCBB-7CA785EFAFCE}"/>
               </a:ext>
             </a:extLst>
           </p:cNvPr>
@@ -32281,7 +34586,7 @@
           <p:cNvPr id="9" name="Tytuł 8">
             <a:extLst>
               <a:ext uri="{FF2B5EF4-FFF2-40B4-BE49-F238E27FC236}">
-                <a16:creationId xmlns:a16="http://schemas.microsoft.com/office/drawing/2014/main" id="{D74207C1-AB54-2738-EC22-71CD8968636E}"/>
+                <a16:creationId xmlns:a16="http://schemas.microsoft.com/office/drawing/2014/main" id="{5028FB69-F073-0E36-BFD6-3962BF7267F9}"/>
               </a:ext>
             </a:extLst>
           </p:cNvPr>
@@ -32307,57 +34612,12 @@
           <a:p>
             <a:pPr algn="ctr"/>
             <a:r>
-              <a:rPr lang="pl-PL" sz="6600" b="1" dirty="0" err="1">
-                <a:solidFill>
-                  <a:schemeClr val="bg1"/>
-                </a:solidFill>
-                <a:latin typeface="+mn-lt"/>
-                <a:ea typeface="+mn-ea"/>
-                <a:cs typeface="+mn-cs"/>
-              </a:rPr>
-              <a:t>DevTools</a:t>
-            </a:r>
-            <a:endParaRPr lang="pl-PL" sz="6600" b="1" dirty="0">
-              <a:solidFill>
-                <a:schemeClr val="bg1"/>
-              </a:solidFill>
-              <a:latin typeface="+mn-lt"/>
-              <a:ea typeface="+mn-ea"/>
-              <a:cs typeface="+mn-cs"/>
-            </a:endParaRPr>
-          </a:p>
-        </p:txBody>
-      </p:sp>
-      <p:sp>
-        <p:nvSpPr>
-          <p:cNvPr id="75" name="Stopka — symbol zastępczy 74">
-            <a:extLst>
-              <a:ext uri="{FF2B5EF4-FFF2-40B4-BE49-F238E27FC236}">
-                <a16:creationId xmlns:a16="http://schemas.microsoft.com/office/drawing/2014/main" id="{61146536-B90F-A18E-D2E2-CE72BBCA1BAC}"/>
-              </a:ext>
-            </a:extLst>
-          </p:cNvPr>
-          <p:cNvSpPr>
-            <a:spLocks noGrp="1"/>
-          </p:cNvSpPr>
-          <p:nvPr>
-            <p:ph type="ftr" sz="quarter" idx="11"/>
-          </p:nvPr>
-        </p:nvSpPr>
-        <p:spPr>
-          <a:xfrm>
-            <a:off x="4200861" y="6319838"/>
-            <a:ext cx="3982781" cy="365125"/>
-          </a:xfrm>
-        </p:spPr>
-        <p:txBody>
-          <a:bodyPr rtlCol="0"/>
-          <a:lstStyle/>
-          <a:p>
-            <a:pPr rtl="0"/>
-            <a:r>
-              <a:rPr lang="pl-PL"/>
-              <a:t>TYTUŁ PREZENTACJI</a:t>
+              <a:rPr lang="pl-PL" sz="4800" b="1" dirty="0" err="1"/>
+              <a:t>Redux</a:t>
+            </a:r>
+            <a:r>
+              <a:rPr lang="pl-PL" sz="4800" b="1" dirty="0"/>
+              <a:t> Toolkit – store.js, App.js</a:t>
             </a:r>
           </a:p>
         </p:txBody>
@@ -32367,7 +34627,7 @@
           <p:cNvPr id="6" name="pole tekstowe 5">
             <a:extLst>
               <a:ext uri="{FF2B5EF4-FFF2-40B4-BE49-F238E27FC236}">
-                <a16:creationId xmlns:a16="http://schemas.microsoft.com/office/drawing/2014/main" id="{054CFECF-5962-787B-F85D-F4A864E34AC0}"/>
+                <a16:creationId xmlns:a16="http://schemas.microsoft.com/office/drawing/2014/main" id="{04C4798E-460E-8847-4373-4A3C736A4C1E}"/>
               </a:ext>
             </a:extLst>
           </p:cNvPr>
@@ -32376,8 +34636,8 @@
         </p:nvSpPr>
         <p:spPr>
           <a:xfrm>
-            <a:off x="595220" y="1634456"/>
-            <a:ext cx="8331610" cy="707886"/>
+            <a:off x="503399" y="1378058"/>
+            <a:ext cx="6011701" cy="4770537"/>
           </a:xfrm>
           <a:prstGeom prst="rect">
             <a:avLst/>
@@ -32391,96 +34651,757 @@
           <a:lstStyle/>
           <a:p>
             <a:r>
-              <a:rPr lang="pl-PL" sz="2000" dirty="0">
-                <a:solidFill>
-                  <a:schemeClr val="bg1"/>
-                </a:solidFill>
-              </a:rPr>
-              <a:t>Narzędzia programistyczne pozwalają śledzić zmiany w czasie rzeczywistym. </a:t>
-            </a:r>
-            <a:r>
-              <a:rPr lang="pl-PL" sz="2000" dirty="0" err="1">
-                <a:solidFill>
-                  <a:schemeClr val="bg1"/>
-                </a:solidFill>
-              </a:rPr>
-              <a:t>Zustand</a:t>
-            </a:r>
-            <a:r>
-              <a:rPr lang="pl-PL" sz="2000" dirty="0">
-                <a:solidFill>
-                  <a:schemeClr val="bg1"/>
-                </a:solidFill>
-              </a:rPr>
-              <a:t> też z nimi współpracuje</a:t>
+              <a:rPr lang="pl-PL" sz="1600" b="1" dirty="0"/>
+              <a:t>import { </a:t>
+            </a:r>
+            <a:r>
+              <a:rPr lang="pl-PL" sz="1600" b="1" dirty="0" err="1"/>
+              <a:t>configureStore</a:t>
+            </a:r>
+            <a:r>
+              <a:rPr lang="pl-PL" sz="1600" b="1" dirty="0"/>
+              <a:t> } from "@</a:t>
+            </a:r>
+            <a:r>
+              <a:rPr lang="pl-PL" sz="1600" b="1" dirty="0" err="1"/>
+              <a:t>reduxjs</a:t>
+            </a:r>
+            <a:r>
+              <a:rPr lang="pl-PL" sz="1600" b="1" dirty="0"/>
+              <a:t>/</a:t>
+            </a:r>
+            <a:r>
+              <a:rPr lang="pl-PL" sz="1600" b="1" dirty="0" err="1"/>
+              <a:t>toolkit</a:t>
+            </a:r>
+            <a:r>
+              <a:rPr lang="pl-PL" sz="1600" b="1" dirty="0"/>
+              <a:t>";</a:t>
+            </a:r>
+          </a:p>
+          <a:p>
+            <a:r>
+              <a:rPr lang="pl-PL" sz="1600" b="1" dirty="0"/>
+              <a:t>import </a:t>
+            </a:r>
+            <a:r>
+              <a:rPr lang="pl-PL" sz="1600" b="1" dirty="0" err="1"/>
+              <a:t>counterReducer</a:t>
+            </a:r>
+            <a:r>
+              <a:rPr lang="pl-PL" sz="1600" b="1" dirty="0"/>
+              <a:t> from './</a:t>
+            </a:r>
+            <a:r>
+              <a:rPr lang="pl-PL" sz="1600" b="1" dirty="0" err="1"/>
+              <a:t>counterSlice</a:t>
+            </a:r>
+            <a:r>
+              <a:rPr lang="pl-PL" sz="1600" b="1" dirty="0"/>
+              <a:t>';</a:t>
+            </a:r>
+          </a:p>
+          <a:p>
+            <a:r>
+              <a:rPr lang="pl-PL" sz="1600" b="1" dirty="0"/>
+              <a:t>import </a:t>
+            </a:r>
+            <a:r>
+              <a:rPr lang="pl-PL" sz="1600" b="1" dirty="0" err="1"/>
+              <a:t>storage</a:t>
+            </a:r>
+            <a:r>
+              <a:rPr lang="pl-PL" sz="1600" b="1" dirty="0"/>
+              <a:t> from '</a:t>
+            </a:r>
+            <a:r>
+              <a:rPr lang="pl-PL" sz="1600" b="1" dirty="0" err="1"/>
+              <a:t>redux-persist</a:t>
+            </a:r>
+            <a:r>
+              <a:rPr lang="pl-PL" sz="1600" b="1" dirty="0"/>
+              <a:t>/</a:t>
+            </a:r>
+            <a:r>
+              <a:rPr lang="pl-PL" sz="1600" b="1" dirty="0" err="1"/>
+              <a:t>lib</a:t>
+            </a:r>
+            <a:r>
+              <a:rPr lang="pl-PL" sz="1600" b="1" dirty="0"/>
+              <a:t>/</a:t>
+            </a:r>
+            <a:r>
+              <a:rPr lang="pl-PL" sz="1600" b="1" dirty="0" err="1"/>
+              <a:t>storage</a:t>
+            </a:r>
+            <a:r>
+              <a:rPr lang="pl-PL" sz="1600" b="1" dirty="0"/>
+              <a:t>'</a:t>
+            </a:r>
+          </a:p>
+          <a:p>
+            <a:r>
+              <a:rPr lang="pl-PL" sz="1600" b="1" dirty="0"/>
+              <a:t>import { </a:t>
+            </a:r>
+            <a:r>
+              <a:rPr lang="pl-PL" sz="1600" b="1" dirty="0" err="1"/>
+              <a:t>persistReducer</a:t>
+            </a:r>
+            <a:r>
+              <a:rPr lang="pl-PL" sz="1600" b="1" dirty="0"/>
+              <a:t>, </a:t>
+            </a:r>
+            <a:r>
+              <a:rPr lang="pl-PL" sz="1600" b="1" dirty="0" err="1"/>
+              <a:t>persistStore</a:t>
+            </a:r>
+            <a:r>
+              <a:rPr lang="pl-PL" sz="1600" b="1" dirty="0"/>
+              <a:t> } from '</a:t>
+            </a:r>
+            <a:r>
+              <a:rPr lang="pl-PL" sz="1600" b="1" dirty="0" err="1"/>
+              <a:t>redux-persist</a:t>
+            </a:r>
+            <a:r>
+              <a:rPr lang="pl-PL" sz="1600" b="1" dirty="0"/>
+              <a:t>’</a:t>
+            </a:r>
+          </a:p>
+          <a:p>
+            <a:endParaRPr lang="pl-PL" sz="1600" b="1" dirty="0"/>
+          </a:p>
+          <a:p>
+            <a:r>
+              <a:rPr lang="pl-PL" sz="1600" b="1" dirty="0" err="1"/>
+              <a:t>const</a:t>
+            </a:r>
+            <a:r>
+              <a:rPr lang="pl-PL" sz="1600" b="1" dirty="0"/>
+              <a:t> </a:t>
+            </a:r>
+            <a:r>
+              <a:rPr lang="pl-PL" sz="1600" b="1" dirty="0" err="1"/>
+              <a:t>persistConfig</a:t>
+            </a:r>
+            <a:r>
+              <a:rPr lang="pl-PL" sz="1600" b="1" dirty="0"/>
+              <a:t> = {</a:t>
+            </a:r>
+          </a:p>
+          <a:p>
+            <a:r>
+              <a:rPr lang="pl-PL" sz="1600" b="1" dirty="0"/>
+              <a:t>    </a:t>
+            </a:r>
+            <a:r>
+              <a:rPr lang="pl-PL" sz="1600" b="1" dirty="0" err="1"/>
+              <a:t>key</a:t>
+            </a:r>
+            <a:r>
+              <a:rPr lang="pl-PL" sz="1600" b="1" dirty="0"/>
+              <a:t>: '</a:t>
+            </a:r>
+            <a:r>
+              <a:rPr lang="pl-PL" sz="1600" b="1" dirty="0" err="1"/>
+              <a:t>root</a:t>
+            </a:r>
+            <a:r>
+              <a:rPr lang="pl-PL" sz="1600" b="1" dirty="0"/>
+              <a:t>',</a:t>
+            </a:r>
+          </a:p>
+          <a:p>
+            <a:r>
+              <a:rPr lang="pl-PL" sz="1600" b="1" dirty="0"/>
+              <a:t>    </a:t>
+            </a:r>
+            <a:r>
+              <a:rPr lang="pl-PL" sz="1600" b="1" dirty="0" err="1"/>
+              <a:t>storage</a:t>
+            </a:r>
+            <a:r>
+              <a:rPr lang="pl-PL" sz="1600" b="1" dirty="0"/>
+              <a:t>,</a:t>
+            </a:r>
+          </a:p>
+          <a:p>
+            <a:r>
+              <a:rPr lang="pl-PL" sz="1600" b="1" dirty="0"/>
+              <a:t>}</a:t>
+            </a:r>
+          </a:p>
+          <a:p>
+            <a:r>
+              <a:rPr lang="pl-PL" sz="1600" b="1" dirty="0" err="1"/>
+              <a:t>const</a:t>
+            </a:r>
+            <a:r>
+              <a:rPr lang="pl-PL" sz="1600" b="1" dirty="0"/>
+              <a:t> </a:t>
+            </a:r>
+            <a:r>
+              <a:rPr lang="pl-PL" sz="1600" b="1" dirty="0" err="1"/>
+              <a:t>persistedReducer</a:t>
+            </a:r>
+            <a:r>
+              <a:rPr lang="pl-PL" sz="1600" b="1" dirty="0"/>
+              <a:t> = </a:t>
+            </a:r>
+            <a:r>
+              <a:rPr lang="pl-PL" sz="1600" b="1" dirty="0" err="1"/>
+              <a:t>persistReducer</a:t>
+            </a:r>
+            <a:r>
+              <a:rPr lang="pl-PL" sz="1600" b="1" dirty="0"/>
+              <a:t>(</a:t>
+            </a:r>
+          </a:p>
+          <a:p>
+            <a:r>
+              <a:rPr lang="pl-PL" sz="1600" b="1" dirty="0"/>
+              <a:t>    </a:t>
+            </a:r>
+            <a:r>
+              <a:rPr lang="pl-PL" sz="1600" b="1" dirty="0" err="1"/>
+              <a:t>persistConfig</a:t>
+            </a:r>
+            <a:r>
+              <a:rPr lang="pl-PL" sz="1600" b="1" dirty="0"/>
+              <a:t>,</a:t>
+            </a:r>
+          </a:p>
+          <a:p>
+            <a:r>
+              <a:rPr lang="pl-PL" sz="1600" b="1" dirty="0"/>
+              <a:t>    </a:t>
+            </a:r>
+            <a:r>
+              <a:rPr lang="pl-PL" sz="1600" b="1" dirty="0" err="1"/>
+              <a:t>counterReducer</a:t>
+            </a:r>
+            <a:endParaRPr lang="pl-PL" sz="1600" b="1" dirty="0"/>
+          </a:p>
+          <a:p>
+            <a:r>
+              <a:rPr lang="pl-PL" sz="1600" b="1" dirty="0"/>
+              <a:t>)</a:t>
+            </a:r>
+          </a:p>
+          <a:p>
+            <a:r>
+              <a:rPr lang="pl-PL" sz="1600" b="1" dirty="0"/>
+              <a:t>export </a:t>
+            </a:r>
+            <a:r>
+              <a:rPr lang="pl-PL" sz="1600" b="1" dirty="0" err="1"/>
+              <a:t>const</a:t>
+            </a:r>
+            <a:r>
+              <a:rPr lang="pl-PL" sz="1600" b="1" dirty="0"/>
+              <a:t> </a:t>
+            </a:r>
+            <a:r>
+              <a:rPr lang="pl-PL" sz="1600" b="1" dirty="0" err="1"/>
+              <a:t>store</a:t>
+            </a:r>
+            <a:r>
+              <a:rPr lang="pl-PL" sz="1600" b="1" dirty="0"/>
+              <a:t> = </a:t>
+            </a:r>
+            <a:r>
+              <a:rPr lang="pl-PL" sz="1600" b="1" dirty="0" err="1"/>
+              <a:t>configureStore</a:t>
+            </a:r>
+            <a:r>
+              <a:rPr lang="pl-PL" sz="1600" b="1" dirty="0"/>
+              <a:t>({</a:t>
+            </a:r>
+          </a:p>
+          <a:p>
+            <a:r>
+              <a:rPr lang="pl-PL" sz="1600" b="1" dirty="0"/>
+              <a:t>    </a:t>
+            </a:r>
+            <a:r>
+              <a:rPr lang="pl-PL" sz="1600" b="1" dirty="0" err="1"/>
+              <a:t>reducer</a:t>
+            </a:r>
+            <a:r>
+              <a:rPr lang="pl-PL" sz="1600" b="1" dirty="0"/>
+              <a:t>: {</a:t>
+            </a:r>
+          </a:p>
+          <a:p>
+            <a:r>
+              <a:rPr lang="pl-PL" sz="1600" b="1" dirty="0"/>
+              <a:t>        </a:t>
+            </a:r>
+            <a:r>
+              <a:rPr lang="pl-PL" sz="1600" b="1" dirty="0" err="1"/>
+              <a:t>counter</a:t>
+            </a:r>
+            <a:r>
+              <a:rPr lang="pl-PL" sz="1600" b="1" dirty="0"/>
+              <a:t>: </a:t>
+            </a:r>
+            <a:r>
+              <a:rPr lang="pl-PL" sz="1600" b="1" dirty="0" err="1"/>
+              <a:t>persistedReducer</a:t>
+            </a:r>
+            <a:endParaRPr lang="pl-PL" sz="1600" b="1" dirty="0"/>
+          </a:p>
+          <a:p>
+            <a:r>
+              <a:rPr lang="pl-PL" sz="1600" b="1" dirty="0"/>
+              <a:t>    }</a:t>
+            </a:r>
+          </a:p>
+          <a:p>
+            <a:r>
+              <a:rPr lang="pl-PL" sz="1600" b="1" dirty="0"/>
+              <a:t>})</a:t>
+            </a:r>
+          </a:p>
+          <a:p>
+            <a:r>
+              <a:rPr lang="pl-PL" sz="1600" b="1" dirty="0"/>
+              <a:t>export </a:t>
+            </a:r>
+            <a:r>
+              <a:rPr lang="pl-PL" sz="1600" b="1" dirty="0" err="1"/>
+              <a:t>const</a:t>
+            </a:r>
+            <a:r>
+              <a:rPr lang="pl-PL" sz="1600" b="1" dirty="0"/>
+              <a:t> </a:t>
+            </a:r>
+            <a:r>
+              <a:rPr lang="pl-PL" sz="1600" b="1" dirty="0" err="1"/>
+              <a:t>persistor</a:t>
+            </a:r>
+            <a:r>
+              <a:rPr lang="pl-PL" sz="1600" b="1" dirty="0"/>
+              <a:t> = </a:t>
+            </a:r>
+            <a:r>
+              <a:rPr lang="pl-PL" sz="1600" b="1" dirty="0" err="1"/>
+              <a:t>persistStore</a:t>
+            </a:r>
+            <a:r>
+              <a:rPr lang="pl-PL" sz="1600" b="1" dirty="0"/>
+              <a:t>(</a:t>
+            </a:r>
+            <a:r>
+              <a:rPr lang="pl-PL" sz="1600" b="1" dirty="0" err="1"/>
+              <a:t>store</a:t>
+            </a:r>
+            <a:r>
+              <a:rPr lang="pl-PL" sz="1600" b="1" dirty="0"/>
+              <a:t>)</a:t>
             </a:r>
           </a:p>
         </p:txBody>
       </p:sp>
-      <p:pic>
-        <p:nvPicPr>
-          <p:cNvPr id="4" name="Obraz 3">
+      <p:sp>
+        <p:nvSpPr>
+          <p:cNvPr id="4" name="pole tekstowe 3">
             <a:extLst>
               <a:ext uri="{FF2B5EF4-FFF2-40B4-BE49-F238E27FC236}">
-                <a16:creationId xmlns:a16="http://schemas.microsoft.com/office/drawing/2014/main" id="{675F4CF4-51BE-FF14-2E4F-D1A7888195DE}"/>
+                <a16:creationId xmlns:a16="http://schemas.microsoft.com/office/drawing/2014/main" id="{50AD724A-E249-11CA-C7FA-82A2E5476B84}"/>
               </a:ext>
             </a:extLst>
           </p:cNvPr>
-          <p:cNvPicPr>
-            <a:picLocks noChangeAspect="1"/>
-          </p:cNvPicPr>
+          <p:cNvSpPr txBox="1"/>
           <p:nvPr/>
-        </p:nvPicPr>
-        <p:blipFill>
-          <a:blip r:embed="rId5"/>
-          <a:stretch>
-            <a:fillRect/>
-          </a:stretch>
-        </p:blipFill>
+        </p:nvSpPr>
         <p:spPr>
           <a:xfrm>
-            <a:off x="5385054" y="2615055"/>
-            <a:ext cx="6770370" cy="4231481"/>
+            <a:off x="6180299" y="1376264"/>
+            <a:ext cx="6011701" cy="5016758"/>
           </a:xfrm>
           <a:prstGeom prst="rect">
             <a:avLst/>
           </a:prstGeom>
+          <a:noFill/>
         </p:spPr>
-      </p:pic>
-      <p:pic>
-        <p:nvPicPr>
-          <p:cNvPr id="7" name="Obraz 6">
-            <a:extLst>
-              <a:ext uri="{FF2B5EF4-FFF2-40B4-BE49-F238E27FC236}">
-                <a16:creationId xmlns:a16="http://schemas.microsoft.com/office/drawing/2014/main" id="{D0795CBA-B333-4679-07E3-4C6C3A3B5CE7}"/>
-              </a:ext>
-            </a:extLst>
-          </p:cNvPr>
-          <p:cNvPicPr>
-            <a:picLocks noChangeAspect="1"/>
-          </p:cNvPicPr>
-          <p:nvPr/>
-        </p:nvPicPr>
-        <p:blipFill>
-          <a:blip r:embed="rId6"/>
-          <a:stretch>
-            <a:fillRect/>
-          </a:stretch>
-        </p:blipFill>
-        <p:spPr>
-          <a:xfrm>
-            <a:off x="195693" y="2543977"/>
-            <a:ext cx="5005861" cy="4302559"/>
-          </a:xfrm>
-          <a:prstGeom prst="rect">
-            <a:avLst/>
-          </a:prstGeom>
-        </p:spPr>
-      </p:pic>
+        <p:txBody>
+          <a:bodyPr wrap="square" rtlCol="0">
+            <a:spAutoFit/>
+          </a:bodyPr>
+          <a:lstStyle/>
+          <a:p>
+            <a:r>
+              <a:rPr lang="pl-PL" sz="1600" b="1" dirty="0"/>
+              <a:t>import { </a:t>
+            </a:r>
+            <a:r>
+              <a:rPr lang="pl-PL" sz="1600" b="1" dirty="0" err="1"/>
+              <a:t>useSelector</a:t>
+            </a:r>
+            <a:r>
+              <a:rPr lang="pl-PL" sz="1600" b="1" dirty="0"/>
+              <a:t>, </a:t>
+            </a:r>
+            <a:r>
+              <a:rPr lang="pl-PL" sz="1600" b="1" dirty="0" err="1"/>
+              <a:t>useDispatch</a:t>
+            </a:r>
+            <a:r>
+              <a:rPr lang="pl-PL" sz="1600" b="1" dirty="0"/>
+              <a:t> } from "</a:t>
+            </a:r>
+            <a:r>
+              <a:rPr lang="pl-PL" sz="1600" b="1" dirty="0" err="1"/>
+              <a:t>react-redux</a:t>
+            </a:r>
+            <a:r>
+              <a:rPr lang="pl-PL" sz="1600" b="1" dirty="0"/>
+              <a:t>";</a:t>
+            </a:r>
+          </a:p>
+          <a:p>
+            <a:r>
+              <a:rPr lang="pl-PL" sz="1600" b="1" dirty="0"/>
+              <a:t>import { </a:t>
+            </a:r>
+            <a:r>
+              <a:rPr lang="pl-PL" sz="1600" b="1" dirty="0" err="1"/>
+              <a:t>increment</a:t>
+            </a:r>
+            <a:r>
+              <a:rPr lang="pl-PL" sz="1600" b="1" dirty="0"/>
+              <a:t>, reset } from "./</a:t>
+            </a:r>
+            <a:r>
+              <a:rPr lang="pl-PL" sz="1600" b="1" dirty="0" err="1"/>
+              <a:t>counterSlice</a:t>
+            </a:r>
+            <a:r>
+              <a:rPr lang="pl-PL" sz="1600" b="1" dirty="0"/>
+              <a:t>";</a:t>
+            </a:r>
+          </a:p>
+          <a:p>
+            <a:endParaRPr lang="pl-PL" sz="1600" b="1" dirty="0"/>
+          </a:p>
+          <a:p>
+            <a:r>
+              <a:rPr lang="pl-PL" sz="1600" b="1" dirty="0"/>
+              <a:t>  </a:t>
+            </a:r>
+            <a:r>
+              <a:rPr lang="pl-PL" sz="1600" b="1" dirty="0" err="1"/>
+              <a:t>function</a:t>
+            </a:r>
+            <a:r>
+              <a:rPr lang="pl-PL" sz="1600" b="1" dirty="0"/>
+              <a:t> </a:t>
+            </a:r>
+            <a:r>
+              <a:rPr lang="pl-PL" sz="1600" b="1" dirty="0" err="1"/>
+              <a:t>App</a:t>
+            </a:r>
+            <a:r>
+              <a:rPr lang="pl-PL" sz="1600" b="1" dirty="0"/>
+              <a:t>() {</a:t>
+            </a:r>
+          </a:p>
+          <a:p>
+            <a:r>
+              <a:rPr lang="pl-PL" sz="1600" b="1" dirty="0"/>
+              <a:t>  </a:t>
+            </a:r>
+            <a:r>
+              <a:rPr lang="pl-PL" sz="1600" b="1" dirty="0" err="1"/>
+              <a:t>const</a:t>
+            </a:r>
+            <a:r>
+              <a:rPr lang="pl-PL" sz="1600" b="1" dirty="0"/>
+              <a:t> </a:t>
+            </a:r>
+            <a:r>
+              <a:rPr lang="pl-PL" sz="1600" b="1" dirty="0" err="1"/>
+              <a:t>value</a:t>
+            </a:r>
+            <a:r>
+              <a:rPr lang="pl-PL" sz="1600" b="1" dirty="0"/>
+              <a:t> = </a:t>
+            </a:r>
+            <a:r>
+              <a:rPr lang="pl-PL" sz="1600" b="1" dirty="0" err="1"/>
+              <a:t>useSelector</a:t>
+            </a:r>
+            <a:r>
+              <a:rPr lang="pl-PL" sz="1600" b="1" dirty="0"/>
+              <a:t>((</a:t>
+            </a:r>
+            <a:r>
+              <a:rPr lang="pl-PL" sz="1600" b="1" dirty="0" err="1"/>
+              <a:t>state</a:t>
+            </a:r>
+            <a:r>
+              <a:rPr lang="pl-PL" sz="1600" b="1" dirty="0"/>
+              <a:t>) =&gt; </a:t>
+            </a:r>
+            <a:r>
+              <a:rPr lang="pl-PL" sz="1600" b="1" dirty="0" err="1"/>
+              <a:t>state.counter.value</a:t>
+            </a:r>
+            <a:r>
+              <a:rPr lang="pl-PL" sz="1600" b="1" dirty="0"/>
+              <a:t>)</a:t>
+            </a:r>
+          </a:p>
+          <a:p>
+            <a:r>
+              <a:rPr lang="pl-PL" sz="1600" b="1" dirty="0"/>
+              <a:t>  </a:t>
+            </a:r>
+            <a:r>
+              <a:rPr lang="pl-PL" sz="1600" b="1" dirty="0" err="1"/>
+              <a:t>const</a:t>
+            </a:r>
+            <a:r>
+              <a:rPr lang="pl-PL" sz="1600" b="1" dirty="0"/>
+              <a:t> </a:t>
+            </a:r>
+            <a:r>
+              <a:rPr lang="pl-PL" sz="1600" b="1" dirty="0" err="1"/>
+              <a:t>dispatch</a:t>
+            </a:r>
+            <a:r>
+              <a:rPr lang="pl-PL" sz="1600" b="1" dirty="0"/>
+              <a:t> = </a:t>
+            </a:r>
+            <a:r>
+              <a:rPr lang="pl-PL" sz="1600" b="1" dirty="0" err="1"/>
+              <a:t>useDispatch</a:t>
+            </a:r>
+            <a:r>
+              <a:rPr lang="pl-PL" sz="1600" b="1" dirty="0"/>
+              <a:t>()</a:t>
+            </a:r>
+          </a:p>
+          <a:p>
+            <a:r>
+              <a:rPr lang="pl-PL" sz="1600" b="1" dirty="0"/>
+              <a:t>  return (</a:t>
+            </a:r>
+          </a:p>
+          <a:p>
+            <a:r>
+              <a:rPr lang="pl-PL" sz="1600" b="1" dirty="0"/>
+              <a:t>    &lt;div style={{ </a:t>
+            </a:r>
+            <a:r>
+              <a:rPr lang="pl-PL" sz="1600" b="1" dirty="0" err="1"/>
+              <a:t>textAlign</a:t>
+            </a:r>
+            <a:r>
+              <a:rPr lang="pl-PL" sz="1600" b="1" dirty="0"/>
+              <a:t>: '</a:t>
+            </a:r>
+            <a:r>
+              <a:rPr lang="pl-PL" sz="1600" b="1" dirty="0" err="1"/>
+              <a:t>center</a:t>
+            </a:r>
+            <a:r>
+              <a:rPr lang="pl-PL" sz="1600" b="1" dirty="0"/>
+              <a:t>', </a:t>
+            </a:r>
+            <a:r>
+              <a:rPr lang="pl-PL" sz="1600" b="1" dirty="0" err="1"/>
+              <a:t>marginTop</a:t>
+            </a:r>
+            <a:r>
+              <a:rPr lang="pl-PL" sz="1600" b="1" dirty="0"/>
+              <a:t>: '50px'}}&gt;</a:t>
+            </a:r>
+          </a:p>
+          <a:p>
+            <a:r>
+              <a:rPr lang="pl-PL" sz="1600" b="1" dirty="0"/>
+              <a:t>      &lt;h1&gt;Prezentacja: </a:t>
+            </a:r>
+            <a:r>
+              <a:rPr lang="pl-PL" sz="1600" b="1" dirty="0" err="1"/>
+              <a:t>Redux</a:t>
+            </a:r>
+            <a:r>
+              <a:rPr lang="pl-PL" sz="1600" b="1" dirty="0"/>
+              <a:t>&lt;/h1&gt;</a:t>
+            </a:r>
+          </a:p>
+          <a:p>
+            <a:r>
+              <a:rPr lang="pl-PL" sz="1600" b="1" dirty="0"/>
+              <a:t>      &lt;h2&gt; 🐻 {</a:t>
+            </a:r>
+            <a:r>
+              <a:rPr lang="pl-PL" sz="1600" b="1" dirty="0" err="1"/>
+              <a:t>value</a:t>
+            </a:r>
+            <a:r>
+              <a:rPr lang="pl-PL" sz="1600" b="1" dirty="0"/>
+              <a:t>}&lt;/h2&gt;</a:t>
+            </a:r>
+          </a:p>
+          <a:p>
+            <a:r>
+              <a:rPr lang="pl-PL" sz="1600" b="1" dirty="0"/>
+              <a:t>      &lt;</a:t>
+            </a:r>
+            <a:r>
+              <a:rPr lang="pl-PL" sz="1600" b="1" dirty="0" err="1"/>
+              <a:t>button</a:t>
+            </a:r>
+            <a:r>
+              <a:rPr lang="pl-PL" sz="1600" b="1" dirty="0"/>
+              <a:t> </a:t>
+            </a:r>
+            <a:r>
+              <a:rPr lang="pl-PL" sz="1600" b="1" dirty="0" err="1"/>
+              <a:t>onClick</a:t>
+            </a:r>
+            <a:r>
+              <a:rPr lang="pl-PL" sz="1600" b="1" dirty="0"/>
+              <a:t>={() =&gt; </a:t>
+            </a:r>
+            <a:r>
+              <a:rPr lang="pl-PL" sz="1600" b="1" dirty="0" err="1"/>
+              <a:t>dispatch</a:t>
+            </a:r>
+            <a:r>
+              <a:rPr lang="pl-PL" sz="1600" b="1" dirty="0"/>
+              <a:t>(</a:t>
+            </a:r>
+            <a:r>
+              <a:rPr lang="pl-PL" sz="1600" b="1" dirty="0" err="1"/>
+              <a:t>increment</a:t>
+            </a:r>
+            <a:r>
+              <a:rPr lang="pl-PL" sz="1600" b="1" dirty="0"/>
+              <a:t>())}&gt;</a:t>
+            </a:r>
+          </a:p>
+          <a:p>
+            <a:r>
+              <a:rPr lang="pl-PL" sz="1600" b="1" dirty="0"/>
+              <a:t>        Dodaj misia</a:t>
+            </a:r>
+          </a:p>
+          <a:p>
+            <a:r>
+              <a:rPr lang="pl-PL" sz="1600" b="1" dirty="0"/>
+              <a:t>      &lt;/</a:t>
+            </a:r>
+            <a:r>
+              <a:rPr lang="pl-PL" sz="1600" b="1" dirty="0" err="1"/>
+              <a:t>button</a:t>
+            </a:r>
+            <a:r>
+              <a:rPr lang="pl-PL" sz="1600" b="1" dirty="0"/>
+              <a:t>&gt;</a:t>
+            </a:r>
+          </a:p>
+          <a:p>
+            <a:r>
+              <a:rPr lang="pl-PL" sz="1600" b="1" dirty="0"/>
+              <a:t>      &lt;</a:t>
+            </a:r>
+            <a:r>
+              <a:rPr lang="pl-PL" sz="1600" b="1" dirty="0" err="1"/>
+              <a:t>button</a:t>
+            </a:r>
+            <a:r>
+              <a:rPr lang="pl-PL" sz="1600" b="1" dirty="0"/>
+              <a:t> </a:t>
+            </a:r>
+            <a:r>
+              <a:rPr lang="pl-PL" sz="1600" b="1" dirty="0" err="1"/>
+              <a:t>onClick</a:t>
+            </a:r>
+            <a:r>
+              <a:rPr lang="pl-PL" sz="1600" b="1" dirty="0"/>
+              <a:t>={() =&gt; </a:t>
+            </a:r>
+            <a:r>
+              <a:rPr lang="pl-PL" sz="1600" b="1" dirty="0" err="1"/>
+              <a:t>dispatch</a:t>
+            </a:r>
+            <a:r>
+              <a:rPr lang="pl-PL" sz="1600" b="1" dirty="0"/>
+              <a:t>(reset())}&gt;</a:t>
+            </a:r>
+          </a:p>
+          <a:p>
+            <a:r>
+              <a:rPr lang="pl-PL" sz="1600" b="1" dirty="0"/>
+              <a:t>        Reset</a:t>
+            </a:r>
+          </a:p>
+          <a:p>
+            <a:r>
+              <a:rPr lang="pl-PL" sz="1600" b="1" dirty="0"/>
+              <a:t>      &lt;/</a:t>
+            </a:r>
+            <a:r>
+              <a:rPr lang="pl-PL" sz="1600" b="1" dirty="0" err="1"/>
+              <a:t>button</a:t>
+            </a:r>
+            <a:r>
+              <a:rPr lang="pl-PL" sz="1600" b="1" dirty="0"/>
+              <a:t>&gt;</a:t>
+            </a:r>
+          </a:p>
+          <a:p>
+            <a:r>
+              <a:rPr lang="pl-PL" sz="1600" b="1" dirty="0"/>
+              <a:t>    &lt;/div&gt;</a:t>
+            </a:r>
+          </a:p>
+          <a:p>
+            <a:r>
+              <a:rPr lang="pl-PL" sz="1600" b="1" dirty="0"/>
+              <a:t>  )</a:t>
+            </a:r>
+          </a:p>
+          <a:p>
+            <a:r>
+              <a:rPr lang="pl-PL" sz="1600" b="1" dirty="0"/>
+              <a:t>}</a:t>
+            </a:r>
+          </a:p>
+          <a:p>
+            <a:r>
+              <a:rPr lang="pl-PL" sz="1600" b="1" dirty="0"/>
+              <a:t>export </a:t>
+            </a:r>
+            <a:r>
+              <a:rPr lang="pl-PL" sz="1600" b="1" dirty="0" err="1"/>
+              <a:t>default</a:t>
+            </a:r>
+            <a:r>
+              <a:rPr lang="pl-PL" sz="1600" b="1" dirty="0"/>
+              <a:t> </a:t>
+            </a:r>
+            <a:r>
+              <a:rPr lang="pl-PL" sz="1600" b="1" dirty="0" err="1"/>
+              <a:t>App</a:t>
+            </a:r>
+            <a:r>
+              <a:rPr lang="pl-PL" sz="1600" b="1" dirty="0"/>
+              <a:t>;</a:t>
+            </a:r>
+          </a:p>
+        </p:txBody>
+      </p:sp>
     </p:spTree>
     <p:extLst>
       <p:ext uri="{BB962C8B-B14F-4D97-AF65-F5344CB8AC3E}">
-        <p14:creationId xmlns:p14="http://schemas.microsoft.com/office/powerpoint/2010/main" val="426389140"/>
+        <p14:creationId xmlns:p14="http://schemas.microsoft.com/office/powerpoint/2010/main" val="2852824462"/>
       </p:ext>
     </p:extLst>
   </p:cSld>
@@ -33282,34 +36203,6 @@
 </file>
 
 <file path=customXml/item1.xml><?xml version="1.0" encoding="utf-8"?>
-<?mso-contentType ?>
-<FormTemplates xmlns="http://schemas.microsoft.com/sharepoint/v3/contenttype/forms">
-  <Display>DocumentLibraryForm</Display>
-  <Edit>DocumentLibraryForm</Edit>
-  <New>DocumentLibraryForm</New>
-</FormTemplates>
-</file>
-
-<file path=customXml/item2.xml><?xml version="1.0" encoding="utf-8"?>
-<p:properties xmlns:p="http://schemas.microsoft.com/office/2006/metadata/properties" xmlns:xsi="http://www.w3.org/2001/XMLSchema-instance" xmlns:pc="http://schemas.microsoft.com/office/infopath/2007/PartnerControls">
-  <documentManagement>
-    <_ip_UnifiedCompliancePolicyUIAction xmlns="http://schemas.microsoft.com/sharepoint/v3" xsi:nil="true"/>
-    <Image xmlns="71af3243-3dd4-4a8d-8c0d-dd76da1f02a5">
-      <Url xsi:nil="true"/>
-      <Description xsi:nil="true"/>
-    </Image>
-    <Status xmlns="71af3243-3dd4-4a8d-8c0d-dd76da1f02a5">Not started</Status>
-    <_ip_UnifiedCompliancePolicyProperties xmlns="http://schemas.microsoft.com/sharepoint/v3" xsi:nil="true"/>
-    <lcf76f155ced4ddcb4097134ff3c332f xmlns="71af3243-3dd4-4a8d-8c0d-dd76da1f02a5">
-      <Terms xmlns="http://schemas.microsoft.com/office/infopath/2007/PartnerControls"/>
-    </lcf76f155ced4ddcb4097134ff3c332f>
-    <TaxCatchAll xmlns="230e9df3-be65-4c73-a93b-d1236ebd677e"/>
-    <MediaServiceKeyPoints xmlns="71af3243-3dd4-4a8d-8c0d-dd76da1f02a5" xsi:nil="true"/>
-  </documentManagement>
-</p:properties>
-</file>
-
-<file path=customXml/item3.xml><?xml version="1.0" encoding="utf-8"?>
 <ct:contentTypeSchema xmlns:ct="http://schemas.microsoft.com/office/2006/metadata/contentType" xmlns:ma="http://schemas.microsoft.com/office/2006/metadata/properties/metaAttributes" ct:_="" ma:_="" ma:contentTypeName="Document" ma:contentTypeID="0x01010079F111ED35F8CC479449609E8A0923A6" ma:contentTypeVersion="18" ma:contentTypeDescription="Create a new document." ma:contentTypeScope="" ma:versionID="22a266b9fa9a230c5a512669d8b298c3">
   <xsd:schema xmlns:xsd="http://www.w3.org/2001/XMLSchema" xmlns:xs="http://www.w3.org/2001/XMLSchema" xmlns:p="http://schemas.microsoft.com/office/2006/metadata/properties" xmlns:ns1="http://schemas.microsoft.com/sharepoint/v3" xmlns:ns2="71af3243-3dd4-4a8d-8c0d-dd76da1f02a5" xmlns:ns3="16c05727-aa75-4e4a-9b5f-8a80a1165891" xmlns:ns4="230e9df3-be65-4c73-a93b-d1236ebd677e" targetNamespace="http://schemas.microsoft.com/office/2006/metadata/properties" ma:root="true" ma:fieldsID="eddc33fff6b14141ee5c74a0d29ea6a1" ns1:_="" ns2:_="" ns3:_="" ns4:_="">
     <xsd:import namespace="http://schemas.microsoft.com/sharepoint/v3"/>
@@ -33585,27 +36478,35 @@
 </ct:contentTypeSchema>
 </file>
 
-<file path=customXml/itemProps1.xml><?xml version="1.0" encoding="utf-8"?>
-<ds:datastoreItem xmlns:ds="http://schemas.openxmlformats.org/officeDocument/2006/customXml" ds:itemID="{F49FD94B-CF2B-4485-954E-6805E96E51FA}">
-  <ds:schemaRefs>
-    <ds:schemaRef ds:uri="http://schemas.microsoft.com/sharepoint/v3/contenttype/forms"/>
-  </ds:schemaRefs>
-</ds:datastoreItem>
+<file path=customXml/item2.xml><?xml version="1.0" encoding="utf-8"?>
+<?mso-contentType ?>
+<FormTemplates xmlns="http://schemas.microsoft.com/sharepoint/v3/contenttype/forms">
+  <Display>DocumentLibraryForm</Display>
+  <Edit>DocumentLibraryForm</Edit>
+  <New>DocumentLibraryForm</New>
+</FormTemplates>
 </file>
 
-<file path=customXml/itemProps2.xml><?xml version="1.0" encoding="utf-8"?>
-<ds:datastoreItem xmlns:ds="http://schemas.openxmlformats.org/officeDocument/2006/customXml" ds:itemID="{538316A4-DB9D-4B40-83D1-0433996D54B0}">
-  <ds:schemaRefs>
-    <ds:schemaRef ds:uri="http://schemas.microsoft.com/office/2006/metadata/properties"/>
-    <ds:schemaRef ds:uri="http://schemas.microsoft.com/office/infopath/2007/PartnerControls"/>
-    <ds:schemaRef ds:uri="http://schemas.microsoft.com/sharepoint/v3"/>
-    <ds:schemaRef ds:uri="71af3243-3dd4-4a8d-8c0d-dd76da1f02a5"/>
-    <ds:schemaRef ds:uri="230e9df3-be65-4c73-a93b-d1236ebd677e"/>
-  </ds:schemaRefs>
-</ds:datastoreItem>
+<file path=customXml/item3.xml><?xml version="1.0" encoding="utf-8"?>
+<p:properties xmlns:p="http://schemas.microsoft.com/office/2006/metadata/properties" xmlns:xsi="http://www.w3.org/2001/XMLSchema-instance" xmlns:pc="http://schemas.microsoft.com/office/infopath/2007/PartnerControls">
+  <documentManagement>
+    <_ip_UnifiedCompliancePolicyUIAction xmlns="http://schemas.microsoft.com/sharepoint/v3" xsi:nil="true"/>
+    <Image xmlns="71af3243-3dd4-4a8d-8c0d-dd76da1f02a5">
+      <Url xsi:nil="true"/>
+      <Description xsi:nil="true"/>
+    </Image>
+    <Status xmlns="71af3243-3dd4-4a8d-8c0d-dd76da1f02a5">Not started</Status>
+    <_ip_UnifiedCompliancePolicyProperties xmlns="http://schemas.microsoft.com/sharepoint/v3" xsi:nil="true"/>
+    <lcf76f155ced4ddcb4097134ff3c332f xmlns="71af3243-3dd4-4a8d-8c0d-dd76da1f02a5">
+      <Terms xmlns="http://schemas.microsoft.com/office/infopath/2007/PartnerControls"/>
+    </lcf76f155ced4ddcb4097134ff3c332f>
+    <TaxCatchAll xmlns="230e9df3-be65-4c73-a93b-d1236ebd677e"/>
+    <MediaServiceKeyPoints xmlns="71af3243-3dd4-4a8d-8c0d-dd76da1f02a5" xsi:nil="true"/>
+  </documentManagement>
+</p:properties>
 </file>
 
-<file path=customXml/itemProps3.xml><?xml version="1.0" encoding="utf-8"?>
+<file path=customXml/itemProps1.xml><?xml version="1.0" encoding="utf-8"?>
 <ds:datastoreItem xmlns:ds="http://schemas.openxmlformats.org/officeDocument/2006/customXml" ds:itemID="{1E5C9C91-7BEA-497B-8B74-808BB0864508}">
   <ds:schemaRefs>
     <ds:schemaRef ds:uri="http://schemas.microsoft.com/office/2006/metadata/contentType"/>
@@ -33626,6 +36527,26 @@
 </ds:datastoreItem>
 </file>
 
+<file path=customXml/itemProps2.xml><?xml version="1.0" encoding="utf-8"?>
+<ds:datastoreItem xmlns:ds="http://schemas.openxmlformats.org/officeDocument/2006/customXml" ds:itemID="{F49FD94B-CF2B-4485-954E-6805E96E51FA}">
+  <ds:schemaRefs>
+    <ds:schemaRef ds:uri="http://schemas.microsoft.com/sharepoint/v3/contenttype/forms"/>
+  </ds:schemaRefs>
+</ds:datastoreItem>
+</file>
+
+<file path=customXml/itemProps3.xml><?xml version="1.0" encoding="utf-8"?>
+<ds:datastoreItem xmlns:ds="http://schemas.openxmlformats.org/officeDocument/2006/customXml" ds:itemID="{538316A4-DB9D-4B40-83D1-0433996D54B0}">
+  <ds:schemaRefs>
+    <ds:schemaRef ds:uri="http://schemas.microsoft.com/office/2006/metadata/properties"/>
+    <ds:schemaRef ds:uri="http://schemas.microsoft.com/office/infopath/2007/PartnerControls"/>
+    <ds:schemaRef ds:uri="http://schemas.microsoft.com/sharepoint/v3"/>
+    <ds:schemaRef ds:uri="71af3243-3dd4-4a8d-8c0d-dd76da1f02a5"/>
+    <ds:schemaRef ds:uri="230e9df3-be65-4c73-a93b-d1236ebd677e"/>
+  </ds:schemaRefs>
+</ds:datastoreItem>
+</file>
+
 <file path=docMetadata/LabelInfo.xml><?xml version="1.0" encoding="utf-8"?>
 <clbl:labelList xmlns:clbl="http://schemas.microsoft.com/office/2020/mipLabelMetadata">
   <clbl:label id="{f42aa342-8706-4288-bd11-ebb85995028c}" enabled="1" method="Standard" siteId="{72f988bf-86f1-41af-91ab-2d7cd011db47}" removed="0"/>
